--- a/slides/VS sql project - sql saturday 2025.pptx
+++ b/slides/VS sql project - sql saturday 2025.pptx
@@ -5,7 +5,7 @@
     <p:sldMasterId id="2147483648" r:id="rId1"/>
   </p:sldMasterIdLst>
   <p:notesMasterIdLst>
-    <p:notesMasterId r:id="rId34"/>
+    <p:notesMasterId r:id="rId35"/>
   </p:notesMasterIdLst>
   <p:sldIdLst>
     <p:sldId id="256" r:id="rId2"/>
@@ -17,29 +17,30 @@
     <p:sldId id="261" r:id="rId8"/>
     <p:sldId id="262" r:id="rId9"/>
     <p:sldId id="295" r:id="rId10"/>
-    <p:sldId id="277" r:id="rId11"/>
-    <p:sldId id="288" r:id="rId12"/>
-    <p:sldId id="264" r:id="rId13"/>
-    <p:sldId id="275" r:id="rId14"/>
-    <p:sldId id="281" r:id="rId15"/>
-    <p:sldId id="283" r:id="rId16"/>
-    <p:sldId id="282" r:id="rId17"/>
-    <p:sldId id="284" r:id="rId18"/>
-    <p:sldId id="286" r:id="rId19"/>
-    <p:sldId id="285" r:id="rId20"/>
-    <p:sldId id="291" r:id="rId21"/>
-    <p:sldId id="290" r:id="rId22"/>
-    <p:sldId id="274" r:id="rId23"/>
-    <p:sldId id="287" r:id="rId24"/>
-    <p:sldId id="289" r:id="rId25"/>
-    <p:sldId id="265" r:id="rId26"/>
-    <p:sldId id="272" r:id="rId27"/>
-    <p:sldId id="292" r:id="rId28"/>
-    <p:sldId id="271" r:id="rId29"/>
-    <p:sldId id="276" r:id="rId30"/>
-    <p:sldId id="270" r:id="rId31"/>
-    <p:sldId id="266" r:id="rId32"/>
-    <p:sldId id="294" r:id="rId33"/>
+    <p:sldId id="296" r:id="rId11"/>
+    <p:sldId id="277" r:id="rId12"/>
+    <p:sldId id="288" r:id="rId13"/>
+    <p:sldId id="264" r:id="rId14"/>
+    <p:sldId id="275" r:id="rId15"/>
+    <p:sldId id="281" r:id="rId16"/>
+    <p:sldId id="283" r:id="rId17"/>
+    <p:sldId id="282" r:id="rId18"/>
+    <p:sldId id="284" r:id="rId19"/>
+    <p:sldId id="286" r:id="rId20"/>
+    <p:sldId id="285" r:id="rId21"/>
+    <p:sldId id="291" r:id="rId22"/>
+    <p:sldId id="290" r:id="rId23"/>
+    <p:sldId id="274" r:id="rId24"/>
+    <p:sldId id="287" r:id="rId25"/>
+    <p:sldId id="289" r:id="rId26"/>
+    <p:sldId id="265" r:id="rId27"/>
+    <p:sldId id="272" r:id="rId28"/>
+    <p:sldId id="292" r:id="rId29"/>
+    <p:sldId id="271" r:id="rId30"/>
+    <p:sldId id="276" r:id="rId31"/>
+    <p:sldId id="270" r:id="rId32"/>
+    <p:sldId id="266" r:id="rId33"/>
+    <p:sldId id="294" r:id="rId34"/>
   </p:sldIdLst>
   <p:sldSz cx="12192000" cy="6858000"/>
   <p:notesSz cx="7102475" cy="9388475"/>
@@ -4421,6 +4422,324 @@
         <p:cNvPr id="1" name="">
           <a:extLst>
             <a:ext uri="{FF2B5EF4-FFF2-40B4-BE49-F238E27FC236}">
+              <a16:creationId xmlns:a16="http://schemas.microsoft.com/office/drawing/2014/main" id="{4788671F-F0BC-705A-2D59-60D39D9C7D9E}"/>
+            </a:ext>
+          </a:extLst>
+        </p:cNvPr>
+        <p:cNvGrpSpPr/>
+        <p:nvPr/>
+      </p:nvGrpSpPr>
+      <p:grpSpPr>
+        <a:xfrm>
+          <a:off x="0" y="0"/>
+          <a:ext cx="0" cy="0"/>
+          <a:chOff x="0" y="0"/>
+          <a:chExt cx="0" cy="0"/>
+        </a:xfrm>
+      </p:grpSpPr>
+      <p:sp>
+        <p:nvSpPr>
+          <p:cNvPr id="2" name="Slide Image Placeholder 1">
+            <a:extLst>
+              <a:ext uri="{FF2B5EF4-FFF2-40B4-BE49-F238E27FC236}">
+                <a16:creationId xmlns:a16="http://schemas.microsoft.com/office/drawing/2014/main" id="{09C2BB3A-0CAE-1FA5-8F85-F4BB2FDB3F52}"/>
+              </a:ext>
+            </a:extLst>
+          </p:cNvPr>
+          <p:cNvSpPr>
+            <a:spLocks noGrp="1" noRot="1" noChangeAspect="1"/>
+          </p:cNvSpPr>
+          <p:nvPr>
+            <p:ph type="sldImg"/>
+          </p:nvPr>
+        </p:nvSpPr>
+        <p:spPr/>
+      </p:sp>
+      <p:sp>
+        <p:nvSpPr>
+          <p:cNvPr id="3" name="Notes Placeholder 2">
+            <a:extLst>
+              <a:ext uri="{FF2B5EF4-FFF2-40B4-BE49-F238E27FC236}">
+                <a16:creationId xmlns:a16="http://schemas.microsoft.com/office/drawing/2014/main" id="{C3667E2A-400A-7EED-135E-6FBA956D6921}"/>
+              </a:ext>
+            </a:extLst>
+          </p:cNvPr>
+          <p:cNvSpPr>
+            <a:spLocks noGrp="1"/>
+          </p:cNvSpPr>
+          <p:nvPr>
+            <p:ph type="body" idx="1"/>
+          </p:nvPr>
+        </p:nvSpPr>
+        <p:spPr/>
+        <p:txBody>
+          <a:bodyPr/>
+          <a:lstStyle/>
+          <a:p>
+            <a:r>
+              <a:rPr lang="en-US" dirty="0"/>
+              <a:t>Alexandria finds Visual Studio SQL Projects!</a:t>
+            </a:r>
+          </a:p>
+          <a:p>
+            <a:endParaRPr lang="en-US" dirty="0"/>
+          </a:p>
+          <a:p>
+            <a:r>
+              <a:rPr lang="en-US" dirty="0"/>
+              <a:t>To create a new SQL project, she </a:t>
+            </a:r>
+            <a:r>
+              <a:rPr lang="en-US" dirty="0" err="1"/>
+              <a:t>gwork,and</a:t>
+            </a:r>
+            <a:r>
+              <a:rPr lang="en-US" dirty="0"/>
+              <a:t> searches for the SQL template. If you do not see the template, it is possible that the component is not installed in VS. You can look for “SQL Server Data Tools” in the VS installer (VS 2026 only supports legacy style projects).</a:t>
+            </a:r>
+          </a:p>
+          <a:p>
+            <a:endParaRPr lang="en-US" dirty="0"/>
+          </a:p>
+          <a:p>
+            <a:r>
+              <a:rPr lang="en-US" dirty="0"/>
+              <a:t>When she clicks create, she fills in some typical fields that VS asks for such as the location of the folder where to put the project files.</a:t>
+            </a:r>
+          </a:p>
+          <a:p>
+            <a:endParaRPr lang="en-US" dirty="0"/>
+          </a:p>
+          <a:p>
+            <a:r>
+              <a:rPr lang="en-US" dirty="0"/>
+              <a:t>Once created, Alexandria stares at a blank project and wonder if there is a way to re-use the work she already did in her local </a:t>
+            </a:r>
+            <a:r>
+              <a:rPr lang="en-US" dirty="0" err="1"/>
+              <a:t>sql</a:t>
+            </a:r>
+            <a:r>
+              <a:rPr lang="en-US" dirty="0"/>
+              <a:t> instance. Sure enough, she find that she can right click on the project and then do “import database”. This step is something that Visual Studio will let you do once and only for projects that are blank. The wizard that pops up will ask you for the location of the database that you want to the import your structure from. I do not select the referenced logins nor the security objects and I leave the rest as defaults. You can connect to any SQL Server </a:t>
+            </a:r>
+            <a:r>
+              <a:rPr lang="en-US" dirty="0" err="1"/>
+              <a:t>db</a:t>
+            </a:r>
+            <a:r>
+              <a:rPr lang="en-US" dirty="0"/>
+              <a:t> you have access to.</a:t>
+            </a:r>
+          </a:p>
+          <a:p>
+            <a:endParaRPr lang="en-US" dirty="0"/>
+          </a:p>
+          <a:p>
+            <a:r>
+              <a:rPr lang="en-US" dirty="0"/>
+              <a:t>The Visual Studio project allows her to create folder so that she can organize the SQL code. The folders are just for organization, the do not translate to any special structure in SQL. However, you can add schemas to your </a:t>
+            </a:r>
+            <a:r>
+              <a:rPr lang="en-US" dirty="0" err="1"/>
+              <a:t>sql</a:t>
+            </a:r>
+            <a:r>
+              <a:rPr lang="en-US" dirty="0"/>
+              <a:t> project and then assign </a:t>
+            </a:r>
+            <a:r>
+              <a:rPr lang="en-US" dirty="0" err="1"/>
+              <a:t>sql</a:t>
+            </a:r>
+            <a:r>
+              <a:rPr lang="en-US" dirty="0"/>
+              <a:t> objects to those schemas. E.G. in this logical folder I have my “</a:t>
+            </a:r>
+            <a:r>
+              <a:rPr lang="en-US" dirty="0" err="1"/>
+              <a:t>api</a:t>
+            </a:r>
+            <a:r>
+              <a:rPr lang="en-US" dirty="0"/>
+              <a:t>” schema and I assign the SP in there to that schema by virtue of putting “</a:t>
+            </a:r>
+            <a:r>
+              <a:rPr lang="en-US" dirty="0" err="1"/>
+              <a:t>api</a:t>
+            </a:r>
+            <a:r>
+              <a:rPr lang="en-US" dirty="0"/>
+              <a:t>.” in the name of the procedure.</a:t>
+            </a:r>
+          </a:p>
+          <a:p>
+            <a:endParaRPr lang="en-US" dirty="0"/>
+          </a:p>
+          <a:p>
+            <a:r>
+              <a:rPr lang="en-US" dirty="0"/>
+              <a:t>Because it is a file based project, now she can push the definition to source control, just like any other VS project. If using git, I strongly suggest using the Visual Studio </a:t>
+            </a:r>
+            <a:r>
+              <a:rPr lang="en-US" dirty="0" err="1"/>
+              <a:t>gitignore</a:t>
+            </a:r>
+            <a:r>
+              <a:rPr lang="en-US" dirty="0"/>
+              <a:t> template </a:t>
+            </a:r>
+            <a:r>
+              <a:rPr lang="en-US" dirty="0" err="1"/>
+              <a:t>fro</a:t>
+            </a:r>
+            <a:r>
+              <a:rPr lang="en-US" dirty="0"/>
+              <a:t> GitHub so that no VS artifact gets into source control (example in repo).</a:t>
+            </a:r>
+          </a:p>
+          <a:p>
+            <a:endParaRPr lang="en-US" dirty="0"/>
+          </a:p>
+          <a:p>
+            <a:r>
+              <a:rPr lang="en-US" dirty="0"/>
+              <a:t>Like other VS projects Alexandria can do right click new item and she sees a plethora of items that she can add to her project. IMHO this is a great way for those not familiar with the power of </a:t>
+            </a:r>
+            <a:r>
+              <a:rPr lang="en-US" dirty="0" err="1"/>
+              <a:t>sql</a:t>
+            </a:r>
+            <a:r>
+              <a:rPr lang="en-US" dirty="0"/>
+              <a:t> server to get familiar with some of the tings that SQL server supports. </a:t>
+            </a:r>
+          </a:p>
+          <a:p>
+            <a:endParaRPr lang="en-US" dirty="0"/>
+          </a:p>
+          <a:p>
+            <a:r>
+              <a:rPr lang="en-US" dirty="0"/>
+              <a:t>One example I want to concentrate on is “roles”. I like to create the roles in my </a:t>
+            </a:r>
+            <a:r>
+              <a:rPr lang="en-US" dirty="0" err="1"/>
+              <a:t>sql</a:t>
+            </a:r>
+            <a:r>
+              <a:rPr lang="en-US" dirty="0"/>
+              <a:t> project and specify the permissions of that role in the project so that they are in source control. That way the repository is the source of truth of the available permissions. I strongly suggest avoiding giving DBO access to the entities that run your application. Take the time to define roles and be specific on what those roles can select, execute, delete, etc. See example in repo.</a:t>
+            </a:r>
+          </a:p>
+          <a:p>
+            <a:endParaRPr lang="en-US" dirty="0"/>
+          </a:p>
+          <a:p>
+            <a:r>
+              <a:rPr lang="en-US" dirty="0"/>
+              <a:t>Another example of a feature that many </a:t>
+            </a:r>
+            <a:r>
+              <a:rPr lang="en-US" dirty="0" err="1"/>
+              <a:t>devs</a:t>
+            </a:r>
+            <a:r>
+              <a:rPr lang="en-US" dirty="0"/>
+              <a:t> might not be familiar with is SQL Types. SQL types are basically aliases for SQL type definitions. They help </a:t>
+            </a:r>
+            <a:r>
+              <a:rPr lang="en-US" dirty="0" err="1"/>
+              <a:t>sql</a:t>
+            </a:r>
+            <a:r>
+              <a:rPr lang="en-US" dirty="0"/>
+              <a:t> code to be more readable and maintainable. For example, instead of using varchar(100) everywhere you need a LastName column in a table or a last name parameter in a stored procedure, you can just define a LastName type that derives from varchar(100) and use that type across all your SQL objects. See the examples here.</a:t>
+            </a:r>
+          </a:p>
+          <a:p>
+            <a:endParaRPr lang="en-US" dirty="0"/>
+          </a:p>
+          <a:p>
+            <a:r>
+              <a:rPr lang="en-US" dirty="0"/>
+              <a:t>You can also define database properties in the </a:t>
+            </a:r>
+            <a:r>
+              <a:rPr lang="en-US" dirty="0" err="1"/>
+              <a:t>sql</a:t>
+            </a:r>
+            <a:r>
+              <a:rPr lang="en-US" dirty="0"/>
+              <a:t> project, things like Read Committed and File Stream. That way when you deploy the project, the options are also set in the </a:t>
+            </a:r>
+            <a:r>
+              <a:rPr lang="en-US" dirty="0" err="1"/>
+              <a:t>db</a:t>
+            </a:r>
+            <a:r>
+              <a:rPr lang="en-US" dirty="0"/>
+              <a:t> that is receiving the deployment (we will talk about deployment later).</a:t>
+            </a:r>
+          </a:p>
+          <a:p>
+            <a:endParaRPr lang="en-US" dirty="0"/>
+          </a:p>
+          <a:p>
+            <a:endParaRPr lang="en-US" dirty="0"/>
+          </a:p>
+        </p:txBody>
+      </p:sp>
+      <p:sp>
+        <p:nvSpPr>
+          <p:cNvPr id="4" name="Slide Number Placeholder 3">
+            <a:extLst>
+              <a:ext uri="{FF2B5EF4-FFF2-40B4-BE49-F238E27FC236}">
+                <a16:creationId xmlns:a16="http://schemas.microsoft.com/office/drawing/2014/main" id="{59B1BF5F-88E0-0B89-90F5-744C4FE2FEAD}"/>
+              </a:ext>
+            </a:extLst>
+          </p:cNvPr>
+          <p:cNvSpPr>
+            <a:spLocks noGrp="1"/>
+          </p:cNvSpPr>
+          <p:nvPr>
+            <p:ph type="sldNum" sz="quarter" idx="5"/>
+          </p:nvPr>
+        </p:nvSpPr>
+        <p:spPr/>
+        <p:txBody>
+          <a:bodyPr/>
+          <a:lstStyle/>
+          <a:p>
+            <a:fld id="{CDDD3684-6E52-4019-8D61-A9B0BAC0DBD6}" type="slidenum">
+              <a:rPr lang="en-US" smtClean="0"/>
+              <a:t>10</a:t>
+            </a:fld>
+            <a:endParaRPr lang="en-US"/>
+          </a:p>
+        </p:txBody>
+      </p:sp>
+    </p:spTree>
+    <p:extLst>
+      <p:ext uri="{BB962C8B-B14F-4D97-AF65-F5344CB8AC3E}">
+        <p14:creationId xmlns:p14="http://schemas.microsoft.com/office/powerpoint/2010/main" val="256398815"/>
+      </p:ext>
+    </p:extLst>
+  </p:cSld>
+  <p:clrMapOvr>
+    <a:masterClrMapping/>
+  </p:clrMapOvr>
+</p:notes>
+</file>
+
+<file path=ppt/notesSlides/notesSlide11.xml><?xml version="1.0" encoding="utf-8"?>
+<p:notes xmlns:a="http://schemas.openxmlformats.org/drawingml/2006/main" xmlns:r="http://schemas.openxmlformats.org/officeDocument/2006/relationships" xmlns:p="http://schemas.openxmlformats.org/presentationml/2006/main">
+  <p:cSld>
+    <p:spTree>
+      <p:nvGrpSpPr>
+        <p:cNvPr id="1" name="">
+          <a:extLst>
+            <a:ext uri="{FF2B5EF4-FFF2-40B4-BE49-F238E27FC236}">
               <a16:creationId xmlns:a16="http://schemas.microsoft.com/office/drawing/2014/main" id="{A1D2AB9B-856E-B97C-A295-2F4510F67721}"/>
             </a:ext>
           </a:extLst>
@@ -4720,7 +5039,7 @@
           <a:p>
             <a:fld id="{CDDD3684-6E52-4019-8D61-A9B0BAC0DBD6}" type="slidenum">
               <a:rPr lang="en-US" smtClean="0"/>
-              <a:t>10</a:t>
+              <a:t>11</a:t>
             </a:fld>
             <a:endParaRPr lang="en-US"/>
           </a:p>
@@ -4730,616 +5049,6 @@
     <p:extLst>
       <p:ext uri="{BB962C8B-B14F-4D97-AF65-F5344CB8AC3E}">
         <p14:creationId xmlns:p14="http://schemas.microsoft.com/office/powerpoint/2010/main" val="489287715"/>
-      </p:ext>
-    </p:extLst>
-  </p:cSld>
-  <p:clrMapOvr>
-    <a:masterClrMapping/>
-  </p:clrMapOvr>
-</p:notes>
-</file>
-
-<file path=ppt/notesSlides/notesSlide11.xml><?xml version="1.0" encoding="utf-8"?>
-<p:notes xmlns:a="http://schemas.openxmlformats.org/drawingml/2006/main" xmlns:r="http://schemas.openxmlformats.org/officeDocument/2006/relationships" xmlns:p="http://schemas.openxmlformats.org/presentationml/2006/main">
-  <p:cSld>
-    <p:spTree>
-      <p:nvGrpSpPr>
-        <p:cNvPr id="1" name=""/>
-        <p:cNvGrpSpPr/>
-        <p:nvPr/>
-      </p:nvGrpSpPr>
-      <p:grpSpPr>
-        <a:xfrm>
-          <a:off x="0" y="0"/>
-          <a:ext cx="0" cy="0"/>
-          <a:chOff x="0" y="0"/>
-          <a:chExt cx="0" cy="0"/>
-        </a:xfrm>
-      </p:grpSpPr>
-      <p:sp>
-        <p:nvSpPr>
-          <p:cNvPr id="2" name="Slide Image Placeholder 1"/>
-          <p:cNvSpPr>
-            <a:spLocks noGrp="1" noRot="1" noChangeAspect="1"/>
-          </p:cNvSpPr>
-          <p:nvPr>
-            <p:ph type="sldImg"/>
-          </p:nvPr>
-        </p:nvSpPr>
-        <p:spPr/>
-      </p:sp>
-      <p:sp>
-        <p:nvSpPr>
-          <p:cNvPr id="3" name="Notes Placeholder 2"/>
-          <p:cNvSpPr>
-            <a:spLocks noGrp="1"/>
-          </p:cNvSpPr>
-          <p:nvPr>
-            <p:ph type="body" idx="1"/>
-          </p:nvPr>
-        </p:nvSpPr>
-        <p:spPr/>
-        <p:txBody>
-          <a:bodyPr/>
-          <a:lstStyle/>
-          <a:p>
-            <a:r>
-              <a:rPr lang="en-US" dirty="0"/>
-              <a:t>Alexandria is very happy with all the work she has been able to do in her SQL project. But as soon as she wants to try her work in her local laptop, she stops and wonders, how can we take this definition in this </a:t>
-            </a:r>
-            <a:r>
-              <a:rPr lang="en-US" dirty="0" err="1"/>
-              <a:t>sql</a:t>
-            </a:r>
-            <a:r>
-              <a:rPr lang="en-US" dirty="0"/>
-              <a:t> project and put it in her local </a:t>
-            </a:r>
-            <a:r>
-              <a:rPr lang="en-US" dirty="0" err="1"/>
-              <a:t>sql</a:t>
-            </a:r>
-            <a:r>
-              <a:rPr lang="en-US" dirty="0"/>
-              <a:t> instance? The SQL object in the project live only in the SQL project. They do not contain data and you cannot connect to them from a client app. Michael J helps her research the issue and finds out that just like </a:t>
-            </a:r>
-            <a:r>
-              <a:rPr lang="en-US" dirty="0" err="1"/>
-              <a:t>.net</a:t>
-            </a:r>
-            <a:r>
-              <a:rPr lang="en-US" dirty="0"/>
-              <a:t> </a:t>
-            </a:r>
-            <a:r>
-              <a:rPr lang="en-US" dirty="0" err="1"/>
-              <a:t>projkects</a:t>
-            </a:r>
-            <a:r>
-              <a:rPr lang="en-US" dirty="0"/>
-              <a:t>, there is a “right click” publish method. When Alexandria tries that, she gets a friendly dialog asking her where to deploy the db. </a:t>
-            </a:r>
-          </a:p>
-          <a:p>
-            <a:endParaRPr lang="en-US" dirty="0"/>
-          </a:p>
-          <a:p>
-            <a:r>
-              <a:rPr lang="en-US" dirty="0"/>
-              <a:t>Before I go further, some of you might be wondering: “right click publish, are you kitten me?”. We only use that feature in toy </a:t>
-            </a:r>
-            <a:r>
-              <a:rPr lang="en-US" dirty="0" err="1"/>
-              <a:t>.net</a:t>
-            </a:r>
-            <a:r>
-              <a:rPr lang="en-US" dirty="0"/>
-              <a:t> projects not in real projects. I will talk about how to do deployment using a CI/CD friendly command utility from MS, but for now please bear with me as I show you the GUI way which has the same options as the options available from a command line.</a:t>
-            </a:r>
-          </a:p>
-          <a:p>
-            <a:endParaRPr lang="en-US" dirty="0"/>
-          </a:p>
-          <a:p>
-            <a:r>
-              <a:rPr lang="en-US" dirty="0"/>
-              <a:t>The deployment wizard allows you to select different options that affect the behavior of the deployment. You can deploy to a </a:t>
-            </a:r>
-            <a:r>
-              <a:rPr lang="en-US" dirty="0" err="1"/>
-              <a:t>db</a:t>
-            </a:r>
-            <a:r>
-              <a:rPr lang="en-US" dirty="0"/>
-              <a:t> or to a script file. When you click publish, the following happens:</a:t>
-            </a:r>
-          </a:p>
-          <a:p>
-            <a:endParaRPr lang="en-US" dirty="0"/>
-          </a:p>
-          <a:p>
-            <a:pPr marL="235572" indent="-235572">
-              <a:buAutoNum type="arabicPeriod"/>
-            </a:pPr>
-            <a:r>
-              <a:rPr lang="en-US" dirty="0"/>
-              <a:t>The </a:t>
-            </a:r>
-            <a:r>
-              <a:rPr lang="en-US" dirty="0" err="1"/>
-              <a:t>sql</a:t>
-            </a:r>
-            <a:r>
-              <a:rPr lang="en-US" dirty="0"/>
-              <a:t> project “compiles” into a </a:t>
-            </a:r>
-            <a:r>
-              <a:rPr lang="en-US" dirty="0" err="1"/>
-              <a:t>dacpac</a:t>
-            </a:r>
-            <a:r>
-              <a:rPr lang="en-US" dirty="0"/>
-              <a:t>. If any </a:t>
-            </a:r>
-            <a:r>
-              <a:rPr lang="en-US" dirty="0" err="1"/>
-              <a:t>sytanx</a:t>
-            </a:r>
-            <a:r>
-              <a:rPr lang="en-US" dirty="0"/>
-              <a:t> reference errors occur, this </a:t>
-            </a:r>
-            <a:r>
-              <a:rPr lang="en-US" dirty="0" err="1"/>
-              <a:t>ste</a:t>
-            </a:r>
-            <a:r>
-              <a:rPr lang="en-US" dirty="0"/>
-              <a:t> will fail and no deployment will be attempted.</a:t>
-            </a:r>
-          </a:p>
-          <a:p>
-            <a:pPr marL="235572" indent="-235572">
-              <a:buAutoNum type="arabicPeriod"/>
-            </a:pPr>
-            <a:r>
-              <a:rPr lang="en-US" dirty="0"/>
-              <a:t>The deployment engine deploys to the target db. </a:t>
-            </a:r>
-          </a:p>
-          <a:p>
-            <a:pPr marL="235572" indent="-235572">
-              <a:buAutoNum type="arabicPeriod"/>
-            </a:pPr>
-            <a:endParaRPr lang="en-US" dirty="0"/>
-          </a:p>
-          <a:p>
-            <a:r>
-              <a:rPr lang="en-US" b="1" i="1" dirty="0">
-                <a:solidFill>
-                  <a:srgbClr val="5B9BD5"/>
-                </a:solidFill>
-                <a:latin typeface="Calibri" panose="020F0502020204030204" pitchFamily="34" charset="0"/>
-              </a:rPr>
-              <a:t>What happens in a Deployment</a:t>
-            </a:r>
-            <a:endParaRPr lang="en-US" b="1" dirty="0">
-              <a:solidFill>
-                <a:srgbClr val="5B9BD5"/>
-              </a:solidFill>
-              <a:latin typeface="Calibri" panose="020F0502020204030204" pitchFamily="34" charset="0"/>
-            </a:endParaRPr>
-          </a:p>
-          <a:p>
-            <a:r>
-              <a:rPr lang="en-US" sz="1100" dirty="0">
-                <a:latin typeface="Calibri" panose="020F0502020204030204" pitchFamily="34" charset="0"/>
-              </a:rPr>
-              <a:t>A deployment from a SQL project does the following </a:t>
-            </a:r>
-            <a:r>
-              <a:rPr lang="en-US" sz="1100" b="1" dirty="0">
-                <a:latin typeface="Calibri" panose="020F0502020204030204" pitchFamily="34" charset="0"/>
-              </a:rPr>
-              <a:t>by default</a:t>
-            </a:r>
-            <a:r>
-              <a:rPr lang="en-US" sz="1100" dirty="0">
-                <a:latin typeface="Calibri" panose="020F0502020204030204" pitchFamily="34" charset="0"/>
-              </a:rPr>
-              <a:t>:</a:t>
-            </a:r>
-          </a:p>
-          <a:p>
-            <a:pPr rtl="0" fontAlgn="ctr">
-              <a:buFont typeface="+mj-lt"/>
-              <a:buAutoNum type="arabicPeriod"/>
-            </a:pPr>
-            <a:r>
-              <a:rPr lang="en-US" sz="1100" dirty="0">
-                <a:latin typeface="Calibri" panose="020F0502020204030204" pitchFamily="34" charset="0"/>
-              </a:rPr>
-              <a:t>It compares the objects defined in the </a:t>
-            </a:r>
-            <a:r>
-              <a:rPr lang="en-US" sz="1100" dirty="0" err="1">
-                <a:latin typeface="Calibri" panose="020F0502020204030204" pitchFamily="34" charset="0"/>
-              </a:rPr>
-              <a:t>sql</a:t>
-            </a:r>
-            <a:r>
-              <a:rPr lang="en-US" sz="1100" dirty="0">
-                <a:latin typeface="Calibri" panose="020F0502020204030204" pitchFamily="34" charset="0"/>
-              </a:rPr>
-              <a:t> project vs what is on the server.</a:t>
-            </a:r>
-          </a:p>
-          <a:p>
-            <a:pPr rtl="0" fontAlgn="ctr">
-              <a:buFont typeface="+mj-lt"/>
-              <a:buAutoNum type="arabicPeriod"/>
-            </a:pPr>
-            <a:r>
-              <a:rPr lang="en-US" sz="1100" dirty="0">
-                <a:latin typeface="Calibri" panose="020F0502020204030204" pitchFamily="34" charset="0"/>
-              </a:rPr>
-              <a:t>Anything that is in the </a:t>
-            </a:r>
-            <a:r>
-              <a:rPr lang="en-US" sz="1100" dirty="0" err="1">
-                <a:latin typeface="Calibri" panose="020F0502020204030204" pitchFamily="34" charset="0"/>
-              </a:rPr>
-              <a:t>sql</a:t>
-            </a:r>
-            <a:r>
-              <a:rPr lang="en-US" sz="1100" dirty="0">
-                <a:latin typeface="Calibri" panose="020F0502020204030204" pitchFamily="34" charset="0"/>
-              </a:rPr>
-              <a:t> project but not in the server is scripted as an "add" (e.g. CREATE VIEW).</a:t>
-            </a:r>
-          </a:p>
-          <a:p>
-            <a:pPr rtl="0" fontAlgn="ctr">
-              <a:buFont typeface="+mj-lt"/>
-              <a:buAutoNum type="arabicPeriod"/>
-            </a:pPr>
-            <a:r>
-              <a:rPr lang="en-US" sz="1100" dirty="0">
-                <a:latin typeface="Calibri" panose="020F0502020204030204" pitchFamily="34" charset="0"/>
-              </a:rPr>
-              <a:t>Anything that is in the </a:t>
-            </a:r>
-            <a:r>
-              <a:rPr lang="en-US" sz="1100" dirty="0" err="1">
-                <a:latin typeface="Calibri" panose="020F0502020204030204" pitchFamily="34" charset="0"/>
-              </a:rPr>
-              <a:t>sql</a:t>
-            </a:r>
-            <a:r>
-              <a:rPr lang="en-US" sz="1100" dirty="0">
-                <a:latin typeface="Calibri" panose="020F0502020204030204" pitchFamily="34" charset="0"/>
-              </a:rPr>
-              <a:t> project </a:t>
-            </a:r>
-            <a:r>
-              <a:rPr lang="en-US" sz="1100" i="1" dirty="0">
-                <a:latin typeface="Calibri" panose="020F0502020204030204" pitchFamily="34" charset="0"/>
-              </a:rPr>
-              <a:t>and</a:t>
-            </a:r>
-            <a:r>
-              <a:rPr lang="en-US" sz="1100" dirty="0">
-                <a:latin typeface="Calibri" panose="020F0502020204030204" pitchFamily="34" charset="0"/>
-              </a:rPr>
-              <a:t> the </a:t>
-            </a:r>
-            <a:r>
-              <a:rPr lang="en-US" sz="1100" dirty="0" err="1">
-                <a:latin typeface="Calibri" panose="020F0502020204030204" pitchFamily="34" charset="0"/>
-              </a:rPr>
-              <a:t>sql</a:t>
-            </a:r>
-            <a:r>
-              <a:rPr lang="en-US" sz="1100" dirty="0">
-                <a:latin typeface="Calibri" panose="020F0502020204030204" pitchFamily="34" charset="0"/>
-              </a:rPr>
-              <a:t> server, but differs in definition (e.g. a view has a different order of columns or an extra column), gets changed. Sometimes via an alter statement and sometimes via a drop/create. The deployment engine decides that for you.</a:t>
-            </a:r>
-          </a:p>
-          <a:p>
-            <a:pPr marL="765610" lvl="1" indent="-294465" fontAlgn="ctr">
-              <a:buFont typeface="+mj-lt"/>
-              <a:buAutoNum type="alphaLcPeriod"/>
-            </a:pPr>
-            <a:r>
-              <a:rPr lang="en-US" sz="1100" dirty="0">
-                <a:latin typeface="Calibri" panose="020F0502020204030204" pitchFamily="34" charset="0"/>
-              </a:rPr>
-              <a:t>It is important to note that, by default, the deployment engine will NOT do any changes that have the possibility of losing data in the server. For example, a column being removed from a table or a column changing to a smaller type. </a:t>
-            </a:r>
-          </a:p>
-          <a:p>
-            <a:pPr marL="765610" lvl="1" indent="-294465" fontAlgn="ctr">
-              <a:buFont typeface="+mj-lt"/>
-              <a:buAutoNum type="alphaLcPeriod"/>
-            </a:pPr>
-            <a:r>
-              <a:rPr lang="en-US" sz="1100" dirty="0">
-                <a:latin typeface="Calibri" panose="020F0502020204030204" pitchFamily="34" charset="0"/>
-              </a:rPr>
-              <a:t>Removing a column from a View or Stored Proc does not constitute data loss. You might be thinking, if the view is missing the column would not that affect anything else that depends on the column? The answer is yes and there are two ways </a:t>
-            </a:r>
-            <a:r>
-              <a:rPr lang="en-US" sz="1100" dirty="0" err="1">
-                <a:latin typeface="Calibri" panose="020F0502020204030204" pitchFamily="34" charset="0"/>
-              </a:rPr>
-              <a:t>tio</a:t>
-            </a:r>
-            <a:r>
-              <a:rPr lang="en-US" sz="1100" dirty="0">
-                <a:latin typeface="Calibri" panose="020F0502020204030204" pitchFamily="34" charset="0"/>
-              </a:rPr>
-              <a:t> prevent issues:</a:t>
-            </a:r>
-          </a:p>
-          <a:p>
-            <a:pPr marL="1177862" lvl="2" indent="-235572" fontAlgn="ctr">
-              <a:buFont typeface="+mj-lt"/>
-              <a:buAutoNum type="romanLcPeriod"/>
-            </a:pPr>
-            <a:r>
-              <a:rPr lang="en-US" sz="1100" dirty="0">
-                <a:latin typeface="Calibri" panose="020F0502020204030204" pitchFamily="34" charset="0"/>
-              </a:rPr>
-              <a:t>Any </a:t>
-            </a:r>
-            <a:r>
-              <a:rPr lang="en-US" sz="1100" dirty="0" err="1">
-                <a:latin typeface="Calibri" panose="020F0502020204030204" pitchFamily="34" charset="0"/>
-              </a:rPr>
-              <a:t>sql</a:t>
-            </a:r>
-            <a:r>
-              <a:rPr lang="en-US" sz="1100" dirty="0">
-                <a:latin typeface="Calibri" panose="020F0502020204030204" pitchFamily="34" charset="0"/>
-              </a:rPr>
-              <a:t> object that refers to that column within the </a:t>
-            </a:r>
-            <a:r>
-              <a:rPr lang="en-US" sz="1100" dirty="0" err="1">
-                <a:latin typeface="Calibri" panose="020F0502020204030204" pitchFamily="34" charset="0"/>
-              </a:rPr>
-              <a:t>db</a:t>
-            </a:r>
-            <a:r>
-              <a:rPr lang="en-US" sz="1100" dirty="0">
-                <a:latin typeface="Calibri" panose="020F0502020204030204" pitchFamily="34" charset="0"/>
-              </a:rPr>
-              <a:t>, will fail to compile in the project so you would know that you are referencing something that is now missing so you would not even be able to get to the deployment step because compilation would fail.</a:t>
-            </a:r>
-          </a:p>
-          <a:p>
-            <a:pPr rtl="0" fontAlgn="ctr">
-              <a:buFont typeface="+mj-lt"/>
-              <a:buAutoNum type="romanLcPeriod" startAt="2"/>
-            </a:pPr>
-            <a:r>
-              <a:rPr lang="en-US" sz="1100" dirty="0">
-                <a:latin typeface="Calibri" panose="020F0502020204030204" pitchFamily="34" charset="0"/>
-              </a:rPr>
-              <a:t>If your external code references that missing column, then you would do the same thing you would do if you </a:t>
-            </a:r>
-            <a:r>
-              <a:rPr lang="en-US" sz="1100" dirty="0" err="1">
-                <a:latin typeface="Calibri" panose="020F0502020204030204" pitchFamily="34" charset="0"/>
-              </a:rPr>
-              <a:t>.net</a:t>
-            </a:r>
-            <a:r>
-              <a:rPr lang="en-US" sz="1100" dirty="0">
-                <a:latin typeface="Calibri" panose="020F0502020204030204" pitchFamily="34" charset="0"/>
-              </a:rPr>
-              <a:t> public API has a breaking change. We will talk more about it later when we talk of the </a:t>
-            </a:r>
-            <a:r>
-              <a:rPr lang="en-US" sz="1100" dirty="0" err="1">
-                <a:latin typeface="Calibri" panose="020F0502020204030204" pitchFamily="34" charset="0"/>
-              </a:rPr>
-              <a:t>db</a:t>
-            </a:r>
-            <a:r>
-              <a:rPr lang="en-US" sz="1100" dirty="0">
-                <a:latin typeface="Calibri" panose="020F0502020204030204" pitchFamily="34" charset="0"/>
-              </a:rPr>
-              <a:t> as a service.</a:t>
-            </a:r>
-          </a:p>
-          <a:p>
-            <a:pPr rtl="0" fontAlgn="ctr">
-              <a:buFont typeface="+mj-lt"/>
-              <a:buAutoNum type="arabicPeriod" startAt="4"/>
-            </a:pPr>
-            <a:r>
-              <a:rPr lang="en-US" sz="1100" dirty="0">
-                <a:latin typeface="Calibri" panose="020F0502020204030204" pitchFamily="34" charset="0"/>
-              </a:rPr>
-              <a:t>Anything that is not in this </a:t>
-            </a:r>
-            <a:r>
-              <a:rPr lang="en-US" sz="1100" dirty="0" err="1">
-                <a:latin typeface="Calibri" panose="020F0502020204030204" pitchFamily="34" charset="0"/>
-              </a:rPr>
-              <a:t>sql</a:t>
-            </a:r>
-            <a:r>
-              <a:rPr lang="en-US" sz="1100" dirty="0">
-                <a:latin typeface="Calibri" panose="020F0502020204030204" pitchFamily="34" charset="0"/>
-              </a:rPr>
-              <a:t> project but it is in the </a:t>
-            </a:r>
-            <a:r>
-              <a:rPr lang="en-US" sz="1100" dirty="0" err="1">
-                <a:latin typeface="Calibri" panose="020F0502020204030204" pitchFamily="34" charset="0"/>
-              </a:rPr>
-              <a:t>db</a:t>
-            </a:r>
-            <a:r>
-              <a:rPr lang="en-US" sz="1100" dirty="0">
-                <a:latin typeface="Calibri" panose="020F0502020204030204" pitchFamily="34" charset="0"/>
-              </a:rPr>
-              <a:t>, will NOT be touched by default.</a:t>
-            </a:r>
-          </a:p>
-          <a:p>
-            <a:pPr rtl="0" fontAlgn="ctr">
-              <a:buFont typeface="+mj-lt"/>
-              <a:buAutoNum type="arabicPeriod"/>
-            </a:pPr>
-            <a:r>
-              <a:rPr lang="en-US" sz="1100" dirty="0">
-                <a:latin typeface="Calibri" panose="020F0502020204030204" pitchFamily="34" charset="0"/>
-              </a:rPr>
-              <a:t>Database settings (such as Read Committed/Snapshot)are applied by default. You can define those settings in the </a:t>
-            </a:r>
-            <a:r>
-              <a:rPr lang="en-US" sz="1100" dirty="0" err="1">
-                <a:latin typeface="Calibri" panose="020F0502020204030204" pitchFamily="34" charset="0"/>
-              </a:rPr>
-              <a:t>sql</a:t>
-            </a:r>
-            <a:r>
-              <a:rPr lang="en-US" sz="1100" dirty="0">
-                <a:latin typeface="Calibri" panose="020F0502020204030204" pitchFamily="34" charset="0"/>
-              </a:rPr>
-              <a:t> project by right clicking the project then properties-&gt;Project settings-&gt;Database Settings; and have the deployment process apply those setting :</a:t>
-            </a:r>
-          </a:p>
-          <a:p>
-            <a:r>
-              <a:rPr lang="en-US" sz="1100" dirty="0">
-                <a:latin typeface="Calibri" panose="020F0502020204030204" pitchFamily="34" charset="0"/>
-              </a:rPr>
-              <a:t> </a:t>
-            </a:r>
-          </a:p>
-          <a:p>
-            <a:pPr rtl="0" fontAlgn="ctr">
-              <a:buFont typeface="+mj-lt"/>
-              <a:buAutoNum type="arabicPeriod" startAt="6"/>
-            </a:pPr>
-            <a:r>
-              <a:rPr lang="en-US" sz="1100" dirty="0">
-                <a:latin typeface="Calibri" panose="020F0502020204030204" pitchFamily="34" charset="0"/>
-              </a:rPr>
-              <a:t>Database compatibility options (i.e. 2019, 2022) are not scripted by default.</a:t>
-            </a:r>
-          </a:p>
-          <a:p>
-            <a:pPr marL="353358"/>
-            <a:endParaRPr lang="en-US" sz="1100" dirty="0">
-              <a:latin typeface="Calibri" panose="020F0502020204030204" pitchFamily="34" charset="0"/>
-            </a:endParaRPr>
-          </a:p>
-          <a:p>
-            <a:r>
-              <a:rPr lang="en-US" sz="1100" dirty="0">
-                <a:latin typeface="Calibri" panose="020F0502020204030204" pitchFamily="34" charset="0"/>
-              </a:rPr>
-              <a:t>Those behaviors are defaults that can be changed. For example, you could configure the deployment to drop </a:t>
-            </a:r>
-            <a:r>
-              <a:rPr lang="en-US" sz="1100" dirty="0" err="1">
-                <a:latin typeface="Calibri" panose="020F0502020204030204" pitchFamily="34" charset="0"/>
-              </a:rPr>
-              <a:t>sql</a:t>
-            </a:r>
-            <a:r>
-              <a:rPr lang="en-US" sz="1100" dirty="0">
-                <a:latin typeface="Calibri" panose="020F0502020204030204" pitchFamily="34" charset="0"/>
-              </a:rPr>
-              <a:t> objects that are in the </a:t>
-            </a:r>
-            <a:r>
-              <a:rPr lang="en-US" sz="1100" dirty="0" err="1">
-                <a:latin typeface="Calibri" panose="020F0502020204030204" pitchFamily="34" charset="0"/>
-              </a:rPr>
-              <a:t>sql</a:t>
-            </a:r>
-            <a:r>
-              <a:rPr lang="en-US" sz="1100" dirty="0">
-                <a:latin typeface="Calibri" panose="020F0502020204030204" pitchFamily="34" charset="0"/>
-              </a:rPr>
-              <a:t> server but not in the </a:t>
-            </a:r>
-            <a:r>
-              <a:rPr lang="en-US" sz="1100" dirty="0" err="1">
-                <a:latin typeface="Calibri" panose="020F0502020204030204" pitchFamily="34" charset="0"/>
-              </a:rPr>
-              <a:t>sql</a:t>
-            </a:r>
-            <a:r>
-              <a:rPr lang="en-US" sz="1100" dirty="0">
-                <a:latin typeface="Calibri" panose="020F0502020204030204" pitchFamily="34" charset="0"/>
-              </a:rPr>
-              <a:t> project; or to go ahead with changes that could cause data loss. I </a:t>
-            </a:r>
-            <a:r>
-              <a:rPr lang="en-US" sz="1100" b="1" dirty="0">
-                <a:latin typeface="Calibri" panose="020F0502020204030204" pitchFamily="34" charset="0"/>
-              </a:rPr>
-              <a:t>do not recommend</a:t>
-            </a:r>
-            <a:r>
-              <a:rPr lang="en-US" sz="1100" dirty="0">
-                <a:latin typeface="Calibri" panose="020F0502020204030204" pitchFamily="34" charset="0"/>
-              </a:rPr>
-              <a:t> doing those specific two options unless you are working with a dev db. I have used the compatibility option set to true in the past to ensure the </a:t>
-            </a:r>
-            <a:r>
-              <a:rPr lang="en-US" sz="1100" dirty="0" err="1">
-                <a:latin typeface="Calibri" panose="020F0502020204030204" pitchFamily="34" charset="0"/>
-              </a:rPr>
-              <a:t>db</a:t>
-            </a:r>
-            <a:r>
-              <a:rPr lang="en-US" sz="1100" dirty="0">
-                <a:latin typeface="Calibri" panose="020F0502020204030204" pitchFamily="34" charset="0"/>
-              </a:rPr>
-              <a:t> I am deploying to is the right version I am targeting.</a:t>
-            </a:r>
-          </a:p>
-          <a:p>
-            <a:endParaRPr lang="en-US" dirty="0"/>
-          </a:p>
-        </p:txBody>
-      </p:sp>
-      <p:sp>
-        <p:nvSpPr>
-          <p:cNvPr id="4" name="Slide Number Placeholder 3"/>
-          <p:cNvSpPr>
-            <a:spLocks noGrp="1"/>
-          </p:cNvSpPr>
-          <p:nvPr>
-            <p:ph type="sldNum" sz="quarter" idx="5"/>
-          </p:nvPr>
-        </p:nvSpPr>
-        <p:spPr/>
-        <p:txBody>
-          <a:bodyPr/>
-          <a:lstStyle/>
-          <a:p>
-            <a:fld id="{CDDD3684-6E52-4019-8D61-A9B0BAC0DBD6}" type="slidenum">
-              <a:rPr lang="en-US" smtClean="0"/>
-              <a:t>12</a:t>
-            </a:fld>
-            <a:endParaRPr lang="en-US"/>
-          </a:p>
-        </p:txBody>
-      </p:sp>
-    </p:spTree>
-    <p:extLst>
-      <p:ext uri="{BB962C8B-B14F-4D97-AF65-F5344CB8AC3E}">
-        <p14:creationId xmlns:p14="http://schemas.microsoft.com/office/powerpoint/2010/main" val="1865331049"/>
       </p:ext>
     </p:extLst>
   </p:cSld>
@@ -5393,6 +5102,532 @@
           <a:bodyPr/>
           <a:lstStyle/>
           <a:p>
+            <a:r>
+              <a:rPr lang="en-US" dirty="0"/>
+              <a:t>Alexandria is very happy with all the work she has been able to do in her SQL project. But as soon as she wants to try her work in her local laptop, she stops and wonders, how can we take this definition in this </a:t>
+            </a:r>
+            <a:r>
+              <a:rPr lang="en-US" dirty="0" err="1"/>
+              <a:t>sql</a:t>
+            </a:r>
+            <a:r>
+              <a:rPr lang="en-US" dirty="0"/>
+              <a:t> project and put it in her local </a:t>
+            </a:r>
+            <a:r>
+              <a:rPr lang="en-US" dirty="0" err="1"/>
+              <a:t>sql</a:t>
+            </a:r>
+            <a:r>
+              <a:rPr lang="en-US" dirty="0"/>
+              <a:t> instance? The SQL object in the project live only in the SQL project. They do not contain data and you cannot connect to them from a client app. Michael J helps her research the issue and finds out that just like </a:t>
+            </a:r>
+            <a:r>
+              <a:rPr lang="en-US" dirty="0" err="1"/>
+              <a:t>.net</a:t>
+            </a:r>
+            <a:r>
+              <a:rPr lang="en-US" dirty="0"/>
+              <a:t> </a:t>
+            </a:r>
+            <a:r>
+              <a:rPr lang="en-US" dirty="0" err="1"/>
+              <a:t>projkects</a:t>
+            </a:r>
+            <a:r>
+              <a:rPr lang="en-US" dirty="0"/>
+              <a:t>, there is a “right click” publish method. When Alexandria tries that, she gets a friendly dialog asking her where to deploy the db. </a:t>
+            </a:r>
+          </a:p>
+          <a:p>
+            <a:endParaRPr lang="en-US" dirty="0"/>
+          </a:p>
+          <a:p>
+            <a:r>
+              <a:rPr lang="en-US" dirty="0"/>
+              <a:t>Before I go further, some of you might be wondering: “right click publish, are you kitten me?”. We only use that feature in toy </a:t>
+            </a:r>
+            <a:r>
+              <a:rPr lang="en-US" dirty="0" err="1"/>
+              <a:t>.net</a:t>
+            </a:r>
+            <a:r>
+              <a:rPr lang="en-US" dirty="0"/>
+              <a:t> projects not in real projects. I will talk about how to do deployment using a CI/CD friendly command utility from MS, but for now please bear with me as I show you the GUI way which has the same options as the options available from a command line.</a:t>
+            </a:r>
+          </a:p>
+          <a:p>
+            <a:endParaRPr lang="en-US" dirty="0"/>
+          </a:p>
+          <a:p>
+            <a:r>
+              <a:rPr lang="en-US" dirty="0"/>
+              <a:t>The deployment wizard allows you to select different options that affect the behavior of the deployment. You can deploy to a </a:t>
+            </a:r>
+            <a:r>
+              <a:rPr lang="en-US" dirty="0" err="1"/>
+              <a:t>db</a:t>
+            </a:r>
+            <a:r>
+              <a:rPr lang="en-US" dirty="0"/>
+              <a:t> or to a script file. When you click publish, the following happens:</a:t>
+            </a:r>
+          </a:p>
+          <a:p>
+            <a:endParaRPr lang="en-US" dirty="0"/>
+          </a:p>
+          <a:p>
+            <a:pPr marL="235572" indent="-235572">
+              <a:buAutoNum type="arabicPeriod"/>
+            </a:pPr>
+            <a:r>
+              <a:rPr lang="en-US" dirty="0"/>
+              <a:t>The </a:t>
+            </a:r>
+            <a:r>
+              <a:rPr lang="en-US" dirty="0" err="1"/>
+              <a:t>sql</a:t>
+            </a:r>
+            <a:r>
+              <a:rPr lang="en-US" dirty="0"/>
+              <a:t> project “compiles” into a </a:t>
+            </a:r>
+            <a:r>
+              <a:rPr lang="en-US" dirty="0" err="1"/>
+              <a:t>dacpac</a:t>
+            </a:r>
+            <a:r>
+              <a:rPr lang="en-US" dirty="0"/>
+              <a:t>. If any </a:t>
+            </a:r>
+            <a:r>
+              <a:rPr lang="en-US" dirty="0" err="1"/>
+              <a:t>sytanx</a:t>
+            </a:r>
+            <a:r>
+              <a:rPr lang="en-US" dirty="0"/>
+              <a:t> reference errors occur, this </a:t>
+            </a:r>
+            <a:r>
+              <a:rPr lang="en-US" dirty="0" err="1"/>
+              <a:t>ste</a:t>
+            </a:r>
+            <a:r>
+              <a:rPr lang="en-US" dirty="0"/>
+              <a:t> will fail and no deployment will be attempted.</a:t>
+            </a:r>
+          </a:p>
+          <a:p>
+            <a:pPr marL="235572" indent="-235572">
+              <a:buAutoNum type="arabicPeriod"/>
+            </a:pPr>
+            <a:r>
+              <a:rPr lang="en-US" dirty="0"/>
+              <a:t>The deployment engine deploys to the target db. </a:t>
+            </a:r>
+          </a:p>
+          <a:p>
+            <a:pPr marL="235572" indent="-235572">
+              <a:buAutoNum type="arabicPeriod"/>
+            </a:pPr>
+            <a:endParaRPr lang="en-US" dirty="0"/>
+          </a:p>
+          <a:p>
+            <a:r>
+              <a:rPr lang="en-US" b="1" i="1" dirty="0">
+                <a:solidFill>
+                  <a:srgbClr val="5B9BD5"/>
+                </a:solidFill>
+                <a:latin typeface="Calibri" panose="020F0502020204030204" pitchFamily="34" charset="0"/>
+              </a:rPr>
+              <a:t>What happens in a Deployment</a:t>
+            </a:r>
+            <a:endParaRPr lang="en-US" b="1" dirty="0">
+              <a:solidFill>
+                <a:srgbClr val="5B9BD5"/>
+              </a:solidFill>
+              <a:latin typeface="Calibri" panose="020F0502020204030204" pitchFamily="34" charset="0"/>
+            </a:endParaRPr>
+          </a:p>
+          <a:p>
+            <a:r>
+              <a:rPr lang="en-US" sz="1100" dirty="0">
+                <a:latin typeface="Calibri" panose="020F0502020204030204" pitchFamily="34" charset="0"/>
+              </a:rPr>
+              <a:t>A deployment from a SQL project does the following </a:t>
+            </a:r>
+            <a:r>
+              <a:rPr lang="en-US" sz="1100" b="1" dirty="0">
+                <a:latin typeface="Calibri" panose="020F0502020204030204" pitchFamily="34" charset="0"/>
+              </a:rPr>
+              <a:t>by default</a:t>
+            </a:r>
+            <a:r>
+              <a:rPr lang="en-US" sz="1100" dirty="0">
+                <a:latin typeface="Calibri" panose="020F0502020204030204" pitchFamily="34" charset="0"/>
+              </a:rPr>
+              <a:t>:</a:t>
+            </a:r>
+          </a:p>
+          <a:p>
+            <a:pPr rtl="0" fontAlgn="ctr">
+              <a:buFont typeface="+mj-lt"/>
+              <a:buAutoNum type="arabicPeriod"/>
+            </a:pPr>
+            <a:r>
+              <a:rPr lang="en-US" sz="1100" dirty="0">
+                <a:latin typeface="Calibri" panose="020F0502020204030204" pitchFamily="34" charset="0"/>
+              </a:rPr>
+              <a:t>It compares the objects defined in the </a:t>
+            </a:r>
+            <a:r>
+              <a:rPr lang="en-US" sz="1100" dirty="0" err="1">
+                <a:latin typeface="Calibri" panose="020F0502020204030204" pitchFamily="34" charset="0"/>
+              </a:rPr>
+              <a:t>sql</a:t>
+            </a:r>
+            <a:r>
+              <a:rPr lang="en-US" sz="1100" dirty="0">
+                <a:latin typeface="Calibri" panose="020F0502020204030204" pitchFamily="34" charset="0"/>
+              </a:rPr>
+              <a:t> project vs what is on the server.</a:t>
+            </a:r>
+          </a:p>
+          <a:p>
+            <a:pPr rtl="0" fontAlgn="ctr">
+              <a:buFont typeface="+mj-lt"/>
+              <a:buAutoNum type="arabicPeriod"/>
+            </a:pPr>
+            <a:r>
+              <a:rPr lang="en-US" sz="1100" dirty="0">
+                <a:latin typeface="Calibri" panose="020F0502020204030204" pitchFamily="34" charset="0"/>
+              </a:rPr>
+              <a:t>Anything that is in the </a:t>
+            </a:r>
+            <a:r>
+              <a:rPr lang="en-US" sz="1100" dirty="0" err="1">
+                <a:latin typeface="Calibri" panose="020F0502020204030204" pitchFamily="34" charset="0"/>
+              </a:rPr>
+              <a:t>sql</a:t>
+            </a:r>
+            <a:r>
+              <a:rPr lang="en-US" sz="1100" dirty="0">
+                <a:latin typeface="Calibri" panose="020F0502020204030204" pitchFamily="34" charset="0"/>
+              </a:rPr>
+              <a:t> project but not in the server is scripted as an "add" (e.g. CREATE VIEW).</a:t>
+            </a:r>
+          </a:p>
+          <a:p>
+            <a:pPr rtl="0" fontAlgn="ctr">
+              <a:buFont typeface="+mj-lt"/>
+              <a:buAutoNum type="arabicPeriod"/>
+            </a:pPr>
+            <a:r>
+              <a:rPr lang="en-US" sz="1100" dirty="0">
+                <a:latin typeface="Calibri" panose="020F0502020204030204" pitchFamily="34" charset="0"/>
+              </a:rPr>
+              <a:t>Anything that is in the </a:t>
+            </a:r>
+            <a:r>
+              <a:rPr lang="en-US" sz="1100" dirty="0" err="1">
+                <a:latin typeface="Calibri" panose="020F0502020204030204" pitchFamily="34" charset="0"/>
+              </a:rPr>
+              <a:t>sql</a:t>
+            </a:r>
+            <a:r>
+              <a:rPr lang="en-US" sz="1100" dirty="0">
+                <a:latin typeface="Calibri" panose="020F0502020204030204" pitchFamily="34" charset="0"/>
+              </a:rPr>
+              <a:t> project </a:t>
+            </a:r>
+            <a:r>
+              <a:rPr lang="en-US" sz="1100" i="1" dirty="0">
+                <a:latin typeface="Calibri" panose="020F0502020204030204" pitchFamily="34" charset="0"/>
+              </a:rPr>
+              <a:t>and</a:t>
+            </a:r>
+            <a:r>
+              <a:rPr lang="en-US" sz="1100" dirty="0">
+                <a:latin typeface="Calibri" panose="020F0502020204030204" pitchFamily="34" charset="0"/>
+              </a:rPr>
+              <a:t> the </a:t>
+            </a:r>
+            <a:r>
+              <a:rPr lang="en-US" sz="1100" dirty="0" err="1">
+                <a:latin typeface="Calibri" panose="020F0502020204030204" pitchFamily="34" charset="0"/>
+              </a:rPr>
+              <a:t>sql</a:t>
+            </a:r>
+            <a:r>
+              <a:rPr lang="en-US" sz="1100" dirty="0">
+                <a:latin typeface="Calibri" panose="020F0502020204030204" pitchFamily="34" charset="0"/>
+              </a:rPr>
+              <a:t> server, but differs in definition (e.g. a view has a different order of columns or an extra column), gets changed. Sometimes via an alter statement and sometimes via a drop/create. The deployment engine decides that for you.</a:t>
+            </a:r>
+          </a:p>
+          <a:p>
+            <a:pPr marL="765610" lvl="1" indent="-294465" fontAlgn="ctr">
+              <a:buFont typeface="+mj-lt"/>
+              <a:buAutoNum type="alphaLcPeriod"/>
+            </a:pPr>
+            <a:r>
+              <a:rPr lang="en-US" sz="1100" dirty="0">
+                <a:latin typeface="Calibri" panose="020F0502020204030204" pitchFamily="34" charset="0"/>
+              </a:rPr>
+              <a:t>It is important to note that, by default, the deployment engine will NOT do any changes that have the possibility of losing data in the server. For example, a column being removed from a table or a column changing to a smaller type. </a:t>
+            </a:r>
+          </a:p>
+          <a:p>
+            <a:pPr marL="765610" lvl="1" indent="-294465" fontAlgn="ctr">
+              <a:buFont typeface="+mj-lt"/>
+              <a:buAutoNum type="alphaLcPeriod"/>
+            </a:pPr>
+            <a:r>
+              <a:rPr lang="en-US" sz="1100" dirty="0">
+                <a:latin typeface="Calibri" panose="020F0502020204030204" pitchFamily="34" charset="0"/>
+              </a:rPr>
+              <a:t>Removing a column from a View or Stored Proc does not constitute data loss. You might be thinking, if the view is missing the column would not that affect anything else that depends on the column? The answer is yes and there are two ways </a:t>
+            </a:r>
+            <a:r>
+              <a:rPr lang="en-US" sz="1100" dirty="0" err="1">
+                <a:latin typeface="Calibri" panose="020F0502020204030204" pitchFamily="34" charset="0"/>
+              </a:rPr>
+              <a:t>tio</a:t>
+            </a:r>
+            <a:r>
+              <a:rPr lang="en-US" sz="1100" dirty="0">
+                <a:latin typeface="Calibri" panose="020F0502020204030204" pitchFamily="34" charset="0"/>
+              </a:rPr>
+              <a:t> prevent issues:</a:t>
+            </a:r>
+          </a:p>
+          <a:p>
+            <a:pPr marL="1177862" lvl="2" indent="-235572" fontAlgn="ctr">
+              <a:buFont typeface="+mj-lt"/>
+              <a:buAutoNum type="romanLcPeriod"/>
+            </a:pPr>
+            <a:r>
+              <a:rPr lang="en-US" sz="1100" dirty="0">
+                <a:latin typeface="Calibri" panose="020F0502020204030204" pitchFamily="34" charset="0"/>
+              </a:rPr>
+              <a:t>Any </a:t>
+            </a:r>
+            <a:r>
+              <a:rPr lang="en-US" sz="1100" dirty="0" err="1">
+                <a:latin typeface="Calibri" panose="020F0502020204030204" pitchFamily="34" charset="0"/>
+              </a:rPr>
+              <a:t>sql</a:t>
+            </a:r>
+            <a:r>
+              <a:rPr lang="en-US" sz="1100" dirty="0">
+                <a:latin typeface="Calibri" panose="020F0502020204030204" pitchFamily="34" charset="0"/>
+              </a:rPr>
+              <a:t> object that refers to that column within the </a:t>
+            </a:r>
+            <a:r>
+              <a:rPr lang="en-US" sz="1100" dirty="0" err="1">
+                <a:latin typeface="Calibri" panose="020F0502020204030204" pitchFamily="34" charset="0"/>
+              </a:rPr>
+              <a:t>db</a:t>
+            </a:r>
+            <a:r>
+              <a:rPr lang="en-US" sz="1100" dirty="0">
+                <a:latin typeface="Calibri" panose="020F0502020204030204" pitchFamily="34" charset="0"/>
+              </a:rPr>
+              <a:t>, will fail to compile in the project so you would know that you are referencing something that is now missing so you would not even be able to get to the deployment step because compilation would fail.</a:t>
+            </a:r>
+          </a:p>
+          <a:p>
+            <a:pPr rtl="0" fontAlgn="ctr">
+              <a:buFont typeface="+mj-lt"/>
+              <a:buAutoNum type="romanLcPeriod" startAt="2"/>
+            </a:pPr>
+            <a:r>
+              <a:rPr lang="en-US" sz="1100" dirty="0">
+                <a:latin typeface="Calibri" panose="020F0502020204030204" pitchFamily="34" charset="0"/>
+              </a:rPr>
+              <a:t>If your external code references that missing column, then you would do the same thing you would do if you </a:t>
+            </a:r>
+            <a:r>
+              <a:rPr lang="en-US" sz="1100" dirty="0" err="1">
+                <a:latin typeface="Calibri" panose="020F0502020204030204" pitchFamily="34" charset="0"/>
+              </a:rPr>
+              <a:t>.net</a:t>
+            </a:r>
+            <a:r>
+              <a:rPr lang="en-US" sz="1100" dirty="0">
+                <a:latin typeface="Calibri" panose="020F0502020204030204" pitchFamily="34" charset="0"/>
+              </a:rPr>
+              <a:t> public API has a breaking change. We will talk more about it later when we talk of the </a:t>
+            </a:r>
+            <a:r>
+              <a:rPr lang="en-US" sz="1100" dirty="0" err="1">
+                <a:latin typeface="Calibri" panose="020F0502020204030204" pitchFamily="34" charset="0"/>
+              </a:rPr>
+              <a:t>db</a:t>
+            </a:r>
+            <a:r>
+              <a:rPr lang="en-US" sz="1100" dirty="0">
+                <a:latin typeface="Calibri" panose="020F0502020204030204" pitchFamily="34" charset="0"/>
+              </a:rPr>
+              <a:t> as a service.</a:t>
+            </a:r>
+          </a:p>
+          <a:p>
+            <a:pPr rtl="0" fontAlgn="ctr">
+              <a:buFont typeface="+mj-lt"/>
+              <a:buAutoNum type="arabicPeriod" startAt="4"/>
+            </a:pPr>
+            <a:r>
+              <a:rPr lang="en-US" sz="1100" dirty="0">
+                <a:latin typeface="Calibri" panose="020F0502020204030204" pitchFamily="34" charset="0"/>
+              </a:rPr>
+              <a:t>Anything that is not in this </a:t>
+            </a:r>
+            <a:r>
+              <a:rPr lang="en-US" sz="1100" dirty="0" err="1">
+                <a:latin typeface="Calibri" panose="020F0502020204030204" pitchFamily="34" charset="0"/>
+              </a:rPr>
+              <a:t>sql</a:t>
+            </a:r>
+            <a:r>
+              <a:rPr lang="en-US" sz="1100" dirty="0">
+                <a:latin typeface="Calibri" panose="020F0502020204030204" pitchFamily="34" charset="0"/>
+              </a:rPr>
+              <a:t> project but it is in the </a:t>
+            </a:r>
+            <a:r>
+              <a:rPr lang="en-US" sz="1100" dirty="0" err="1">
+                <a:latin typeface="Calibri" panose="020F0502020204030204" pitchFamily="34" charset="0"/>
+              </a:rPr>
+              <a:t>db</a:t>
+            </a:r>
+            <a:r>
+              <a:rPr lang="en-US" sz="1100" dirty="0">
+                <a:latin typeface="Calibri" panose="020F0502020204030204" pitchFamily="34" charset="0"/>
+              </a:rPr>
+              <a:t>, will NOT be touched by default.</a:t>
+            </a:r>
+          </a:p>
+          <a:p>
+            <a:pPr rtl="0" fontAlgn="ctr">
+              <a:buFont typeface="+mj-lt"/>
+              <a:buAutoNum type="arabicPeriod"/>
+            </a:pPr>
+            <a:r>
+              <a:rPr lang="en-US" sz="1100" dirty="0">
+                <a:latin typeface="Calibri" panose="020F0502020204030204" pitchFamily="34" charset="0"/>
+              </a:rPr>
+              <a:t>Database settings (such as Read Committed/Snapshot)are applied by default. You can define those settings in the </a:t>
+            </a:r>
+            <a:r>
+              <a:rPr lang="en-US" sz="1100" dirty="0" err="1">
+                <a:latin typeface="Calibri" panose="020F0502020204030204" pitchFamily="34" charset="0"/>
+              </a:rPr>
+              <a:t>sql</a:t>
+            </a:r>
+            <a:r>
+              <a:rPr lang="en-US" sz="1100" dirty="0">
+                <a:latin typeface="Calibri" panose="020F0502020204030204" pitchFamily="34" charset="0"/>
+              </a:rPr>
+              <a:t> project by right clicking the project then properties-&gt;Project settings-&gt;Database Settings; and have the deployment process apply those setting :</a:t>
+            </a:r>
+          </a:p>
+          <a:p>
+            <a:r>
+              <a:rPr lang="en-US" sz="1100" dirty="0">
+                <a:latin typeface="Calibri" panose="020F0502020204030204" pitchFamily="34" charset="0"/>
+              </a:rPr>
+              <a:t> </a:t>
+            </a:r>
+          </a:p>
+          <a:p>
+            <a:pPr rtl="0" fontAlgn="ctr">
+              <a:buFont typeface="+mj-lt"/>
+              <a:buAutoNum type="arabicPeriod" startAt="6"/>
+            </a:pPr>
+            <a:r>
+              <a:rPr lang="en-US" sz="1100" dirty="0">
+                <a:latin typeface="Calibri" panose="020F0502020204030204" pitchFamily="34" charset="0"/>
+              </a:rPr>
+              <a:t>Database compatibility options (i.e. 2019, 2022) are not scripted by default.</a:t>
+            </a:r>
+          </a:p>
+          <a:p>
+            <a:pPr marL="353358"/>
+            <a:endParaRPr lang="en-US" sz="1100" dirty="0">
+              <a:latin typeface="Calibri" panose="020F0502020204030204" pitchFamily="34" charset="0"/>
+            </a:endParaRPr>
+          </a:p>
+          <a:p>
+            <a:r>
+              <a:rPr lang="en-US" sz="1100" dirty="0">
+                <a:latin typeface="Calibri" panose="020F0502020204030204" pitchFamily="34" charset="0"/>
+              </a:rPr>
+              <a:t>Those behaviors are defaults that can be changed. For example, you could configure the deployment to drop </a:t>
+            </a:r>
+            <a:r>
+              <a:rPr lang="en-US" sz="1100" dirty="0" err="1">
+                <a:latin typeface="Calibri" panose="020F0502020204030204" pitchFamily="34" charset="0"/>
+              </a:rPr>
+              <a:t>sql</a:t>
+            </a:r>
+            <a:r>
+              <a:rPr lang="en-US" sz="1100" dirty="0">
+                <a:latin typeface="Calibri" panose="020F0502020204030204" pitchFamily="34" charset="0"/>
+              </a:rPr>
+              <a:t> objects that are in the </a:t>
+            </a:r>
+            <a:r>
+              <a:rPr lang="en-US" sz="1100" dirty="0" err="1">
+                <a:latin typeface="Calibri" panose="020F0502020204030204" pitchFamily="34" charset="0"/>
+              </a:rPr>
+              <a:t>sql</a:t>
+            </a:r>
+            <a:r>
+              <a:rPr lang="en-US" sz="1100" dirty="0">
+                <a:latin typeface="Calibri" panose="020F0502020204030204" pitchFamily="34" charset="0"/>
+              </a:rPr>
+              <a:t> server but not in the </a:t>
+            </a:r>
+            <a:r>
+              <a:rPr lang="en-US" sz="1100" dirty="0" err="1">
+                <a:latin typeface="Calibri" panose="020F0502020204030204" pitchFamily="34" charset="0"/>
+              </a:rPr>
+              <a:t>sql</a:t>
+            </a:r>
+            <a:r>
+              <a:rPr lang="en-US" sz="1100" dirty="0">
+                <a:latin typeface="Calibri" panose="020F0502020204030204" pitchFamily="34" charset="0"/>
+              </a:rPr>
+              <a:t> project; or to go ahead with changes that could cause data loss. I </a:t>
+            </a:r>
+            <a:r>
+              <a:rPr lang="en-US" sz="1100" b="1" dirty="0">
+                <a:latin typeface="Calibri" panose="020F0502020204030204" pitchFamily="34" charset="0"/>
+              </a:rPr>
+              <a:t>do not recommend</a:t>
+            </a:r>
+            <a:r>
+              <a:rPr lang="en-US" sz="1100" dirty="0">
+                <a:latin typeface="Calibri" panose="020F0502020204030204" pitchFamily="34" charset="0"/>
+              </a:rPr>
+              <a:t> doing those specific two options unless you are working with a dev db. I have used the compatibility option set to true in the past to ensure the </a:t>
+            </a:r>
+            <a:r>
+              <a:rPr lang="en-US" sz="1100" dirty="0" err="1">
+                <a:latin typeface="Calibri" panose="020F0502020204030204" pitchFamily="34" charset="0"/>
+              </a:rPr>
+              <a:t>db</a:t>
+            </a:r>
+            <a:r>
+              <a:rPr lang="en-US" sz="1100" dirty="0">
+                <a:latin typeface="Calibri" panose="020F0502020204030204" pitchFamily="34" charset="0"/>
+              </a:rPr>
+              <a:t> I am deploying to is the right version I am targeting.</a:t>
+            </a:r>
+          </a:p>
+          <a:p>
             <a:endParaRPr lang="en-US" dirty="0"/>
           </a:p>
         </p:txBody>
@@ -5423,7 +5658,7 @@
     </p:spTree>
     <p:extLst>
       <p:ext uri="{BB962C8B-B14F-4D97-AF65-F5344CB8AC3E}">
-        <p14:creationId xmlns:p14="http://schemas.microsoft.com/office/powerpoint/2010/main" val="2806933163"/>
+        <p14:creationId xmlns:p14="http://schemas.microsoft.com/office/powerpoint/2010/main" val="1865331049"/>
       </p:ext>
     </p:extLst>
   </p:cSld>
@@ -5434,654 +5669,6 @@
 </file>
 
 <file path=ppt/notesSlides/notesSlide13.xml><?xml version="1.0" encoding="utf-8"?>
-<p:notes xmlns:a="http://schemas.openxmlformats.org/drawingml/2006/main" xmlns:r="http://schemas.openxmlformats.org/officeDocument/2006/relationships" xmlns:p="http://schemas.openxmlformats.org/presentationml/2006/main">
-  <p:cSld>
-    <p:spTree>
-      <p:nvGrpSpPr>
-        <p:cNvPr id="1" name="">
-          <a:extLst>
-            <a:ext uri="{FF2B5EF4-FFF2-40B4-BE49-F238E27FC236}">
-              <a16:creationId xmlns:a16="http://schemas.microsoft.com/office/drawing/2014/main" id="{A03AAD7E-CD65-5B04-588E-A55FC055F9B3}"/>
-            </a:ext>
-          </a:extLst>
-        </p:cNvPr>
-        <p:cNvGrpSpPr/>
-        <p:nvPr/>
-      </p:nvGrpSpPr>
-      <p:grpSpPr>
-        <a:xfrm>
-          <a:off x="0" y="0"/>
-          <a:ext cx="0" cy="0"/>
-          <a:chOff x="0" y="0"/>
-          <a:chExt cx="0" cy="0"/>
-        </a:xfrm>
-      </p:grpSpPr>
-      <p:sp>
-        <p:nvSpPr>
-          <p:cNvPr id="2" name="Slide Image Placeholder 1">
-            <a:extLst>
-              <a:ext uri="{FF2B5EF4-FFF2-40B4-BE49-F238E27FC236}">
-                <a16:creationId xmlns:a16="http://schemas.microsoft.com/office/drawing/2014/main" id="{E9D5BC69-75D6-860C-AF23-63661924DE3D}"/>
-              </a:ext>
-            </a:extLst>
-          </p:cNvPr>
-          <p:cNvSpPr>
-            <a:spLocks noGrp="1" noRot="1" noChangeAspect="1"/>
-          </p:cNvSpPr>
-          <p:nvPr>
-            <p:ph type="sldImg"/>
-          </p:nvPr>
-        </p:nvSpPr>
-        <p:spPr/>
-      </p:sp>
-      <p:sp>
-        <p:nvSpPr>
-          <p:cNvPr id="3" name="Notes Placeholder 2">
-            <a:extLst>
-              <a:ext uri="{FF2B5EF4-FFF2-40B4-BE49-F238E27FC236}">
-                <a16:creationId xmlns:a16="http://schemas.microsoft.com/office/drawing/2014/main" id="{DFECCB25-C63D-9909-86F7-34E3BBC26782}"/>
-              </a:ext>
-            </a:extLst>
-          </p:cNvPr>
-          <p:cNvSpPr>
-            <a:spLocks noGrp="1"/>
-          </p:cNvSpPr>
-          <p:nvPr>
-            <p:ph type="body" idx="1"/>
-          </p:nvPr>
-        </p:nvSpPr>
-        <p:spPr/>
-        <p:txBody>
-          <a:bodyPr/>
-          <a:lstStyle/>
-          <a:p>
-            <a:endParaRPr lang="en-US" dirty="0"/>
-          </a:p>
-        </p:txBody>
-      </p:sp>
-      <p:sp>
-        <p:nvSpPr>
-          <p:cNvPr id="4" name="Slide Number Placeholder 3">
-            <a:extLst>
-              <a:ext uri="{FF2B5EF4-FFF2-40B4-BE49-F238E27FC236}">
-                <a16:creationId xmlns:a16="http://schemas.microsoft.com/office/drawing/2014/main" id="{CB0F7350-80D5-E3ED-5CA0-D4D727423BCE}"/>
-              </a:ext>
-            </a:extLst>
-          </p:cNvPr>
-          <p:cNvSpPr>
-            <a:spLocks noGrp="1"/>
-          </p:cNvSpPr>
-          <p:nvPr>
-            <p:ph type="sldNum" sz="quarter" idx="5"/>
-          </p:nvPr>
-        </p:nvSpPr>
-        <p:spPr/>
-        <p:txBody>
-          <a:bodyPr/>
-          <a:lstStyle/>
-          <a:p>
-            <a:fld id="{CDDD3684-6E52-4019-8D61-A9B0BAC0DBD6}" type="slidenum">
-              <a:rPr lang="en-US" smtClean="0"/>
-              <a:t>14</a:t>
-            </a:fld>
-            <a:endParaRPr lang="en-US"/>
-          </a:p>
-        </p:txBody>
-      </p:sp>
-    </p:spTree>
-    <p:extLst>
-      <p:ext uri="{BB962C8B-B14F-4D97-AF65-F5344CB8AC3E}">
-        <p14:creationId xmlns:p14="http://schemas.microsoft.com/office/powerpoint/2010/main" val="3040400575"/>
-      </p:ext>
-    </p:extLst>
-  </p:cSld>
-  <p:clrMapOvr>
-    <a:masterClrMapping/>
-  </p:clrMapOvr>
-</p:notes>
-</file>
-
-<file path=ppt/notesSlides/notesSlide14.xml><?xml version="1.0" encoding="utf-8"?>
-<p:notes xmlns:a="http://schemas.openxmlformats.org/drawingml/2006/main" xmlns:r="http://schemas.openxmlformats.org/officeDocument/2006/relationships" xmlns:p="http://schemas.openxmlformats.org/presentationml/2006/main">
-  <p:cSld>
-    <p:spTree>
-      <p:nvGrpSpPr>
-        <p:cNvPr id="1" name="">
-          <a:extLst>
-            <a:ext uri="{FF2B5EF4-FFF2-40B4-BE49-F238E27FC236}">
-              <a16:creationId xmlns:a16="http://schemas.microsoft.com/office/drawing/2014/main" id="{FF4CB7A1-248B-7910-408C-83524354F67A}"/>
-            </a:ext>
-          </a:extLst>
-        </p:cNvPr>
-        <p:cNvGrpSpPr/>
-        <p:nvPr/>
-      </p:nvGrpSpPr>
-      <p:grpSpPr>
-        <a:xfrm>
-          <a:off x="0" y="0"/>
-          <a:ext cx="0" cy="0"/>
-          <a:chOff x="0" y="0"/>
-          <a:chExt cx="0" cy="0"/>
-        </a:xfrm>
-      </p:grpSpPr>
-      <p:sp>
-        <p:nvSpPr>
-          <p:cNvPr id="2" name="Slide Image Placeholder 1">
-            <a:extLst>
-              <a:ext uri="{FF2B5EF4-FFF2-40B4-BE49-F238E27FC236}">
-                <a16:creationId xmlns:a16="http://schemas.microsoft.com/office/drawing/2014/main" id="{02FAC187-6314-A2BE-CE1C-E828E0391E60}"/>
-              </a:ext>
-            </a:extLst>
-          </p:cNvPr>
-          <p:cNvSpPr>
-            <a:spLocks noGrp="1" noRot="1" noChangeAspect="1"/>
-          </p:cNvSpPr>
-          <p:nvPr>
-            <p:ph type="sldImg"/>
-          </p:nvPr>
-        </p:nvSpPr>
-        <p:spPr/>
-      </p:sp>
-      <p:sp>
-        <p:nvSpPr>
-          <p:cNvPr id="3" name="Notes Placeholder 2">
-            <a:extLst>
-              <a:ext uri="{FF2B5EF4-FFF2-40B4-BE49-F238E27FC236}">
-                <a16:creationId xmlns:a16="http://schemas.microsoft.com/office/drawing/2014/main" id="{FCD7DDE2-8034-C3A6-8B5D-BCC026155BFA}"/>
-              </a:ext>
-            </a:extLst>
-          </p:cNvPr>
-          <p:cNvSpPr>
-            <a:spLocks noGrp="1"/>
-          </p:cNvSpPr>
-          <p:nvPr>
-            <p:ph type="body" idx="1"/>
-          </p:nvPr>
-        </p:nvSpPr>
-        <p:spPr/>
-        <p:txBody>
-          <a:bodyPr/>
-          <a:lstStyle/>
-          <a:p>
-            <a:endParaRPr lang="en-US" dirty="0"/>
-          </a:p>
-        </p:txBody>
-      </p:sp>
-      <p:sp>
-        <p:nvSpPr>
-          <p:cNvPr id="4" name="Slide Number Placeholder 3">
-            <a:extLst>
-              <a:ext uri="{FF2B5EF4-FFF2-40B4-BE49-F238E27FC236}">
-                <a16:creationId xmlns:a16="http://schemas.microsoft.com/office/drawing/2014/main" id="{DB0325A3-3D4C-C58A-CAE3-070F3BB5DE1A}"/>
-              </a:ext>
-            </a:extLst>
-          </p:cNvPr>
-          <p:cNvSpPr>
-            <a:spLocks noGrp="1"/>
-          </p:cNvSpPr>
-          <p:nvPr>
-            <p:ph type="sldNum" sz="quarter" idx="5"/>
-          </p:nvPr>
-        </p:nvSpPr>
-        <p:spPr/>
-        <p:txBody>
-          <a:bodyPr/>
-          <a:lstStyle/>
-          <a:p>
-            <a:fld id="{CDDD3684-6E52-4019-8D61-A9B0BAC0DBD6}" type="slidenum">
-              <a:rPr lang="en-US" smtClean="0"/>
-              <a:t>15</a:t>
-            </a:fld>
-            <a:endParaRPr lang="en-US"/>
-          </a:p>
-        </p:txBody>
-      </p:sp>
-    </p:spTree>
-    <p:extLst>
-      <p:ext uri="{BB962C8B-B14F-4D97-AF65-F5344CB8AC3E}">
-        <p14:creationId xmlns:p14="http://schemas.microsoft.com/office/powerpoint/2010/main" val="724122042"/>
-      </p:ext>
-    </p:extLst>
-  </p:cSld>
-  <p:clrMapOvr>
-    <a:masterClrMapping/>
-  </p:clrMapOvr>
-</p:notes>
-</file>
-
-<file path=ppt/notesSlides/notesSlide15.xml><?xml version="1.0" encoding="utf-8"?>
-<p:notes xmlns:a="http://schemas.openxmlformats.org/drawingml/2006/main" xmlns:r="http://schemas.openxmlformats.org/officeDocument/2006/relationships" xmlns:p="http://schemas.openxmlformats.org/presentationml/2006/main">
-  <p:cSld>
-    <p:spTree>
-      <p:nvGrpSpPr>
-        <p:cNvPr id="1" name="">
-          <a:extLst>
-            <a:ext uri="{FF2B5EF4-FFF2-40B4-BE49-F238E27FC236}">
-              <a16:creationId xmlns:a16="http://schemas.microsoft.com/office/drawing/2014/main" id="{EF69CEF6-CBCE-B1C3-2D0D-0BC01649AF16}"/>
-            </a:ext>
-          </a:extLst>
-        </p:cNvPr>
-        <p:cNvGrpSpPr/>
-        <p:nvPr/>
-      </p:nvGrpSpPr>
-      <p:grpSpPr>
-        <a:xfrm>
-          <a:off x="0" y="0"/>
-          <a:ext cx="0" cy="0"/>
-          <a:chOff x="0" y="0"/>
-          <a:chExt cx="0" cy="0"/>
-        </a:xfrm>
-      </p:grpSpPr>
-      <p:sp>
-        <p:nvSpPr>
-          <p:cNvPr id="2" name="Slide Image Placeholder 1">
-            <a:extLst>
-              <a:ext uri="{FF2B5EF4-FFF2-40B4-BE49-F238E27FC236}">
-                <a16:creationId xmlns:a16="http://schemas.microsoft.com/office/drawing/2014/main" id="{04529E4B-38FA-9E4E-1119-B730D6E80CBB}"/>
-              </a:ext>
-            </a:extLst>
-          </p:cNvPr>
-          <p:cNvSpPr>
-            <a:spLocks noGrp="1" noRot="1" noChangeAspect="1"/>
-          </p:cNvSpPr>
-          <p:nvPr>
-            <p:ph type="sldImg"/>
-          </p:nvPr>
-        </p:nvSpPr>
-        <p:spPr/>
-      </p:sp>
-      <p:sp>
-        <p:nvSpPr>
-          <p:cNvPr id="3" name="Notes Placeholder 2">
-            <a:extLst>
-              <a:ext uri="{FF2B5EF4-FFF2-40B4-BE49-F238E27FC236}">
-                <a16:creationId xmlns:a16="http://schemas.microsoft.com/office/drawing/2014/main" id="{6D192676-984D-8716-9022-3B128D1BD6C1}"/>
-              </a:ext>
-            </a:extLst>
-          </p:cNvPr>
-          <p:cNvSpPr>
-            <a:spLocks noGrp="1"/>
-          </p:cNvSpPr>
-          <p:nvPr>
-            <p:ph type="body" idx="1"/>
-          </p:nvPr>
-        </p:nvSpPr>
-        <p:spPr/>
-        <p:txBody>
-          <a:bodyPr/>
-          <a:lstStyle/>
-          <a:p>
-            <a:endParaRPr lang="en-US" dirty="0"/>
-          </a:p>
-        </p:txBody>
-      </p:sp>
-      <p:sp>
-        <p:nvSpPr>
-          <p:cNvPr id="4" name="Slide Number Placeholder 3">
-            <a:extLst>
-              <a:ext uri="{FF2B5EF4-FFF2-40B4-BE49-F238E27FC236}">
-                <a16:creationId xmlns:a16="http://schemas.microsoft.com/office/drawing/2014/main" id="{B67DC160-6394-14D8-B9CB-473DBE7B5957}"/>
-              </a:ext>
-            </a:extLst>
-          </p:cNvPr>
-          <p:cNvSpPr>
-            <a:spLocks noGrp="1"/>
-          </p:cNvSpPr>
-          <p:nvPr>
-            <p:ph type="sldNum" sz="quarter" idx="5"/>
-          </p:nvPr>
-        </p:nvSpPr>
-        <p:spPr/>
-        <p:txBody>
-          <a:bodyPr/>
-          <a:lstStyle/>
-          <a:p>
-            <a:fld id="{CDDD3684-6E52-4019-8D61-A9B0BAC0DBD6}" type="slidenum">
-              <a:rPr lang="en-US" smtClean="0"/>
-              <a:t>16</a:t>
-            </a:fld>
-            <a:endParaRPr lang="en-US"/>
-          </a:p>
-        </p:txBody>
-      </p:sp>
-    </p:spTree>
-    <p:extLst>
-      <p:ext uri="{BB962C8B-B14F-4D97-AF65-F5344CB8AC3E}">
-        <p14:creationId xmlns:p14="http://schemas.microsoft.com/office/powerpoint/2010/main" val="1308973341"/>
-      </p:ext>
-    </p:extLst>
-  </p:cSld>
-  <p:clrMapOvr>
-    <a:masterClrMapping/>
-  </p:clrMapOvr>
-</p:notes>
-</file>
-
-<file path=ppt/notesSlides/notesSlide16.xml><?xml version="1.0" encoding="utf-8"?>
-<p:notes xmlns:a="http://schemas.openxmlformats.org/drawingml/2006/main" xmlns:r="http://schemas.openxmlformats.org/officeDocument/2006/relationships" xmlns:p="http://schemas.openxmlformats.org/presentationml/2006/main">
-  <p:cSld>
-    <p:spTree>
-      <p:nvGrpSpPr>
-        <p:cNvPr id="1" name="">
-          <a:extLst>
-            <a:ext uri="{FF2B5EF4-FFF2-40B4-BE49-F238E27FC236}">
-              <a16:creationId xmlns:a16="http://schemas.microsoft.com/office/drawing/2014/main" id="{11010269-83F4-4D00-ED5E-7DBEEC413409}"/>
-            </a:ext>
-          </a:extLst>
-        </p:cNvPr>
-        <p:cNvGrpSpPr/>
-        <p:nvPr/>
-      </p:nvGrpSpPr>
-      <p:grpSpPr>
-        <a:xfrm>
-          <a:off x="0" y="0"/>
-          <a:ext cx="0" cy="0"/>
-          <a:chOff x="0" y="0"/>
-          <a:chExt cx="0" cy="0"/>
-        </a:xfrm>
-      </p:grpSpPr>
-      <p:sp>
-        <p:nvSpPr>
-          <p:cNvPr id="2" name="Slide Image Placeholder 1">
-            <a:extLst>
-              <a:ext uri="{FF2B5EF4-FFF2-40B4-BE49-F238E27FC236}">
-                <a16:creationId xmlns:a16="http://schemas.microsoft.com/office/drawing/2014/main" id="{90E62A16-B878-C59D-6C55-72AB2844F568}"/>
-              </a:ext>
-            </a:extLst>
-          </p:cNvPr>
-          <p:cNvSpPr>
-            <a:spLocks noGrp="1" noRot="1" noChangeAspect="1"/>
-          </p:cNvSpPr>
-          <p:nvPr>
-            <p:ph type="sldImg"/>
-          </p:nvPr>
-        </p:nvSpPr>
-        <p:spPr/>
-      </p:sp>
-      <p:sp>
-        <p:nvSpPr>
-          <p:cNvPr id="3" name="Notes Placeholder 2">
-            <a:extLst>
-              <a:ext uri="{FF2B5EF4-FFF2-40B4-BE49-F238E27FC236}">
-                <a16:creationId xmlns:a16="http://schemas.microsoft.com/office/drawing/2014/main" id="{12F95D8B-CDFF-869A-0C52-180E2A1FFCB8}"/>
-              </a:ext>
-            </a:extLst>
-          </p:cNvPr>
-          <p:cNvSpPr>
-            <a:spLocks noGrp="1"/>
-          </p:cNvSpPr>
-          <p:nvPr>
-            <p:ph type="body" idx="1"/>
-          </p:nvPr>
-        </p:nvSpPr>
-        <p:spPr/>
-        <p:txBody>
-          <a:bodyPr/>
-          <a:lstStyle/>
-          <a:p>
-            <a:endParaRPr lang="en-US" dirty="0"/>
-          </a:p>
-        </p:txBody>
-      </p:sp>
-      <p:sp>
-        <p:nvSpPr>
-          <p:cNvPr id="4" name="Slide Number Placeholder 3">
-            <a:extLst>
-              <a:ext uri="{FF2B5EF4-FFF2-40B4-BE49-F238E27FC236}">
-                <a16:creationId xmlns:a16="http://schemas.microsoft.com/office/drawing/2014/main" id="{FD1BFB80-73AA-8948-3CDB-2163C424F6C8}"/>
-              </a:ext>
-            </a:extLst>
-          </p:cNvPr>
-          <p:cNvSpPr>
-            <a:spLocks noGrp="1"/>
-          </p:cNvSpPr>
-          <p:nvPr>
-            <p:ph type="sldNum" sz="quarter" idx="5"/>
-          </p:nvPr>
-        </p:nvSpPr>
-        <p:spPr/>
-        <p:txBody>
-          <a:bodyPr/>
-          <a:lstStyle/>
-          <a:p>
-            <a:fld id="{CDDD3684-6E52-4019-8D61-A9B0BAC0DBD6}" type="slidenum">
-              <a:rPr lang="en-US" smtClean="0"/>
-              <a:t>17</a:t>
-            </a:fld>
-            <a:endParaRPr lang="en-US"/>
-          </a:p>
-        </p:txBody>
-      </p:sp>
-    </p:spTree>
-    <p:extLst>
-      <p:ext uri="{BB962C8B-B14F-4D97-AF65-F5344CB8AC3E}">
-        <p14:creationId xmlns:p14="http://schemas.microsoft.com/office/powerpoint/2010/main" val="1257430068"/>
-      </p:ext>
-    </p:extLst>
-  </p:cSld>
-  <p:clrMapOvr>
-    <a:masterClrMapping/>
-  </p:clrMapOvr>
-</p:notes>
-</file>
-
-<file path=ppt/notesSlides/notesSlide17.xml><?xml version="1.0" encoding="utf-8"?>
-<p:notes xmlns:a="http://schemas.openxmlformats.org/drawingml/2006/main" xmlns:r="http://schemas.openxmlformats.org/officeDocument/2006/relationships" xmlns:p="http://schemas.openxmlformats.org/presentationml/2006/main">
-  <p:cSld>
-    <p:spTree>
-      <p:nvGrpSpPr>
-        <p:cNvPr id="1" name="">
-          <a:extLst>
-            <a:ext uri="{FF2B5EF4-FFF2-40B4-BE49-F238E27FC236}">
-              <a16:creationId xmlns:a16="http://schemas.microsoft.com/office/drawing/2014/main" id="{47C26FEB-2719-6F52-53B0-BB407BE7F8EC}"/>
-            </a:ext>
-          </a:extLst>
-        </p:cNvPr>
-        <p:cNvGrpSpPr/>
-        <p:nvPr/>
-      </p:nvGrpSpPr>
-      <p:grpSpPr>
-        <a:xfrm>
-          <a:off x="0" y="0"/>
-          <a:ext cx="0" cy="0"/>
-          <a:chOff x="0" y="0"/>
-          <a:chExt cx="0" cy="0"/>
-        </a:xfrm>
-      </p:grpSpPr>
-      <p:sp>
-        <p:nvSpPr>
-          <p:cNvPr id="2" name="Slide Image Placeholder 1">
-            <a:extLst>
-              <a:ext uri="{FF2B5EF4-FFF2-40B4-BE49-F238E27FC236}">
-                <a16:creationId xmlns:a16="http://schemas.microsoft.com/office/drawing/2014/main" id="{65DEDEE4-62D6-5756-054F-DAB33624328B}"/>
-              </a:ext>
-            </a:extLst>
-          </p:cNvPr>
-          <p:cNvSpPr>
-            <a:spLocks noGrp="1" noRot="1" noChangeAspect="1"/>
-          </p:cNvSpPr>
-          <p:nvPr>
-            <p:ph type="sldImg"/>
-          </p:nvPr>
-        </p:nvSpPr>
-        <p:spPr/>
-      </p:sp>
-      <p:sp>
-        <p:nvSpPr>
-          <p:cNvPr id="3" name="Notes Placeholder 2">
-            <a:extLst>
-              <a:ext uri="{FF2B5EF4-FFF2-40B4-BE49-F238E27FC236}">
-                <a16:creationId xmlns:a16="http://schemas.microsoft.com/office/drawing/2014/main" id="{1A35B3F2-8C36-A283-7217-0FD825D52A33}"/>
-              </a:ext>
-            </a:extLst>
-          </p:cNvPr>
-          <p:cNvSpPr>
-            <a:spLocks noGrp="1"/>
-          </p:cNvSpPr>
-          <p:nvPr>
-            <p:ph type="body" idx="1"/>
-          </p:nvPr>
-        </p:nvSpPr>
-        <p:spPr/>
-        <p:txBody>
-          <a:bodyPr/>
-          <a:lstStyle/>
-          <a:p>
-            <a:endParaRPr lang="en-US" dirty="0"/>
-          </a:p>
-        </p:txBody>
-      </p:sp>
-      <p:sp>
-        <p:nvSpPr>
-          <p:cNvPr id="4" name="Slide Number Placeholder 3">
-            <a:extLst>
-              <a:ext uri="{FF2B5EF4-FFF2-40B4-BE49-F238E27FC236}">
-                <a16:creationId xmlns:a16="http://schemas.microsoft.com/office/drawing/2014/main" id="{CE981737-517F-0CF3-F116-DB420E4182A4}"/>
-              </a:ext>
-            </a:extLst>
-          </p:cNvPr>
-          <p:cNvSpPr>
-            <a:spLocks noGrp="1"/>
-          </p:cNvSpPr>
-          <p:nvPr>
-            <p:ph type="sldNum" sz="quarter" idx="5"/>
-          </p:nvPr>
-        </p:nvSpPr>
-        <p:spPr/>
-        <p:txBody>
-          <a:bodyPr/>
-          <a:lstStyle/>
-          <a:p>
-            <a:fld id="{CDDD3684-6E52-4019-8D61-A9B0BAC0DBD6}" type="slidenum">
-              <a:rPr lang="en-US" smtClean="0"/>
-              <a:t>18</a:t>
-            </a:fld>
-            <a:endParaRPr lang="en-US"/>
-          </a:p>
-        </p:txBody>
-      </p:sp>
-    </p:spTree>
-    <p:extLst>
-      <p:ext uri="{BB962C8B-B14F-4D97-AF65-F5344CB8AC3E}">
-        <p14:creationId xmlns:p14="http://schemas.microsoft.com/office/powerpoint/2010/main" val="2746104965"/>
-      </p:ext>
-    </p:extLst>
-  </p:cSld>
-  <p:clrMapOvr>
-    <a:masterClrMapping/>
-  </p:clrMapOvr>
-</p:notes>
-</file>
-
-<file path=ppt/notesSlides/notesSlide18.xml><?xml version="1.0" encoding="utf-8"?>
-<p:notes xmlns:a="http://schemas.openxmlformats.org/drawingml/2006/main" xmlns:r="http://schemas.openxmlformats.org/officeDocument/2006/relationships" xmlns:p="http://schemas.openxmlformats.org/presentationml/2006/main">
-  <p:cSld>
-    <p:spTree>
-      <p:nvGrpSpPr>
-        <p:cNvPr id="1" name="">
-          <a:extLst>
-            <a:ext uri="{FF2B5EF4-FFF2-40B4-BE49-F238E27FC236}">
-              <a16:creationId xmlns:a16="http://schemas.microsoft.com/office/drawing/2014/main" id="{3AD63C0A-FF9E-D70D-B301-C5147788EB22}"/>
-            </a:ext>
-          </a:extLst>
-        </p:cNvPr>
-        <p:cNvGrpSpPr/>
-        <p:nvPr/>
-      </p:nvGrpSpPr>
-      <p:grpSpPr>
-        <a:xfrm>
-          <a:off x="0" y="0"/>
-          <a:ext cx="0" cy="0"/>
-          <a:chOff x="0" y="0"/>
-          <a:chExt cx="0" cy="0"/>
-        </a:xfrm>
-      </p:grpSpPr>
-      <p:sp>
-        <p:nvSpPr>
-          <p:cNvPr id="2" name="Slide Image Placeholder 1">
-            <a:extLst>
-              <a:ext uri="{FF2B5EF4-FFF2-40B4-BE49-F238E27FC236}">
-                <a16:creationId xmlns:a16="http://schemas.microsoft.com/office/drawing/2014/main" id="{3D25B56F-52FB-EA96-1060-CBBC1E13B21E}"/>
-              </a:ext>
-            </a:extLst>
-          </p:cNvPr>
-          <p:cNvSpPr>
-            <a:spLocks noGrp="1" noRot="1" noChangeAspect="1"/>
-          </p:cNvSpPr>
-          <p:nvPr>
-            <p:ph type="sldImg"/>
-          </p:nvPr>
-        </p:nvSpPr>
-        <p:spPr/>
-      </p:sp>
-      <p:sp>
-        <p:nvSpPr>
-          <p:cNvPr id="3" name="Notes Placeholder 2">
-            <a:extLst>
-              <a:ext uri="{FF2B5EF4-FFF2-40B4-BE49-F238E27FC236}">
-                <a16:creationId xmlns:a16="http://schemas.microsoft.com/office/drawing/2014/main" id="{EE563408-1FEA-2E83-6671-8295E11DE9D4}"/>
-              </a:ext>
-            </a:extLst>
-          </p:cNvPr>
-          <p:cNvSpPr>
-            <a:spLocks noGrp="1"/>
-          </p:cNvSpPr>
-          <p:nvPr>
-            <p:ph type="body" idx="1"/>
-          </p:nvPr>
-        </p:nvSpPr>
-        <p:spPr/>
-        <p:txBody>
-          <a:bodyPr/>
-          <a:lstStyle/>
-          <a:p>
-            <a:endParaRPr lang="en-US" dirty="0"/>
-          </a:p>
-        </p:txBody>
-      </p:sp>
-      <p:sp>
-        <p:nvSpPr>
-          <p:cNvPr id="4" name="Slide Number Placeholder 3">
-            <a:extLst>
-              <a:ext uri="{FF2B5EF4-FFF2-40B4-BE49-F238E27FC236}">
-                <a16:creationId xmlns:a16="http://schemas.microsoft.com/office/drawing/2014/main" id="{579AA795-EA53-6563-9891-F108240EB0DF}"/>
-              </a:ext>
-            </a:extLst>
-          </p:cNvPr>
-          <p:cNvSpPr>
-            <a:spLocks noGrp="1"/>
-          </p:cNvSpPr>
-          <p:nvPr>
-            <p:ph type="sldNum" sz="quarter" idx="5"/>
-          </p:nvPr>
-        </p:nvSpPr>
-        <p:spPr/>
-        <p:txBody>
-          <a:bodyPr/>
-          <a:lstStyle/>
-          <a:p>
-            <a:fld id="{CDDD3684-6E52-4019-8D61-A9B0BAC0DBD6}" type="slidenum">
-              <a:rPr lang="en-US" smtClean="0"/>
-              <a:t>19</a:t>
-            </a:fld>
-            <a:endParaRPr lang="en-US"/>
-          </a:p>
-        </p:txBody>
-      </p:sp>
-    </p:spTree>
-    <p:extLst>
-      <p:ext uri="{BB962C8B-B14F-4D97-AF65-F5344CB8AC3E}">
-        <p14:creationId xmlns:p14="http://schemas.microsoft.com/office/powerpoint/2010/main" val="3187200408"/>
-      </p:ext>
-    </p:extLst>
-  </p:cSld>
-  <p:clrMapOvr>
-    <a:masterClrMapping/>
-  </p:clrMapOvr>
-</p:notes>
-</file>
-
-<file path=ppt/notesSlides/notesSlide19.xml><?xml version="1.0" encoding="utf-8"?>
 <p:notes xmlns:a="http://schemas.openxmlformats.org/drawingml/2006/main" xmlns:r="http://schemas.openxmlformats.org/officeDocument/2006/relationships" xmlns:p="http://schemas.openxmlformats.org/presentationml/2006/main">
   <p:cSld>
     <p:spTree>
@@ -6146,7 +5733,7 @@
           <a:p>
             <a:fld id="{CDDD3684-6E52-4019-8D61-A9B0BAC0DBD6}" type="slidenum">
               <a:rPr lang="en-US" smtClean="0"/>
-              <a:t>22</a:t>
+              <a:t>14</a:t>
             </a:fld>
             <a:endParaRPr lang="en-US"/>
           </a:p>
@@ -6155,7 +5742,655 @@
     </p:spTree>
     <p:extLst>
       <p:ext uri="{BB962C8B-B14F-4D97-AF65-F5344CB8AC3E}">
-        <p14:creationId xmlns:p14="http://schemas.microsoft.com/office/powerpoint/2010/main" val="1020007856"/>
+        <p14:creationId xmlns:p14="http://schemas.microsoft.com/office/powerpoint/2010/main" val="2806933163"/>
+      </p:ext>
+    </p:extLst>
+  </p:cSld>
+  <p:clrMapOvr>
+    <a:masterClrMapping/>
+  </p:clrMapOvr>
+</p:notes>
+</file>
+
+<file path=ppt/notesSlides/notesSlide14.xml><?xml version="1.0" encoding="utf-8"?>
+<p:notes xmlns:a="http://schemas.openxmlformats.org/drawingml/2006/main" xmlns:r="http://schemas.openxmlformats.org/officeDocument/2006/relationships" xmlns:p="http://schemas.openxmlformats.org/presentationml/2006/main">
+  <p:cSld>
+    <p:spTree>
+      <p:nvGrpSpPr>
+        <p:cNvPr id="1" name="">
+          <a:extLst>
+            <a:ext uri="{FF2B5EF4-FFF2-40B4-BE49-F238E27FC236}">
+              <a16:creationId xmlns:a16="http://schemas.microsoft.com/office/drawing/2014/main" id="{A03AAD7E-CD65-5B04-588E-A55FC055F9B3}"/>
+            </a:ext>
+          </a:extLst>
+        </p:cNvPr>
+        <p:cNvGrpSpPr/>
+        <p:nvPr/>
+      </p:nvGrpSpPr>
+      <p:grpSpPr>
+        <a:xfrm>
+          <a:off x="0" y="0"/>
+          <a:ext cx="0" cy="0"/>
+          <a:chOff x="0" y="0"/>
+          <a:chExt cx="0" cy="0"/>
+        </a:xfrm>
+      </p:grpSpPr>
+      <p:sp>
+        <p:nvSpPr>
+          <p:cNvPr id="2" name="Slide Image Placeholder 1">
+            <a:extLst>
+              <a:ext uri="{FF2B5EF4-FFF2-40B4-BE49-F238E27FC236}">
+                <a16:creationId xmlns:a16="http://schemas.microsoft.com/office/drawing/2014/main" id="{E9D5BC69-75D6-860C-AF23-63661924DE3D}"/>
+              </a:ext>
+            </a:extLst>
+          </p:cNvPr>
+          <p:cNvSpPr>
+            <a:spLocks noGrp="1" noRot="1" noChangeAspect="1"/>
+          </p:cNvSpPr>
+          <p:nvPr>
+            <p:ph type="sldImg"/>
+          </p:nvPr>
+        </p:nvSpPr>
+        <p:spPr/>
+      </p:sp>
+      <p:sp>
+        <p:nvSpPr>
+          <p:cNvPr id="3" name="Notes Placeholder 2">
+            <a:extLst>
+              <a:ext uri="{FF2B5EF4-FFF2-40B4-BE49-F238E27FC236}">
+                <a16:creationId xmlns:a16="http://schemas.microsoft.com/office/drawing/2014/main" id="{DFECCB25-C63D-9909-86F7-34E3BBC26782}"/>
+              </a:ext>
+            </a:extLst>
+          </p:cNvPr>
+          <p:cNvSpPr>
+            <a:spLocks noGrp="1"/>
+          </p:cNvSpPr>
+          <p:nvPr>
+            <p:ph type="body" idx="1"/>
+          </p:nvPr>
+        </p:nvSpPr>
+        <p:spPr/>
+        <p:txBody>
+          <a:bodyPr/>
+          <a:lstStyle/>
+          <a:p>
+            <a:endParaRPr lang="en-US" dirty="0"/>
+          </a:p>
+        </p:txBody>
+      </p:sp>
+      <p:sp>
+        <p:nvSpPr>
+          <p:cNvPr id="4" name="Slide Number Placeholder 3">
+            <a:extLst>
+              <a:ext uri="{FF2B5EF4-FFF2-40B4-BE49-F238E27FC236}">
+                <a16:creationId xmlns:a16="http://schemas.microsoft.com/office/drawing/2014/main" id="{CB0F7350-80D5-E3ED-5CA0-D4D727423BCE}"/>
+              </a:ext>
+            </a:extLst>
+          </p:cNvPr>
+          <p:cNvSpPr>
+            <a:spLocks noGrp="1"/>
+          </p:cNvSpPr>
+          <p:nvPr>
+            <p:ph type="sldNum" sz="quarter" idx="5"/>
+          </p:nvPr>
+        </p:nvSpPr>
+        <p:spPr/>
+        <p:txBody>
+          <a:bodyPr/>
+          <a:lstStyle/>
+          <a:p>
+            <a:fld id="{CDDD3684-6E52-4019-8D61-A9B0BAC0DBD6}" type="slidenum">
+              <a:rPr lang="en-US" smtClean="0"/>
+              <a:t>15</a:t>
+            </a:fld>
+            <a:endParaRPr lang="en-US"/>
+          </a:p>
+        </p:txBody>
+      </p:sp>
+    </p:spTree>
+    <p:extLst>
+      <p:ext uri="{BB962C8B-B14F-4D97-AF65-F5344CB8AC3E}">
+        <p14:creationId xmlns:p14="http://schemas.microsoft.com/office/powerpoint/2010/main" val="3040400575"/>
+      </p:ext>
+    </p:extLst>
+  </p:cSld>
+  <p:clrMapOvr>
+    <a:masterClrMapping/>
+  </p:clrMapOvr>
+</p:notes>
+</file>
+
+<file path=ppt/notesSlides/notesSlide15.xml><?xml version="1.0" encoding="utf-8"?>
+<p:notes xmlns:a="http://schemas.openxmlformats.org/drawingml/2006/main" xmlns:r="http://schemas.openxmlformats.org/officeDocument/2006/relationships" xmlns:p="http://schemas.openxmlformats.org/presentationml/2006/main">
+  <p:cSld>
+    <p:spTree>
+      <p:nvGrpSpPr>
+        <p:cNvPr id="1" name="">
+          <a:extLst>
+            <a:ext uri="{FF2B5EF4-FFF2-40B4-BE49-F238E27FC236}">
+              <a16:creationId xmlns:a16="http://schemas.microsoft.com/office/drawing/2014/main" id="{FF4CB7A1-248B-7910-408C-83524354F67A}"/>
+            </a:ext>
+          </a:extLst>
+        </p:cNvPr>
+        <p:cNvGrpSpPr/>
+        <p:nvPr/>
+      </p:nvGrpSpPr>
+      <p:grpSpPr>
+        <a:xfrm>
+          <a:off x="0" y="0"/>
+          <a:ext cx="0" cy="0"/>
+          <a:chOff x="0" y="0"/>
+          <a:chExt cx="0" cy="0"/>
+        </a:xfrm>
+      </p:grpSpPr>
+      <p:sp>
+        <p:nvSpPr>
+          <p:cNvPr id="2" name="Slide Image Placeholder 1">
+            <a:extLst>
+              <a:ext uri="{FF2B5EF4-FFF2-40B4-BE49-F238E27FC236}">
+                <a16:creationId xmlns:a16="http://schemas.microsoft.com/office/drawing/2014/main" id="{02FAC187-6314-A2BE-CE1C-E828E0391E60}"/>
+              </a:ext>
+            </a:extLst>
+          </p:cNvPr>
+          <p:cNvSpPr>
+            <a:spLocks noGrp="1" noRot="1" noChangeAspect="1"/>
+          </p:cNvSpPr>
+          <p:nvPr>
+            <p:ph type="sldImg"/>
+          </p:nvPr>
+        </p:nvSpPr>
+        <p:spPr/>
+      </p:sp>
+      <p:sp>
+        <p:nvSpPr>
+          <p:cNvPr id="3" name="Notes Placeholder 2">
+            <a:extLst>
+              <a:ext uri="{FF2B5EF4-FFF2-40B4-BE49-F238E27FC236}">
+                <a16:creationId xmlns:a16="http://schemas.microsoft.com/office/drawing/2014/main" id="{FCD7DDE2-8034-C3A6-8B5D-BCC026155BFA}"/>
+              </a:ext>
+            </a:extLst>
+          </p:cNvPr>
+          <p:cNvSpPr>
+            <a:spLocks noGrp="1"/>
+          </p:cNvSpPr>
+          <p:nvPr>
+            <p:ph type="body" idx="1"/>
+          </p:nvPr>
+        </p:nvSpPr>
+        <p:spPr/>
+        <p:txBody>
+          <a:bodyPr/>
+          <a:lstStyle/>
+          <a:p>
+            <a:endParaRPr lang="en-US" dirty="0"/>
+          </a:p>
+        </p:txBody>
+      </p:sp>
+      <p:sp>
+        <p:nvSpPr>
+          <p:cNvPr id="4" name="Slide Number Placeholder 3">
+            <a:extLst>
+              <a:ext uri="{FF2B5EF4-FFF2-40B4-BE49-F238E27FC236}">
+                <a16:creationId xmlns:a16="http://schemas.microsoft.com/office/drawing/2014/main" id="{DB0325A3-3D4C-C58A-CAE3-070F3BB5DE1A}"/>
+              </a:ext>
+            </a:extLst>
+          </p:cNvPr>
+          <p:cNvSpPr>
+            <a:spLocks noGrp="1"/>
+          </p:cNvSpPr>
+          <p:nvPr>
+            <p:ph type="sldNum" sz="quarter" idx="5"/>
+          </p:nvPr>
+        </p:nvSpPr>
+        <p:spPr/>
+        <p:txBody>
+          <a:bodyPr/>
+          <a:lstStyle/>
+          <a:p>
+            <a:fld id="{CDDD3684-6E52-4019-8D61-A9B0BAC0DBD6}" type="slidenum">
+              <a:rPr lang="en-US" smtClean="0"/>
+              <a:t>16</a:t>
+            </a:fld>
+            <a:endParaRPr lang="en-US"/>
+          </a:p>
+        </p:txBody>
+      </p:sp>
+    </p:spTree>
+    <p:extLst>
+      <p:ext uri="{BB962C8B-B14F-4D97-AF65-F5344CB8AC3E}">
+        <p14:creationId xmlns:p14="http://schemas.microsoft.com/office/powerpoint/2010/main" val="724122042"/>
+      </p:ext>
+    </p:extLst>
+  </p:cSld>
+  <p:clrMapOvr>
+    <a:masterClrMapping/>
+  </p:clrMapOvr>
+</p:notes>
+</file>
+
+<file path=ppt/notesSlides/notesSlide16.xml><?xml version="1.0" encoding="utf-8"?>
+<p:notes xmlns:a="http://schemas.openxmlformats.org/drawingml/2006/main" xmlns:r="http://schemas.openxmlformats.org/officeDocument/2006/relationships" xmlns:p="http://schemas.openxmlformats.org/presentationml/2006/main">
+  <p:cSld>
+    <p:spTree>
+      <p:nvGrpSpPr>
+        <p:cNvPr id="1" name="">
+          <a:extLst>
+            <a:ext uri="{FF2B5EF4-FFF2-40B4-BE49-F238E27FC236}">
+              <a16:creationId xmlns:a16="http://schemas.microsoft.com/office/drawing/2014/main" id="{EF69CEF6-CBCE-B1C3-2D0D-0BC01649AF16}"/>
+            </a:ext>
+          </a:extLst>
+        </p:cNvPr>
+        <p:cNvGrpSpPr/>
+        <p:nvPr/>
+      </p:nvGrpSpPr>
+      <p:grpSpPr>
+        <a:xfrm>
+          <a:off x="0" y="0"/>
+          <a:ext cx="0" cy="0"/>
+          <a:chOff x="0" y="0"/>
+          <a:chExt cx="0" cy="0"/>
+        </a:xfrm>
+      </p:grpSpPr>
+      <p:sp>
+        <p:nvSpPr>
+          <p:cNvPr id="2" name="Slide Image Placeholder 1">
+            <a:extLst>
+              <a:ext uri="{FF2B5EF4-FFF2-40B4-BE49-F238E27FC236}">
+                <a16:creationId xmlns:a16="http://schemas.microsoft.com/office/drawing/2014/main" id="{04529E4B-38FA-9E4E-1119-B730D6E80CBB}"/>
+              </a:ext>
+            </a:extLst>
+          </p:cNvPr>
+          <p:cNvSpPr>
+            <a:spLocks noGrp="1" noRot="1" noChangeAspect="1"/>
+          </p:cNvSpPr>
+          <p:nvPr>
+            <p:ph type="sldImg"/>
+          </p:nvPr>
+        </p:nvSpPr>
+        <p:spPr/>
+      </p:sp>
+      <p:sp>
+        <p:nvSpPr>
+          <p:cNvPr id="3" name="Notes Placeholder 2">
+            <a:extLst>
+              <a:ext uri="{FF2B5EF4-FFF2-40B4-BE49-F238E27FC236}">
+                <a16:creationId xmlns:a16="http://schemas.microsoft.com/office/drawing/2014/main" id="{6D192676-984D-8716-9022-3B128D1BD6C1}"/>
+              </a:ext>
+            </a:extLst>
+          </p:cNvPr>
+          <p:cNvSpPr>
+            <a:spLocks noGrp="1"/>
+          </p:cNvSpPr>
+          <p:nvPr>
+            <p:ph type="body" idx="1"/>
+          </p:nvPr>
+        </p:nvSpPr>
+        <p:spPr/>
+        <p:txBody>
+          <a:bodyPr/>
+          <a:lstStyle/>
+          <a:p>
+            <a:endParaRPr lang="en-US" dirty="0"/>
+          </a:p>
+        </p:txBody>
+      </p:sp>
+      <p:sp>
+        <p:nvSpPr>
+          <p:cNvPr id="4" name="Slide Number Placeholder 3">
+            <a:extLst>
+              <a:ext uri="{FF2B5EF4-FFF2-40B4-BE49-F238E27FC236}">
+                <a16:creationId xmlns:a16="http://schemas.microsoft.com/office/drawing/2014/main" id="{B67DC160-6394-14D8-B9CB-473DBE7B5957}"/>
+              </a:ext>
+            </a:extLst>
+          </p:cNvPr>
+          <p:cNvSpPr>
+            <a:spLocks noGrp="1"/>
+          </p:cNvSpPr>
+          <p:nvPr>
+            <p:ph type="sldNum" sz="quarter" idx="5"/>
+          </p:nvPr>
+        </p:nvSpPr>
+        <p:spPr/>
+        <p:txBody>
+          <a:bodyPr/>
+          <a:lstStyle/>
+          <a:p>
+            <a:fld id="{CDDD3684-6E52-4019-8D61-A9B0BAC0DBD6}" type="slidenum">
+              <a:rPr lang="en-US" smtClean="0"/>
+              <a:t>17</a:t>
+            </a:fld>
+            <a:endParaRPr lang="en-US"/>
+          </a:p>
+        </p:txBody>
+      </p:sp>
+    </p:spTree>
+    <p:extLst>
+      <p:ext uri="{BB962C8B-B14F-4D97-AF65-F5344CB8AC3E}">
+        <p14:creationId xmlns:p14="http://schemas.microsoft.com/office/powerpoint/2010/main" val="1308973341"/>
+      </p:ext>
+    </p:extLst>
+  </p:cSld>
+  <p:clrMapOvr>
+    <a:masterClrMapping/>
+  </p:clrMapOvr>
+</p:notes>
+</file>
+
+<file path=ppt/notesSlides/notesSlide17.xml><?xml version="1.0" encoding="utf-8"?>
+<p:notes xmlns:a="http://schemas.openxmlformats.org/drawingml/2006/main" xmlns:r="http://schemas.openxmlformats.org/officeDocument/2006/relationships" xmlns:p="http://schemas.openxmlformats.org/presentationml/2006/main">
+  <p:cSld>
+    <p:spTree>
+      <p:nvGrpSpPr>
+        <p:cNvPr id="1" name="">
+          <a:extLst>
+            <a:ext uri="{FF2B5EF4-FFF2-40B4-BE49-F238E27FC236}">
+              <a16:creationId xmlns:a16="http://schemas.microsoft.com/office/drawing/2014/main" id="{11010269-83F4-4D00-ED5E-7DBEEC413409}"/>
+            </a:ext>
+          </a:extLst>
+        </p:cNvPr>
+        <p:cNvGrpSpPr/>
+        <p:nvPr/>
+      </p:nvGrpSpPr>
+      <p:grpSpPr>
+        <a:xfrm>
+          <a:off x="0" y="0"/>
+          <a:ext cx="0" cy="0"/>
+          <a:chOff x="0" y="0"/>
+          <a:chExt cx="0" cy="0"/>
+        </a:xfrm>
+      </p:grpSpPr>
+      <p:sp>
+        <p:nvSpPr>
+          <p:cNvPr id="2" name="Slide Image Placeholder 1">
+            <a:extLst>
+              <a:ext uri="{FF2B5EF4-FFF2-40B4-BE49-F238E27FC236}">
+                <a16:creationId xmlns:a16="http://schemas.microsoft.com/office/drawing/2014/main" id="{90E62A16-B878-C59D-6C55-72AB2844F568}"/>
+              </a:ext>
+            </a:extLst>
+          </p:cNvPr>
+          <p:cNvSpPr>
+            <a:spLocks noGrp="1" noRot="1" noChangeAspect="1"/>
+          </p:cNvSpPr>
+          <p:nvPr>
+            <p:ph type="sldImg"/>
+          </p:nvPr>
+        </p:nvSpPr>
+        <p:spPr/>
+      </p:sp>
+      <p:sp>
+        <p:nvSpPr>
+          <p:cNvPr id="3" name="Notes Placeholder 2">
+            <a:extLst>
+              <a:ext uri="{FF2B5EF4-FFF2-40B4-BE49-F238E27FC236}">
+                <a16:creationId xmlns:a16="http://schemas.microsoft.com/office/drawing/2014/main" id="{12F95D8B-CDFF-869A-0C52-180E2A1FFCB8}"/>
+              </a:ext>
+            </a:extLst>
+          </p:cNvPr>
+          <p:cNvSpPr>
+            <a:spLocks noGrp="1"/>
+          </p:cNvSpPr>
+          <p:nvPr>
+            <p:ph type="body" idx="1"/>
+          </p:nvPr>
+        </p:nvSpPr>
+        <p:spPr/>
+        <p:txBody>
+          <a:bodyPr/>
+          <a:lstStyle/>
+          <a:p>
+            <a:endParaRPr lang="en-US" dirty="0"/>
+          </a:p>
+        </p:txBody>
+      </p:sp>
+      <p:sp>
+        <p:nvSpPr>
+          <p:cNvPr id="4" name="Slide Number Placeholder 3">
+            <a:extLst>
+              <a:ext uri="{FF2B5EF4-FFF2-40B4-BE49-F238E27FC236}">
+                <a16:creationId xmlns:a16="http://schemas.microsoft.com/office/drawing/2014/main" id="{FD1BFB80-73AA-8948-3CDB-2163C424F6C8}"/>
+              </a:ext>
+            </a:extLst>
+          </p:cNvPr>
+          <p:cNvSpPr>
+            <a:spLocks noGrp="1"/>
+          </p:cNvSpPr>
+          <p:nvPr>
+            <p:ph type="sldNum" sz="quarter" idx="5"/>
+          </p:nvPr>
+        </p:nvSpPr>
+        <p:spPr/>
+        <p:txBody>
+          <a:bodyPr/>
+          <a:lstStyle/>
+          <a:p>
+            <a:fld id="{CDDD3684-6E52-4019-8D61-A9B0BAC0DBD6}" type="slidenum">
+              <a:rPr lang="en-US" smtClean="0"/>
+              <a:t>18</a:t>
+            </a:fld>
+            <a:endParaRPr lang="en-US"/>
+          </a:p>
+        </p:txBody>
+      </p:sp>
+    </p:spTree>
+    <p:extLst>
+      <p:ext uri="{BB962C8B-B14F-4D97-AF65-F5344CB8AC3E}">
+        <p14:creationId xmlns:p14="http://schemas.microsoft.com/office/powerpoint/2010/main" val="1257430068"/>
+      </p:ext>
+    </p:extLst>
+  </p:cSld>
+  <p:clrMapOvr>
+    <a:masterClrMapping/>
+  </p:clrMapOvr>
+</p:notes>
+</file>
+
+<file path=ppt/notesSlides/notesSlide18.xml><?xml version="1.0" encoding="utf-8"?>
+<p:notes xmlns:a="http://schemas.openxmlformats.org/drawingml/2006/main" xmlns:r="http://schemas.openxmlformats.org/officeDocument/2006/relationships" xmlns:p="http://schemas.openxmlformats.org/presentationml/2006/main">
+  <p:cSld>
+    <p:spTree>
+      <p:nvGrpSpPr>
+        <p:cNvPr id="1" name="">
+          <a:extLst>
+            <a:ext uri="{FF2B5EF4-FFF2-40B4-BE49-F238E27FC236}">
+              <a16:creationId xmlns:a16="http://schemas.microsoft.com/office/drawing/2014/main" id="{47C26FEB-2719-6F52-53B0-BB407BE7F8EC}"/>
+            </a:ext>
+          </a:extLst>
+        </p:cNvPr>
+        <p:cNvGrpSpPr/>
+        <p:nvPr/>
+      </p:nvGrpSpPr>
+      <p:grpSpPr>
+        <a:xfrm>
+          <a:off x="0" y="0"/>
+          <a:ext cx="0" cy="0"/>
+          <a:chOff x="0" y="0"/>
+          <a:chExt cx="0" cy="0"/>
+        </a:xfrm>
+      </p:grpSpPr>
+      <p:sp>
+        <p:nvSpPr>
+          <p:cNvPr id="2" name="Slide Image Placeholder 1">
+            <a:extLst>
+              <a:ext uri="{FF2B5EF4-FFF2-40B4-BE49-F238E27FC236}">
+                <a16:creationId xmlns:a16="http://schemas.microsoft.com/office/drawing/2014/main" id="{65DEDEE4-62D6-5756-054F-DAB33624328B}"/>
+              </a:ext>
+            </a:extLst>
+          </p:cNvPr>
+          <p:cNvSpPr>
+            <a:spLocks noGrp="1" noRot="1" noChangeAspect="1"/>
+          </p:cNvSpPr>
+          <p:nvPr>
+            <p:ph type="sldImg"/>
+          </p:nvPr>
+        </p:nvSpPr>
+        <p:spPr/>
+      </p:sp>
+      <p:sp>
+        <p:nvSpPr>
+          <p:cNvPr id="3" name="Notes Placeholder 2">
+            <a:extLst>
+              <a:ext uri="{FF2B5EF4-FFF2-40B4-BE49-F238E27FC236}">
+                <a16:creationId xmlns:a16="http://schemas.microsoft.com/office/drawing/2014/main" id="{1A35B3F2-8C36-A283-7217-0FD825D52A33}"/>
+              </a:ext>
+            </a:extLst>
+          </p:cNvPr>
+          <p:cNvSpPr>
+            <a:spLocks noGrp="1"/>
+          </p:cNvSpPr>
+          <p:nvPr>
+            <p:ph type="body" idx="1"/>
+          </p:nvPr>
+        </p:nvSpPr>
+        <p:spPr/>
+        <p:txBody>
+          <a:bodyPr/>
+          <a:lstStyle/>
+          <a:p>
+            <a:endParaRPr lang="en-US" dirty="0"/>
+          </a:p>
+        </p:txBody>
+      </p:sp>
+      <p:sp>
+        <p:nvSpPr>
+          <p:cNvPr id="4" name="Slide Number Placeholder 3">
+            <a:extLst>
+              <a:ext uri="{FF2B5EF4-FFF2-40B4-BE49-F238E27FC236}">
+                <a16:creationId xmlns:a16="http://schemas.microsoft.com/office/drawing/2014/main" id="{CE981737-517F-0CF3-F116-DB420E4182A4}"/>
+              </a:ext>
+            </a:extLst>
+          </p:cNvPr>
+          <p:cNvSpPr>
+            <a:spLocks noGrp="1"/>
+          </p:cNvSpPr>
+          <p:nvPr>
+            <p:ph type="sldNum" sz="quarter" idx="5"/>
+          </p:nvPr>
+        </p:nvSpPr>
+        <p:spPr/>
+        <p:txBody>
+          <a:bodyPr/>
+          <a:lstStyle/>
+          <a:p>
+            <a:fld id="{CDDD3684-6E52-4019-8D61-A9B0BAC0DBD6}" type="slidenum">
+              <a:rPr lang="en-US" smtClean="0"/>
+              <a:t>19</a:t>
+            </a:fld>
+            <a:endParaRPr lang="en-US"/>
+          </a:p>
+        </p:txBody>
+      </p:sp>
+    </p:spTree>
+    <p:extLst>
+      <p:ext uri="{BB962C8B-B14F-4D97-AF65-F5344CB8AC3E}">
+        <p14:creationId xmlns:p14="http://schemas.microsoft.com/office/powerpoint/2010/main" val="2746104965"/>
+      </p:ext>
+    </p:extLst>
+  </p:cSld>
+  <p:clrMapOvr>
+    <a:masterClrMapping/>
+  </p:clrMapOvr>
+</p:notes>
+</file>
+
+<file path=ppt/notesSlides/notesSlide19.xml><?xml version="1.0" encoding="utf-8"?>
+<p:notes xmlns:a="http://schemas.openxmlformats.org/drawingml/2006/main" xmlns:r="http://schemas.openxmlformats.org/officeDocument/2006/relationships" xmlns:p="http://schemas.openxmlformats.org/presentationml/2006/main">
+  <p:cSld>
+    <p:spTree>
+      <p:nvGrpSpPr>
+        <p:cNvPr id="1" name="">
+          <a:extLst>
+            <a:ext uri="{FF2B5EF4-FFF2-40B4-BE49-F238E27FC236}">
+              <a16:creationId xmlns:a16="http://schemas.microsoft.com/office/drawing/2014/main" id="{3AD63C0A-FF9E-D70D-B301-C5147788EB22}"/>
+            </a:ext>
+          </a:extLst>
+        </p:cNvPr>
+        <p:cNvGrpSpPr/>
+        <p:nvPr/>
+      </p:nvGrpSpPr>
+      <p:grpSpPr>
+        <a:xfrm>
+          <a:off x="0" y="0"/>
+          <a:ext cx="0" cy="0"/>
+          <a:chOff x="0" y="0"/>
+          <a:chExt cx="0" cy="0"/>
+        </a:xfrm>
+      </p:grpSpPr>
+      <p:sp>
+        <p:nvSpPr>
+          <p:cNvPr id="2" name="Slide Image Placeholder 1">
+            <a:extLst>
+              <a:ext uri="{FF2B5EF4-FFF2-40B4-BE49-F238E27FC236}">
+                <a16:creationId xmlns:a16="http://schemas.microsoft.com/office/drawing/2014/main" id="{3D25B56F-52FB-EA96-1060-CBBC1E13B21E}"/>
+              </a:ext>
+            </a:extLst>
+          </p:cNvPr>
+          <p:cNvSpPr>
+            <a:spLocks noGrp="1" noRot="1" noChangeAspect="1"/>
+          </p:cNvSpPr>
+          <p:nvPr>
+            <p:ph type="sldImg"/>
+          </p:nvPr>
+        </p:nvSpPr>
+        <p:spPr/>
+      </p:sp>
+      <p:sp>
+        <p:nvSpPr>
+          <p:cNvPr id="3" name="Notes Placeholder 2">
+            <a:extLst>
+              <a:ext uri="{FF2B5EF4-FFF2-40B4-BE49-F238E27FC236}">
+                <a16:creationId xmlns:a16="http://schemas.microsoft.com/office/drawing/2014/main" id="{EE563408-1FEA-2E83-6671-8295E11DE9D4}"/>
+              </a:ext>
+            </a:extLst>
+          </p:cNvPr>
+          <p:cNvSpPr>
+            <a:spLocks noGrp="1"/>
+          </p:cNvSpPr>
+          <p:nvPr>
+            <p:ph type="body" idx="1"/>
+          </p:nvPr>
+        </p:nvSpPr>
+        <p:spPr/>
+        <p:txBody>
+          <a:bodyPr/>
+          <a:lstStyle/>
+          <a:p>
+            <a:endParaRPr lang="en-US" dirty="0"/>
+          </a:p>
+        </p:txBody>
+      </p:sp>
+      <p:sp>
+        <p:nvSpPr>
+          <p:cNvPr id="4" name="Slide Number Placeholder 3">
+            <a:extLst>
+              <a:ext uri="{FF2B5EF4-FFF2-40B4-BE49-F238E27FC236}">
+                <a16:creationId xmlns:a16="http://schemas.microsoft.com/office/drawing/2014/main" id="{579AA795-EA53-6563-9891-F108240EB0DF}"/>
+              </a:ext>
+            </a:extLst>
+          </p:cNvPr>
+          <p:cNvSpPr>
+            <a:spLocks noGrp="1"/>
+          </p:cNvSpPr>
+          <p:nvPr>
+            <p:ph type="sldNum" sz="quarter" idx="5"/>
+          </p:nvPr>
+        </p:nvSpPr>
+        <p:spPr/>
+        <p:txBody>
+          <a:bodyPr/>
+          <a:lstStyle/>
+          <a:p>
+            <a:fld id="{CDDD3684-6E52-4019-8D61-A9B0BAC0DBD6}" type="slidenum">
+              <a:rPr lang="en-US" smtClean="0"/>
+              <a:t>20</a:t>
+            </a:fld>
+            <a:endParaRPr lang="en-US"/>
+          </a:p>
+        </p:txBody>
+      </p:sp>
+    </p:spTree>
+    <p:extLst>
+      <p:ext uri="{BB962C8B-B14F-4D97-AF65-F5344CB8AC3E}">
+        <p14:creationId xmlns:p14="http://schemas.microsoft.com/office/powerpoint/2010/main" val="3187200408"/>
       </p:ext>
     </p:extLst>
   </p:cSld>
@@ -6314,220 +6549,6 @@
           <a:bodyPr/>
           <a:lstStyle/>
           <a:p>
-            <a:r>
-              <a:rPr lang="en-US" dirty="0"/>
-              <a:t>Alexandria is now very happy that she could setup automated deployment to the test severs via their source control provider (GitHub). David is very happy too, but then asks, where are the automated tests that run before deployment. Alexandira knew something was missing and David pointed it out. In her </a:t>
-            </a:r>
-            <a:r>
-              <a:rPr lang="en-US" dirty="0" err="1"/>
-              <a:t>.net</a:t>
-            </a:r>
-            <a:r>
-              <a:rPr lang="en-US" dirty="0"/>
-              <a:t> projects, she uses </a:t>
-            </a:r>
-            <a:r>
-              <a:rPr lang="en-US" dirty="0" err="1"/>
-              <a:t>.net</a:t>
-            </a:r>
-            <a:r>
-              <a:rPr lang="en-US" dirty="0"/>
-              <a:t> test suite projects that run automatically in the CID/CD pipelines. The tests gives her team a degree of confidence that any new changes added to the repo are not introducing any issues. The code they are writing in the SQL in this new </a:t>
-            </a:r>
-            <a:r>
-              <a:rPr lang="en-US" dirty="0" err="1"/>
-              <a:t>db</a:t>
-            </a:r>
-            <a:r>
-              <a:rPr lang="en-US" dirty="0"/>
-              <a:t> is complicated enough and important enough to demand at least some level of safeguards. Michael J helps her  research testing approaches to SQL code. They find three approaches:</a:t>
-            </a:r>
-          </a:p>
-          <a:p>
-            <a:endParaRPr lang="en-US" dirty="0"/>
-          </a:p>
-          <a:p>
-            <a:pPr rtl="0" fontAlgn="ctr">
-              <a:buFont typeface="+mj-lt"/>
-              <a:buAutoNum type="arabicPeriod"/>
-            </a:pPr>
-            <a:r>
-              <a:rPr lang="en-US" sz="1100" dirty="0">
-                <a:latin typeface="Calibri" panose="020F0502020204030204" pitchFamily="34" charset="0"/>
-              </a:rPr>
-              <a:t>Call you </a:t>
-            </a:r>
-            <a:r>
-              <a:rPr lang="en-US" sz="1100" dirty="0" err="1">
-                <a:latin typeface="Calibri" panose="020F0502020204030204" pitchFamily="34" charset="0"/>
-              </a:rPr>
-              <a:t>sql</a:t>
-            </a:r>
-            <a:r>
-              <a:rPr lang="en-US" sz="1100" dirty="0">
-                <a:latin typeface="Calibri" panose="020F0502020204030204" pitchFamily="34" charset="0"/>
-              </a:rPr>
-              <a:t> code from </a:t>
-            </a:r>
-            <a:r>
-              <a:rPr lang="en-US" sz="1100" dirty="0" err="1">
-                <a:latin typeface="Calibri" panose="020F0502020204030204" pitchFamily="34" charset="0"/>
-              </a:rPr>
-              <a:t>.net</a:t>
-            </a:r>
-            <a:r>
-              <a:rPr lang="en-US" sz="1100" dirty="0">
-                <a:latin typeface="Calibri" panose="020F0502020204030204" pitchFamily="34" charset="0"/>
-              </a:rPr>
-              <a:t> unit test projects (e.g. </a:t>
-            </a:r>
-            <a:r>
-              <a:rPr lang="en-US" sz="1100" dirty="0" err="1">
-                <a:latin typeface="Calibri" panose="020F0502020204030204" pitchFamily="34" charset="0"/>
-              </a:rPr>
-              <a:t>xUnit</a:t>
-            </a:r>
-            <a:r>
-              <a:rPr lang="en-US" sz="1100" dirty="0">
-                <a:latin typeface="Calibri" panose="020F0502020204030204" pitchFamily="34" charset="0"/>
-              </a:rPr>
-              <a:t>)</a:t>
-            </a:r>
-          </a:p>
-          <a:p>
-            <a:pPr marL="765610" lvl="1" indent="-294465" fontAlgn="ctr">
-              <a:buFont typeface="+mj-lt"/>
-              <a:buAutoNum type="alphaLcPeriod"/>
-            </a:pPr>
-            <a:r>
-              <a:rPr lang="en-US" sz="1100" dirty="0">
-                <a:latin typeface="Calibri" panose="020F0502020204030204" pitchFamily="34" charset="0"/>
-              </a:rPr>
-              <a:t>Requires manually writing the </a:t>
-            </a:r>
-            <a:r>
-              <a:rPr lang="en-US" sz="1100" dirty="0" err="1">
-                <a:latin typeface="Calibri" panose="020F0502020204030204" pitchFamily="34" charset="0"/>
-              </a:rPr>
-              <a:t>c#</a:t>
-            </a:r>
-            <a:r>
-              <a:rPr lang="en-US" sz="1100" dirty="0">
-                <a:latin typeface="Calibri" panose="020F0502020204030204" pitchFamily="34" charset="0"/>
-              </a:rPr>
-              <a:t> code for each of the SQL functionality you want to test.</a:t>
-            </a:r>
-          </a:p>
-          <a:p>
-            <a:pPr rtl="0" fontAlgn="ctr">
-              <a:buFont typeface="+mj-lt"/>
-              <a:buAutoNum type="arabicPeriod"/>
-            </a:pPr>
-            <a:r>
-              <a:rPr lang="en-US" sz="1100" dirty="0">
-                <a:latin typeface="Calibri" panose="020F0502020204030204" pitchFamily="34" charset="0"/>
-              </a:rPr>
-              <a:t>Use T-SQL specific unit test frameworks or tools, such as </a:t>
-            </a:r>
-            <a:r>
-              <a:rPr lang="en-US" sz="1100" dirty="0" err="1">
-                <a:latin typeface="Calibri" panose="020F0502020204030204" pitchFamily="34" charset="0"/>
-              </a:rPr>
-              <a:t>tUnit</a:t>
-            </a:r>
-            <a:endParaRPr lang="en-US" sz="1100" dirty="0">
-              <a:latin typeface="Calibri" panose="020F0502020204030204" pitchFamily="34" charset="0"/>
-            </a:endParaRPr>
-          </a:p>
-          <a:p>
-            <a:pPr rtl="0" fontAlgn="ctr">
-              <a:buFont typeface="+mj-lt"/>
-              <a:buAutoNum type="arabicPeriod"/>
-            </a:pPr>
-            <a:r>
-              <a:rPr lang="en-US" sz="1100" dirty="0">
-                <a:latin typeface="Calibri" panose="020F0502020204030204" pitchFamily="34" charset="0"/>
-              </a:rPr>
-              <a:t>Use a generic </a:t>
-            </a:r>
-            <a:r>
-              <a:rPr lang="en-US" sz="1100" dirty="0" err="1">
-                <a:latin typeface="Calibri" panose="020F0502020204030204" pitchFamily="34" charset="0"/>
-              </a:rPr>
-              <a:t>xUnit</a:t>
-            </a:r>
-            <a:r>
-              <a:rPr lang="en-US" sz="1100" dirty="0">
-                <a:latin typeface="Calibri" panose="020F0502020204030204" pitchFamily="34" charset="0"/>
-              </a:rPr>
-              <a:t> project that can be reused without much modification between projects and that does not require writing .NET for each of the SQL features to test</a:t>
-            </a:r>
-          </a:p>
-          <a:p>
-            <a:pPr marL="765610" lvl="1" indent="-294465" fontAlgn="ctr">
-              <a:buFont typeface="+mj-lt"/>
-              <a:buAutoNum type="alphaLcPeriod"/>
-            </a:pPr>
-            <a:r>
-              <a:rPr lang="en-US" sz="1100" dirty="0">
-                <a:latin typeface="Calibri" panose="020F0502020204030204" pitchFamily="34" charset="0"/>
-              </a:rPr>
-              <a:t>This is my preferred way (see sample GitHub repo)</a:t>
-            </a:r>
-          </a:p>
-          <a:p>
-            <a:pPr marL="765610" lvl="1" indent="-294465" fontAlgn="ctr">
-              <a:buFont typeface="+mj-lt"/>
-              <a:buAutoNum type="alphaLcPeriod"/>
-            </a:pPr>
-            <a:r>
-              <a:rPr lang="en-US" sz="1100" dirty="0">
-                <a:latin typeface="Calibri" panose="020F0502020204030204" pitchFamily="34" charset="0"/>
-              </a:rPr>
-              <a:t>Use a specific SQL schema for SQL objects that support the automated tests. This makes it easier for the automated tool to discover the tests and for maintainers to understand what the purpose of those objects are.</a:t>
-            </a:r>
-          </a:p>
-          <a:p>
-            <a:r>
-              <a:rPr lang="en-US" sz="1100" dirty="0">
-                <a:latin typeface="Calibri" panose="020F0502020204030204" pitchFamily="34" charset="0"/>
-              </a:rPr>
-              <a:t> </a:t>
-            </a:r>
-          </a:p>
-          <a:p>
-            <a:r>
-              <a:rPr lang="en-US" sz="1100" dirty="0">
-                <a:latin typeface="Calibri" panose="020F0502020204030204" pitchFamily="34" charset="0"/>
-              </a:rPr>
-              <a:t>Test Stored procs can use transactions to rollback any data they manipulated during the test. This is somewhat similar to how </a:t>
-            </a:r>
-            <a:r>
-              <a:rPr lang="en-US" sz="1100" dirty="0" err="1">
-                <a:latin typeface="Calibri" panose="020F0502020204030204" pitchFamily="34" charset="0"/>
-              </a:rPr>
-              <a:t>SalesForce</a:t>
-            </a:r>
-            <a:r>
-              <a:rPr lang="en-US" sz="1100" dirty="0">
-                <a:latin typeface="Calibri" panose="020F0502020204030204" pitchFamily="34" charset="0"/>
-              </a:rPr>
-              <a:t> does its Apex unit tests (if you are familiar with </a:t>
-            </a:r>
-            <a:r>
-              <a:rPr lang="en-US" sz="1100" dirty="0" err="1">
-                <a:latin typeface="Calibri" panose="020F0502020204030204" pitchFamily="34" charset="0"/>
-              </a:rPr>
-              <a:t>SalesForce</a:t>
-            </a:r>
-            <a:r>
-              <a:rPr lang="en-US" sz="1100" dirty="0">
-                <a:latin typeface="Calibri" panose="020F0502020204030204" pitchFamily="34" charset="0"/>
-              </a:rPr>
-              <a:t>).</a:t>
-            </a:r>
-          </a:p>
-          <a:p>
             <a:endParaRPr lang="en-US" dirty="0"/>
           </a:p>
         </p:txBody>
@@ -6549,7 +6570,7 @@
           <a:p>
             <a:fld id="{CDDD3684-6E52-4019-8D61-A9B0BAC0DBD6}" type="slidenum">
               <a:rPr lang="en-US" smtClean="0"/>
-              <a:t>25</a:t>
+              <a:t>23</a:t>
             </a:fld>
             <a:endParaRPr lang="en-US"/>
           </a:p>
@@ -6558,7 +6579,7 @@
     </p:spTree>
     <p:extLst>
       <p:ext uri="{BB962C8B-B14F-4D97-AF65-F5344CB8AC3E}">
-        <p14:creationId xmlns:p14="http://schemas.microsoft.com/office/powerpoint/2010/main" val="2810122218"/>
+        <p14:creationId xmlns:p14="http://schemas.microsoft.com/office/powerpoint/2010/main" val="1020007856"/>
       </p:ext>
     </p:extLst>
   </p:cSld>
@@ -6612,7 +6633,221 @@
           <a:bodyPr/>
           <a:lstStyle/>
           <a:p>
-            <a:endParaRPr lang="en-US"/>
+            <a:r>
+              <a:rPr lang="en-US" dirty="0"/>
+              <a:t>Alexandria is now very happy that she could setup automated deployment to the test severs via their source control provider (GitHub). David is very happy too, but then asks, where are the automated tests that run before deployment. Alexandira knew something was missing and David pointed it out. In her </a:t>
+            </a:r>
+            <a:r>
+              <a:rPr lang="en-US" dirty="0" err="1"/>
+              <a:t>.net</a:t>
+            </a:r>
+            <a:r>
+              <a:rPr lang="en-US" dirty="0"/>
+              <a:t> projects, she uses </a:t>
+            </a:r>
+            <a:r>
+              <a:rPr lang="en-US" dirty="0" err="1"/>
+              <a:t>.net</a:t>
+            </a:r>
+            <a:r>
+              <a:rPr lang="en-US" dirty="0"/>
+              <a:t> test suite projects that run automatically in the CID/CD pipelines. The tests gives her team a degree of confidence that any new changes added to the repo are not introducing any issues. The code they are writing in the SQL in this new </a:t>
+            </a:r>
+            <a:r>
+              <a:rPr lang="en-US" dirty="0" err="1"/>
+              <a:t>db</a:t>
+            </a:r>
+            <a:r>
+              <a:rPr lang="en-US" dirty="0"/>
+              <a:t> is complicated enough and important enough to demand at least some level of safeguards. Michael J helps her  research testing approaches to SQL code. They find three approaches:</a:t>
+            </a:r>
+          </a:p>
+          <a:p>
+            <a:endParaRPr lang="en-US" dirty="0"/>
+          </a:p>
+          <a:p>
+            <a:pPr rtl="0" fontAlgn="ctr">
+              <a:buFont typeface="+mj-lt"/>
+              <a:buAutoNum type="arabicPeriod"/>
+            </a:pPr>
+            <a:r>
+              <a:rPr lang="en-US" sz="1100" dirty="0">
+                <a:latin typeface="Calibri" panose="020F0502020204030204" pitchFamily="34" charset="0"/>
+              </a:rPr>
+              <a:t>Call you </a:t>
+            </a:r>
+            <a:r>
+              <a:rPr lang="en-US" sz="1100" dirty="0" err="1">
+                <a:latin typeface="Calibri" panose="020F0502020204030204" pitchFamily="34" charset="0"/>
+              </a:rPr>
+              <a:t>sql</a:t>
+            </a:r>
+            <a:r>
+              <a:rPr lang="en-US" sz="1100" dirty="0">
+                <a:latin typeface="Calibri" panose="020F0502020204030204" pitchFamily="34" charset="0"/>
+              </a:rPr>
+              <a:t> code from </a:t>
+            </a:r>
+            <a:r>
+              <a:rPr lang="en-US" sz="1100" dirty="0" err="1">
+                <a:latin typeface="Calibri" panose="020F0502020204030204" pitchFamily="34" charset="0"/>
+              </a:rPr>
+              <a:t>.net</a:t>
+            </a:r>
+            <a:r>
+              <a:rPr lang="en-US" sz="1100" dirty="0">
+                <a:latin typeface="Calibri" panose="020F0502020204030204" pitchFamily="34" charset="0"/>
+              </a:rPr>
+              <a:t> unit test projects (e.g. </a:t>
+            </a:r>
+            <a:r>
+              <a:rPr lang="en-US" sz="1100" dirty="0" err="1">
+                <a:latin typeface="Calibri" panose="020F0502020204030204" pitchFamily="34" charset="0"/>
+              </a:rPr>
+              <a:t>xUnit</a:t>
+            </a:r>
+            <a:r>
+              <a:rPr lang="en-US" sz="1100" dirty="0">
+                <a:latin typeface="Calibri" panose="020F0502020204030204" pitchFamily="34" charset="0"/>
+              </a:rPr>
+              <a:t>)</a:t>
+            </a:r>
+          </a:p>
+          <a:p>
+            <a:pPr marL="765610" lvl="1" indent="-294465" fontAlgn="ctr">
+              <a:buFont typeface="+mj-lt"/>
+              <a:buAutoNum type="alphaLcPeriod"/>
+            </a:pPr>
+            <a:r>
+              <a:rPr lang="en-US" sz="1100" dirty="0">
+                <a:latin typeface="Calibri" panose="020F0502020204030204" pitchFamily="34" charset="0"/>
+              </a:rPr>
+              <a:t>Requires manually writing the </a:t>
+            </a:r>
+            <a:r>
+              <a:rPr lang="en-US" sz="1100" dirty="0" err="1">
+                <a:latin typeface="Calibri" panose="020F0502020204030204" pitchFamily="34" charset="0"/>
+              </a:rPr>
+              <a:t>c#</a:t>
+            </a:r>
+            <a:r>
+              <a:rPr lang="en-US" sz="1100" dirty="0">
+                <a:latin typeface="Calibri" panose="020F0502020204030204" pitchFamily="34" charset="0"/>
+              </a:rPr>
+              <a:t> code for each of the SQL functionality you want to test.</a:t>
+            </a:r>
+          </a:p>
+          <a:p>
+            <a:pPr rtl="0" fontAlgn="ctr">
+              <a:buFont typeface="+mj-lt"/>
+              <a:buAutoNum type="arabicPeriod"/>
+            </a:pPr>
+            <a:r>
+              <a:rPr lang="en-US" sz="1100" dirty="0">
+                <a:latin typeface="Calibri" panose="020F0502020204030204" pitchFamily="34" charset="0"/>
+              </a:rPr>
+              <a:t>Use T-SQL specific unit test frameworks or tools, such as </a:t>
+            </a:r>
+            <a:r>
+              <a:rPr lang="en-US" sz="1100" dirty="0" err="1">
+                <a:latin typeface="Calibri" panose="020F0502020204030204" pitchFamily="34" charset="0"/>
+              </a:rPr>
+              <a:t>tUnit</a:t>
+            </a:r>
+            <a:endParaRPr lang="en-US" sz="1100" dirty="0">
+              <a:latin typeface="Calibri" panose="020F0502020204030204" pitchFamily="34" charset="0"/>
+            </a:endParaRPr>
+          </a:p>
+          <a:p>
+            <a:pPr rtl="0" fontAlgn="ctr">
+              <a:buFont typeface="+mj-lt"/>
+              <a:buAutoNum type="arabicPeriod"/>
+            </a:pPr>
+            <a:r>
+              <a:rPr lang="en-US" sz="1100" dirty="0">
+                <a:latin typeface="Calibri" panose="020F0502020204030204" pitchFamily="34" charset="0"/>
+              </a:rPr>
+              <a:t>Use a generic </a:t>
+            </a:r>
+            <a:r>
+              <a:rPr lang="en-US" sz="1100" dirty="0" err="1">
+                <a:latin typeface="Calibri" panose="020F0502020204030204" pitchFamily="34" charset="0"/>
+              </a:rPr>
+              <a:t>xUnit</a:t>
+            </a:r>
+            <a:r>
+              <a:rPr lang="en-US" sz="1100" dirty="0">
+                <a:latin typeface="Calibri" panose="020F0502020204030204" pitchFamily="34" charset="0"/>
+              </a:rPr>
+              <a:t> project that can be reused without much modification between projects and that does not require writing .NET for each of the SQL features to test</a:t>
+            </a:r>
+          </a:p>
+          <a:p>
+            <a:pPr marL="765610" lvl="1" indent="-294465" fontAlgn="ctr">
+              <a:buFont typeface="+mj-lt"/>
+              <a:buAutoNum type="alphaLcPeriod"/>
+            </a:pPr>
+            <a:r>
+              <a:rPr lang="en-US" sz="1100" dirty="0">
+                <a:latin typeface="Calibri" panose="020F0502020204030204" pitchFamily="34" charset="0"/>
+              </a:rPr>
+              <a:t>This is my preferred way (see sample GitHub repo)</a:t>
+            </a:r>
+          </a:p>
+          <a:p>
+            <a:pPr marL="765610" lvl="1" indent="-294465" fontAlgn="ctr">
+              <a:buFont typeface="+mj-lt"/>
+              <a:buAutoNum type="alphaLcPeriod"/>
+            </a:pPr>
+            <a:r>
+              <a:rPr lang="en-US" sz="1100" dirty="0">
+                <a:latin typeface="Calibri" panose="020F0502020204030204" pitchFamily="34" charset="0"/>
+              </a:rPr>
+              <a:t>Use a specific SQL schema for SQL objects that support the automated tests. This makes it easier for the automated tool to discover the tests and for maintainers to understand what the purpose of those objects are.</a:t>
+            </a:r>
+          </a:p>
+          <a:p>
+            <a:r>
+              <a:rPr lang="en-US" sz="1100" dirty="0">
+                <a:latin typeface="Calibri" panose="020F0502020204030204" pitchFamily="34" charset="0"/>
+              </a:rPr>
+              <a:t> </a:t>
+            </a:r>
+          </a:p>
+          <a:p>
+            <a:r>
+              <a:rPr lang="en-US" sz="1100" dirty="0">
+                <a:latin typeface="Calibri" panose="020F0502020204030204" pitchFamily="34" charset="0"/>
+              </a:rPr>
+              <a:t>Test Stored procs can use transactions to rollback any data they manipulated during the test. This is somewhat similar to how </a:t>
+            </a:r>
+            <a:r>
+              <a:rPr lang="en-US" sz="1100" dirty="0" err="1">
+                <a:latin typeface="Calibri" panose="020F0502020204030204" pitchFamily="34" charset="0"/>
+              </a:rPr>
+              <a:t>SalesForce</a:t>
+            </a:r>
+            <a:r>
+              <a:rPr lang="en-US" sz="1100" dirty="0">
+                <a:latin typeface="Calibri" panose="020F0502020204030204" pitchFamily="34" charset="0"/>
+              </a:rPr>
+              <a:t> does its Apex unit tests (if you are familiar with </a:t>
+            </a:r>
+            <a:r>
+              <a:rPr lang="en-US" sz="1100" dirty="0" err="1">
+                <a:latin typeface="Calibri" panose="020F0502020204030204" pitchFamily="34" charset="0"/>
+              </a:rPr>
+              <a:t>SalesForce</a:t>
+            </a:r>
+            <a:r>
+              <a:rPr lang="en-US" sz="1100" dirty="0">
+                <a:latin typeface="Calibri" panose="020F0502020204030204" pitchFamily="34" charset="0"/>
+              </a:rPr>
+              <a:t>).</a:t>
+            </a:r>
+          </a:p>
+          <a:p>
+            <a:endParaRPr lang="en-US" dirty="0"/>
           </a:p>
         </p:txBody>
       </p:sp>
@@ -6642,7 +6877,7 @@
     </p:spTree>
     <p:extLst>
       <p:ext uri="{BB962C8B-B14F-4D97-AF65-F5344CB8AC3E}">
-        <p14:creationId xmlns:p14="http://schemas.microsoft.com/office/powerpoint/2010/main" val="4116011877"/>
+        <p14:creationId xmlns:p14="http://schemas.microsoft.com/office/powerpoint/2010/main" val="2810122218"/>
       </p:ext>
     </p:extLst>
   </p:cSld>
@@ -6717,7 +6952,7 @@
           <a:p>
             <a:fld id="{CDDD3684-6E52-4019-8D61-A9B0BAC0DBD6}" type="slidenum">
               <a:rPr lang="en-US" smtClean="0"/>
-              <a:t>28</a:t>
+              <a:t>27</a:t>
             </a:fld>
             <a:endParaRPr lang="en-US"/>
           </a:p>
@@ -6726,7 +6961,7 @@
     </p:spTree>
     <p:extLst>
       <p:ext uri="{BB962C8B-B14F-4D97-AF65-F5344CB8AC3E}">
-        <p14:creationId xmlns:p14="http://schemas.microsoft.com/office/powerpoint/2010/main" val="301385976"/>
+        <p14:creationId xmlns:p14="http://schemas.microsoft.com/office/powerpoint/2010/main" val="4116011877"/>
       </p:ext>
     </p:extLst>
   </p:cSld>
@@ -6737,114 +6972,6 @@
 </file>
 
 <file path=ppt/notesSlides/notesSlide23.xml><?xml version="1.0" encoding="utf-8"?>
-<p:notes xmlns:a="http://schemas.openxmlformats.org/drawingml/2006/main" xmlns:r="http://schemas.openxmlformats.org/officeDocument/2006/relationships" xmlns:p="http://schemas.openxmlformats.org/presentationml/2006/main">
-  <p:cSld>
-    <p:spTree>
-      <p:nvGrpSpPr>
-        <p:cNvPr id="1" name="">
-          <a:extLst>
-            <a:ext uri="{FF2B5EF4-FFF2-40B4-BE49-F238E27FC236}">
-              <a16:creationId xmlns:a16="http://schemas.microsoft.com/office/drawing/2014/main" id="{25ED5E95-934C-2158-26CE-117CD38FCB18}"/>
-            </a:ext>
-          </a:extLst>
-        </p:cNvPr>
-        <p:cNvGrpSpPr/>
-        <p:nvPr/>
-      </p:nvGrpSpPr>
-      <p:grpSpPr>
-        <a:xfrm>
-          <a:off x="0" y="0"/>
-          <a:ext cx="0" cy="0"/>
-          <a:chOff x="0" y="0"/>
-          <a:chExt cx="0" cy="0"/>
-        </a:xfrm>
-      </p:grpSpPr>
-      <p:sp>
-        <p:nvSpPr>
-          <p:cNvPr id="2" name="Slide Image Placeholder 1">
-            <a:extLst>
-              <a:ext uri="{FF2B5EF4-FFF2-40B4-BE49-F238E27FC236}">
-                <a16:creationId xmlns:a16="http://schemas.microsoft.com/office/drawing/2014/main" id="{714537F7-B142-026C-48C2-AAA4ECEC1A71}"/>
-              </a:ext>
-            </a:extLst>
-          </p:cNvPr>
-          <p:cNvSpPr>
-            <a:spLocks noGrp="1" noRot="1" noChangeAspect="1"/>
-          </p:cNvSpPr>
-          <p:nvPr>
-            <p:ph type="sldImg"/>
-          </p:nvPr>
-        </p:nvSpPr>
-        <p:spPr/>
-      </p:sp>
-      <p:sp>
-        <p:nvSpPr>
-          <p:cNvPr id="3" name="Notes Placeholder 2">
-            <a:extLst>
-              <a:ext uri="{FF2B5EF4-FFF2-40B4-BE49-F238E27FC236}">
-                <a16:creationId xmlns:a16="http://schemas.microsoft.com/office/drawing/2014/main" id="{587AA7B9-134A-2E8E-96AB-EF63A18E87C1}"/>
-              </a:ext>
-            </a:extLst>
-          </p:cNvPr>
-          <p:cNvSpPr>
-            <a:spLocks noGrp="1"/>
-          </p:cNvSpPr>
-          <p:nvPr>
-            <p:ph type="body" idx="1"/>
-          </p:nvPr>
-        </p:nvSpPr>
-        <p:spPr/>
-        <p:txBody>
-          <a:bodyPr/>
-          <a:lstStyle/>
-          <a:p>
-            <a:endParaRPr lang="en-US"/>
-          </a:p>
-        </p:txBody>
-      </p:sp>
-      <p:sp>
-        <p:nvSpPr>
-          <p:cNvPr id="4" name="Slide Number Placeholder 3">
-            <a:extLst>
-              <a:ext uri="{FF2B5EF4-FFF2-40B4-BE49-F238E27FC236}">
-                <a16:creationId xmlns:a16="http://schemas.microsoft.com/office/drawing/2014/main" id="{B64102AF-97C2-4BFB-1343-928AD441C763}"/>
-              </a:ext>
-            </a:extLst>
-          </p:cNvPr>
-          <p:cNvSpPr>
-            <a:spLocks noGrp="1"/>
-          </p:cNvSpPr>
-          <p:nvPr>
-            <p:ph type="sldNum" sz="quarter" idx="5"/>
-          </p:nvPr>
-        </p:nvSpPr>
-        <p:spPr/>
-        <p:txBody>
-          <a:bodyPr/>
-          <a:lstStyle/>
-          <a:p>
-            <a:fld id="{CDDD3684-6E52-4019-8D61-A9B0BAC0DBD6}" type="slidenum">
-              <a:rPr lang="en-US" smtClean="0"/>
-              <a:t>29</a:t>
-            </a:fld>
-            <a:endParaRPr lang="en-US"/>
-          </a:p>
-        </p:txBody>
-      </p:sp>
-    </p:spTree>
-    <p:extLst>
-      <p:ext uri="{BB962C8B-B14F-4D97-AF65-F5344CB8AC3E}">
-        <p14:creationId xmlns:p14="http://schemas.microsoft.com/office/powerpoint/2010/main" val="1223424394"/>
-      </p:ext>
-    </p:extLst>
-  </p:cSld>
-  <p:clrMapOvr>
-    <a:masterClrMapping/>
-  </p:clrMapOvr>
-</p:notes>
-</file>
-
-<file path=ppt/notesSlides/notesSlide24.xml><?xml version="1.0" encoding="utf-8"?>
 <p:notes xmlns:a="http://schemas.openxmlformats.org/drawingml/2006/main" xmlns:r="http://schemas.openxmlformats.org/officeDocument/2006/relationships" xmlns:p="http://schemas.openxmlformats.org/presentationml/2006/main">
   <p:cSld>
     <p:spTree>
@@ -6909,7 +7036,7 @@
           <a:p>
             <a:fld id="{CDDD3684-6E52-4019-8D61-A9B0BAC0DBD6}" type="slidenum">
               <a:rPr lang="en-US" smtClean="0"/>
-              <a:t>30</a:t>
+              <a:t>29</a:t>
             </a:fld>
             <a:endParaRPr lang="en-US"/>
           </a:p>
@@ -6918,7 +7045,115 @@
     </p:spTree>
     <p:extLst>
       <p:ext uri="{BB962C8B-B14F-4D97-AF65-F5344CB8AC3E}">
-        <p14:creationId xmlns:p14="http://schemas.microsoft.com/office/powerpoint/2010/main" val="640281325"/>
+        <p14:creationId xmlns:p14="http://schemas.microsoft.com/office/powerpoint/2010/main" val="301385976"/>
+      </p:ext>
+    </p:extLst>
+  </p:cSld>
+  <p:clrMapOvr>
+    <a:masterClrMapping/>
+  </p:clrMapOvr>
+</p:notes>
+</file>
+
+<file path=ppt/notesSlides/notesSlide24.xml><?xml version="1.0" encoding="utf-8"?>
+<p:notes xmlns:a="http://schemas.openxmlformats.org/drawingml/2006/main" xmlns:r="http://schemas.openxmlformats.org/officeDocument/2006/relationships" xmlns:p="http://schemas.openxmlformats.org/presentationml/2006/main">
+  <p:cSld>
+    <p:spTree>
+      <p:nvGrpSpPr>
+        <p:cNvPr id="1" name="">
+          <a:extLst>
+            <a:ext uri="{FF2B5EF4-FFF2-40B4-BE49-F238E27FC236}">
+              <a16:creationId xmlns:a16="http://schemas.microsoft.com/office/drawing/2014/main" id="{25ED5E95-934C-2158-26CE-117CD38FCB18}"/>
+            </a:ext>
+          </a:extLst>
+        </p:cNvPr>
+        <p:cNvGrpSpPr/>
+        <p:nvPr/>
+      </p:nvGrpSpPr>
+      <p:grpSpPr>
+        <a:xfrm>
+          <a:off x="0" y="0"/>
+          <a:ext cx="0" cy="0"/>
+          <a:chOff x="0" y="0"/>
+          <a:chExt cx="0" cy="0"/>
+        </a:xfrm>
+      </p:grpSpPr>
+      <p:sp>
+        <p:nvSpPr>
+          <p:cNvPr id="2" name="Slide Image Placeholder 1">
+            <a:extLst>
+              <a:ext uri="{FF2B5EF4-FFF2-40B4-BE49-F238E27FC236}">
+                <a16:creationId xmlns:a16="http://schemas.microsoft.com/office/drawing/2014/main" id="{714537F7-B142-026C-48C2-AAA4ECEC1A71}"/>
+              </a:ext>
+            </a:extLst>
+          </p:cNvPr>
+          <p:cNvSpPr>
+            <a:spLocks noGrp="1" noRot="1" noChangeAspect="1"/>
+          </p:cNvSpPr>
+          <p:nvPr>
+            <p:ph type="sldImg"/>
+          </p:nvPr>
+        </p:nvSpPr>
+        <p:spPr/>
+      </p:sp>
+      <p:sp>
+        <p:nvSpPr>
+          <p:cNvPr id="3" name="Notes Placeholder 2">
+            <a:extLst>
+              <a:ext uri="{FF2B5EF4-FFF2-40B4-BE49-F238E27FC236}">
+                <a16:creationId xmlns:a16="http://schemas.microsoft.com/office/drawing/2014/main" id="{587AA7B9-134A-2E8E-96AB-EF63A18E87C1}"/>
+              </a:ext>
+            </a:extLst>
+          </p:cNvPr>
+          <p:cNvSpPr>
+            <a:spLocks noGrp="1"/>
+          </p:cNvSpPr>
+          <p:nvPr>
+            <p:ph type="body" idx="1"/>
+          </p:nvPr>
+        </p:nvSpPr>
+        <p:spPr/>
+        <p:txBody>
+          <a:bodyPr/>
+          <a:lstStyle/>
+          <a:p>
+            <a:endParaRPr lang="en-US"/>
+          </a:p>
+        </p:txBody>
+      </p:sp>
+      <p:sp>
+        <p:nvSpPr>
+          <p:cNvPr id="4" name="Slide Number Placeholder 3">
+            <a:extLst>
+              <a:ext uri="{FF2B5EF4-FFF2-40B4-BE49-F238E27FC236}">
+                <a16:creationId xmlns:a16="http://schemas.microsoft.com/office/drawing/2014/main" id="{B64102AF-97C2-4BFB-1343-928AD441C763}"/>
+              </a:ext>
+            </a:extLst>
+          </p:cNvPr>
+          <p:cNvSpPr>
+            <a:spLocks noGrp="1"/>
+          </p:cNvSpPr>
+          <p:nvPr>
+            <p:ph type="sldNum" sz="quarter" idx="5"/>
+          </p:nvPr>
+        </p:nvSpPr>
+        <p:spPr/>
+        <p:txBody>
+          <a:bodyPr/>
+          <a:lstStyle/>
+          <a:p>
+            <a:fld id="{CDDD3684-6E52-4019-8D61-A9B0BAC0DBD6}" type="slidenum">
+              <a:rPr lang="en-US" smtClean="0"/>
+              <a:t>30</a:t>
+            </a:fld>
+            <a:endParaRPr lang="en-US"/>
+          </a:p>
+        </p:txBody>
+      </p:sp>
+    </p:spTree>
+    <p:extLst>
+      <p:ext uri="{BB962C8B-B14F-4D97-AF65-F5344CB8AC3E}">
+        <p14:creationId xmlns:p14="http://schemas.microsoft.com/office/powerpoint/2010/main" val="1223424394"/>
       </p:ext>
     </p:extLst>
   </p:cSld>
@@ -7002,6 +7237,90 @@
     </p:spTree>
     <p:extLst>
       <p:ext uri="{BB962C8B-B14F-4D97-AF65-F5344CB8AC3E}">
+        <p14:creationId xmlns:p14="http://schemas.microsoft.com/office/powerpoint/2010/main" val="640281325"/>
+      </p:ext>
+    </p:extLst>
+  </p:cSld>
+  <p:clrMapOvr>
+    <a:masterClrMapping/>
+  </p:clrMapOvr>
+</p:notes>
+</file>
+
+<file path=ppt/notesSlides/notesSlide26.xml><?xml version="1.0" encoding="utf-8"?>
+<p:notes xmlns:a="http://schemas.openxmlformats.org/drawingml/2006/main" xmlns:r="http://schemas.openxmlformats.org/officeDocument/2006/relationships" xmlns:p="http://schemas.openxmlformats.org/presentationml/2006/main">
+  <p:cSld>
+    <p:spTree>
+      <p:nvGrpSpPr>
+        <p:cNvPr id="1" name=""/>
+        <p:cNvGrpSpPr/>
+        <p:nvPr/>
+      </p:nvGrpSpPr>
+      <p:grpSpPr>
+        <a:xfrm>
+          <a:off x="0" y="0"/>
+          <a:ext cx="0" cy="0"/>
+          <a:chOff x="0" y="0"/>
+          <a:chExt cx="0" cy="0"/>
+        </a:xfrm>
+      </p:grpSpPr>
+      <p:sp>
+        <p:nvSpPr>
+          <p:cNvPr id="2" name="Slide Image Placeholder 1"/>
+          <p:cNvSpPr>
+            <a:spLocks noGrp="1" noRot="1" noChangeAspect="1"/>
+          </p:cNvSpPr>
+          <p:nvPr>
+            <p:ph type="sldImg"/>
+          </p:nvPr>
+        </p:nvSpPr>
+        <p:spPr/>
+      </p:sp>
+      <p:sp>
+        <p:nvSpPr>
+          <p:cNvPr id="3" name="Notes Placeholder 2"/>
+          <p:cNvSpPr>
+            <a:spLocks noGrp="1"/>
+          </p:cNvSpPr>
+          <p:nvPr>
+            <p:ph type="body" idx="1"/>
+          </p:nvPr>
+        </p:nvSpPr>
+        <p:spPr/>
+        <p:txBody>
+          <a:bodyPr/>
+          <a:lstStyle/>
+          <a:p>
+            <a:endParaRPr lang="en-US"/>
+          </a:p>
+        </p:txBody>
+      </p:sp>
+      <p:sp>
+        <p:nvSpPr>
+          <p:cNvPr id="4" name="Slide Number Placeholder 3"/>
+          <p:cNvSpPr>
+            <a:spLocks noGrp="1"/>
+          </p:cNvSpPr>
+          <p:nvPr>
+            <p:ph type="sldNum" sz="quarter" idx="5"/>
+          </p:nvPr>
+        </p:nvSpPr>
+        <p:spPr/>
+        <p:txBody>
+          <a:bodyPr/>
+          <a:lstStyle/>
+          <a:p>
+            <a:fld id="{CDDD3684-6E52-4019-8D61-A9B0BAC0DBD6}" type="slidenum">
+              <a:rPr lang="en-US" smtClean="0"/>
+              <a:t>32</a:t>
+            </a:fld>
+            <a:endParaRPr lang="en-US"/>
+          </a:p>
+        </p:txBody>
+      </p:sp>
+    </p:spTree>
+    <p:extLst>
+      <p:ext uri="{BB962C8B-B14F-4D97-AF65-F5344CB8AC3E}">
         <p14:creationId xmlns:p14="http://schemas.microsoft.com/office/powerpoint/2010/main" val="2242484124"/>
       </p:ext>
     </p:extLst>
@@ -7012,7 +7331,7 @@
 </p:notes>
 </file>
 
-<file path=ppt/notesSlides/notesSlide26.xml><?xml version="1.0" encoding="utf-8"?>
+<file path=ppt/notesSlides/notesSlide27.xml><?xml version="1.0" encoding="utf-8"?>
 <p:notes xmlns:a="http://schemas.openxmlformats.org/drawingml/2006/main" xmlns:r="http://schemas.openxmlformats.org/officeDocument/2006/relationships" xmlns:p="http://schemas.openxmlformats.org/presentationml/2006/main">
   <p:cSld>
     <p:spTree>
@@ -7206,7 +7525,7 @@
           <a:p>
             <a:fld id="{CDDD3684-6E52-4019-8D61-A9B0BAC0DBD6}" type="slidenum">
               <a:rPr lang="en-US" smtClean="0"/>
-              <a:t>32</a:t>
+              <a:t>33</a:t>
             </a:fld>
             <a:endParaRPr lang="en-US"/>
           </a:p>
@@ -12384,6 +12703,607 @@
 <file path=ppt/slides/slide10.xml><?xml version="1.0" encoding="utf-8"?>
 <p:sld xmlns:a="http://schemas.openxmlformats.org/drawingml/2006/main" xmlns:r="http://schemas.openxmlformats.org/officeDocument/2006/relationships" xmlns:p="http://schemas.openxmlformats.org/presentationml/2006/main">
   <p:cSld>
+    <p:bg>
+      <p:bgPr>
+        <a:solidFill>
+          <a:schemeClr val="bg1"/>
+        </a:solidFill>
+        <a:effectLst/>
+      </p:bgPr>
+    </p:bg>
+    <p:spTree>
+      <p:nvGrpSpPr>
+        <p:cNvPr id="1" name="">
+          <a:extLst>
+            <a:ext uri="{FF2B5EF4-FFF2-40B4-BE49-F238E27FC236}">
+              <a16:creationId xmlns:a16="http://schemas.microsoft.com/office/drawing/2014/main" id="{E0A08101-DACF-8DA7-9596-25C4DCDB3FA3}"/>
+            </a:ext>
+          </a:extLst>
+        </p:cNvPr>
+        <p:cNvGrpSpPr/>
+        <p:nvPr/>
+      </p:nvGrpSpPr>
+      <p:grpSpPr>
+        <a:xfrm>
+          <a:off x="0" y="0"/>
+          <a:ext cx="0" cy="0"/>
+          <a:chOff x="0" y="0"/>
+          <a:chExt cx="0" cy="0"/>
+        </a:xfrm>
+      </p:grpSpPr>
+      <p:sp useBgFill="1">
+        <p:nvSpPr>
+          <p:cNvPr id="12" name="Rectangle 11">
+            <a:extLst>
+              <a:ext uri="{FF2B5EF4-FFF2-40B4-BE49-F238E27FC236}">
+                <a16:creationId xmlns:a16="http://schemas.microsoft.com/office/drawing/2014/main" id="{86D7BA1C-5425-346F-CBE6-30C09F1A878E}"/>
+              </a:ext>
+              <a:ext uri="{C183D7F6-B498-43B3-948B-1728B52AA6E4}">
+                <adec:decorative xmlns:adec="http://schemas.microsoft.com/office/drawing/2017/decorative" val="1"/>
+              </a:ext>
+            </a:extLst>
+          </p:cNvPr>
+          <p:cNvSpPr>
+            <a:spLocks noGrp="1" noRot="1" noChangeAspect="1" noMove="1" noResize="1" noEditPoints="1" noAdjustHandles="1" noChangeArrowheads="1" noChangeShapeType="1" noTextEdit="1"/>
+          </p:cNvSpPr>
+          <p:nvPr>
+            <p:extLst>
+              <p:ext uri="{386F3935-93C4-4BCD-93E2-E3B085C9AB24}">
+                <p16:designElem xmlns:p16="http://schemas.microsoft.com/office/powerpoint/2015/main" val="1"/>
+              </p:ext>
+            </p:extLst>
+          </p:nvPr>
+        </p:nvSpPr>
+        <p:spPr>
+          <a:xfrm>
+            <a:off x="0" y="0"/>
+            <a:ext cx="12188952" cy="6858000"/>
+          </a:xfrm>
+          <a:prstGeom prst="rect">
+            <a:avLst/>
+          </a:prstGeom>
+          <a:ln>
+            <a:noFill/>
+          </a:ln>
+        </p:spPr>
+        <p:style>
+          <a:lnRef idx="2">
+            <a:schemeClr val="accent1">
+              <a:shade val="50000"/>
+            </a:schemeClr>
+          </a:lnRef>
+          <a:fillRef idx="1">
+            <a:schemeClr val="accent1"/>
+          </a:fillRef>
+          <a:effectRef idx="0">
+            <a:schemeClr val="accent1"/>
+          </a:effectRef>
+          <a:fontRef idx="minor">
+            <a:schemeClr val="lt1"/>
+          </a:fontRef>
+        </p:style>
+        <p:txBody>
+          <a:bodyPr rtlCol="0" anchor="ctr"/>
+          <a:lstStyle/>
+          <a:p>
+            <a:pPr algn="ctr"/>
+            <a:endParaRPr lang="en-US"/>
+          </a:p>
+        </p:txBody>
+      </p:sp>
+      <p:sp>
+        <p:nvSpPr>
+          <p:cNvPr id="2" name="Title 1">
+            <a:extLst>
+              <a:ext uri="{FF2B5EF4-FFF2-40B4-BE49-F238E27FC236}">
+                <a16:creationId xmlns:a16="http://schemas.microsoft.com/office/drawing/2014/main" id="{5DC24C7A-3BCF-899A-484C-EC08A7A599D8}"/>
+              </a:ext>
+            </a:extLst>
+          </p:cNvPr>
+          <p:cNvSpPr>
+            <a:spLocks noGrp="1"/>
+          </p:cNvSpPr>
+          <p:nvPr>
+            <p:ph type="title"/>
+          </p:nvPr>
+        </p:nvSpPr>
+        <p:spPr>
+          <a:xfrm>
+            <a:off x="640080" y="329184"/>
+            <a:ext cx="6894576" cy="1783080"/>
+          </a:xfrm>
+        </p:spPr>
+        <p:txBody>
+          <a:bodyPr anchor="b">
+            <a:normAutofit/>
+          </a:bodyPr>
+          <a:lstStyle/>
+          <a:p>
+            <a:r>
+              <a:rPr lang="en-US" sz="5400" dirty="0"/>
+              <a:t>Rider</a:t>
+            </a:r>
+          </a:p>
+        </p:txBody>
+      </p:sp>
+      <p:sp>
+        <p:nvSpPr>
+          <p:cNvPr id="14" name="sketch line">
+            <a:extLst>
+              <a:ext uri="{FF2B5EF4-FFF2-40B4-BE49-F238E27FC236}">
+                <a16:creationId xmlns:a16="http://schemas.microsoft.com/office/drawing/2014/main" id="{6A430CDB-4765-A269-1BCC-01291655EA65}"/>
+              </a:ext>
+              <a:ext uri="{C183D7F6-B498-43B3-948B-1728B52AA6E4}">
+                <adec:decorative xmlns:adec="http://schemas.microsoft.com/office/drawing/2017/decorative" val="1"/>
+              </a:ext>
+            </a:extLst>
+          </p:cNvPr>
+          <p:cNvSpPr>
+            <a:spLocks noGrp="1" noRot="1" noChangeAspect="1" noMove="1" noResize="1" noEditPoints="1" noAdjustHandles="1" noChangeArrowheads="1" noChangeShapeType="1" noTextEdit="1"/>
+          </p:cNvSpPr>
+          <p:nvPr>
+            <p:extLst>
+              <p:ext uri="{386F3935-93C4-4BCD-93E2-E3B085C9AB24}">
+                <p16:designElem xmlns:p16="http://schemas.microsoft.com/office/powerpoint/2015/main" val="1"/>
+              </p:ext>
+            </p:extLst>
+          </p:nvPr>
+        </p:nvSpPr>
+        <p:spPr>
+          <a:xfrm>
+            <a:off x="758952" y="2395728"/>
+            <a:ext cx="4243589" cy="18288"/>
+          </a:xfrm>
+          <a:custGeom>
+            <a:avLst/>
+            <a:gdLst>
+              <a:gd name="csX0" fmla="*/ 0 w 4243589"/>
+              <a:gd name="csY0" fmla="*/ 0 h 18288"/>
+              <a:gd name="csX1" fmla="*/ 478919 w 4243589"/>
+              <a:gd name="csY1" fmla="*/ 0 h 18288"/>
+              <a:gd name="csX2" fmla="*/ 957839 w 4243589"/>
+              <a:gd name="csY2" fmla="*/ 0 h 18288"/>
+              <a:gd name="csX3" fmla="*/ 1521630 w 4243589"/>
+              <a:gd name="csY3" fmla="*/ 0 h 18288"/>
+              <a:gd name="csX4" fmla="*/ 2212729 w 4243589"/>
+              <a:gd name="csY4" fmla="*/ 0 h 18288"/>
+              <a:gd name="csX5" fmla="*/ 2734084 w 4243589"/>
+              <a:gd name="csY5" fmla="*/ 0 h 18288"/>
+              <a:gd name="csX6" fmla="*/ 3255439 w 4243589"/>
+              <a:gd name="csY6" fmla="*/ 0 h 18288"/>
+              <a:gd name="csX7" fmla="*/ 4243589 w 4243589"/>
+              <a:gd name="csY7" fmla="*/ 0 h 18288"/>
+              <a:gd name="csX8" fmla="*/ 4243589 w 4243589"/>
+              <a:gd name="csY8" fmla="*/ 18288 h 18288"/>
+              <a:gd name="csX9" fmla="*/ 3594926 w 4243589"/>
+              <a:gd name="csY9" fmla="*/ 18288 h 18288"/>
+              <a:gd name="csX10" fmla="*/ 3073571 w 4243589"/>
+              <a:gd name="csY10" fmla="*/ 18288 h 18288"/>
+              <a:gd name="csX11" fmla="*/ 2552216 w 4243589"/>
+              <a:gd name="csY11" fmla="*/ 18288 h 18288"/>
+              <a:gd name="csX12" fmla="*/ 1903553 w 4243589"/>
+              <a:gd name="csY12" fmla="*/ 18288 h 18288"/>
+              <a:gd name="csX13" fmla="*/ 1212454 w 4243589"/>
+              <a:gd name="csY13" fmla="*/ 18288 h 18288"/>
+              <a:gd name="csX14" fmla="*/ 733535 w 4243589"/>
+              <a:gd name="csY14" fmla="*/ 18288 h 18288"/>
+              <a:gd name="csX15" fmla="*/ 0 w 4243589"/>
+              <a:gd name="csY15" fmla="*/ 18288 h 18288"/>
+              <a:gd name="csX16" fmla="*/ 0 w 4243589"/>
+              <a:gd name="csY16" fmla="*/ 0 h 18288"/>
+            </a:gdLst>
+            <a:ahLst/>
+            <a:cxnLst>
+              <a:cxn ang="0">
+                <a:pos x="csX0" y="csY0"/>
+              </a:cxn>
+              <a:cxn ang="0">
+                <a:pos x="csX1" y="csY1"/>
+              </a:cxn>
+              <a:cxn ang="0">
+                <a:pos x="csX2" y="csY2"/>
+              </a:cxn>
+              <a:cxn ang="0">
+                <a:pos x="csX3" y="csY3"/>
+              </a:cxn>
+              <a:cxn ang="0">
+                <a:pos x="csX4" y="csY4"/>
+              </a:cxn>
+              <a:cxn ang="0">
+                <a:pos x="csX5" y="csY5"/>
+              </a:cxn>
+              <a:cxn ang="0">
+                <a:pos x="csX6" y="csY6"/>
+              </a:cxn>
+              <a:cxn ang="0">
+                <a:pos x="csX7" y="csY7"/>
+              </a:cxn>
+              <a:cxn ang="0">
+                <a:pos x="csX8" y="csY8"/>
+              </a:cxn>
+              <a:cxn ang="0">
+                <a:pos x="csX9" y="csY9"/>
+              </a:cxn>
+              <a:cxn ang="0">
+                <a:pos x="csX10" y="csY10"/>
+              </a:cxn>
+              <a:cxn ang="0">
+                <a:pos x="csX11" y="csY11"/>
+              </a:cxn>
+              <a:cxn ang="0">
+                <a:pos x="csX12" y="csY12"/>
+              </a:cxn>
+              <a:cxn ang="0">
+                <a:pos x="csX13" y="csY13"/>
+              </a:cxn>
+              <a:cxn ang="0">
+                <a:pos x="csX14" y="csY14"/>
+              </a:cxn>
+              <a:cxn ang="0">
+                <a:pos x="csX15" y="csY15"/>
+              </a:cxn>
+              <a:cxn ang="0">
+                <a:pos x="csX16" y="csY16"/>
+              </a:cxn>
+            </a:cxnLst>
+            <a:rect l="l" t="t" r="r" b="b"/>
+            <a:pathLst>
+              <a:path w="4243589" h="18288" fill="none" extrusionOk="0">
+                <a:moveTo>
+                  <a:pt x="0" y="0"/>
+                </a:moveTo>
+                <a:cubicBezTo>
+                  <a:pt x="213395" y="-21006"/>
+                  <a:pt x="307421" y="-18116"/>
+                  <a:pt x="478919" y="0"/>
+                </a:cubicBezTo>
+                <a:cubicBezTo>
+                  <a:pt x="650417" y="18116"/>
+                  <a:pt x="831092" y="-21237"/>
+                  <a:pt x="957839" y="0"/>
+                </a:cubicBezTo>
+                <a:cubicBezTo>
+                  <a:pt x="1084586" y="21237"/>
+                  <a:pt x="1301682" y="25124"/>
+                  <a:pt x="1521630" y="0"/>
+                </a:cubicBezTo>
+                <a:cubicBezTo>
+                  <a:pt x="1741578" y="-25124"/>
+                  <a:pt x="1970269" y="-29139"/>
+                  <a:pt x="2212729" y="0"/>
+                </a:cubicBezTo>
+                <a:cubicBezTo>
+                  <a:pt x="2455189" y="29139"/>
+                  <a:pt x="2558847" y="-4796"/>
+                  <a:pt x="2734084" y="0"/>
+                </a:cubicBezTo>
+                <a:cubicBezTo>
+                  <a:pt x="2909321" y="4796"/>
+                  <a:pt x="3097217" y="-13409"/>
+                  <a:pt x="3255439" y="0"/>
+                </a:cubicBezTo>
+                <a:cubicBezTo>
+                  <a:pt x="3413662" y="13409"/>
+                  <a:pt x="3979999" y="-10121"/>
+                  <a:pt x="4243589" y="0"/>
+                </a:cubicBezTo>
+                <a:cubicBezTo>
+                  <a:pt x="4244484" y="8974"/>
+                  <a:pt x="4243043" y="9359"/>
+                  <a:pt x="4243589" y="18288"/>
+                </a:cubicBezTo>
+                <a:cubicBezTo>
+                  <a:pt x="4058777" y="31246"/>
+                  <a:pt x="3910348" y="3158"/>
+                  <a:pt x="3594926" y="18288"/>
+                </a:cubicBezTo>
+                <a:cubicBezTo>
+                  <a:pt x="3279504" y="33418"/>
+                  <a:pt x="3319955" y="-3977"/>
+                  <a:pt x="3073571" y="18288"/>
+                </a:cubicBezTo>
+                <a:cubicBezTo>
+                  <a:pt x="2827187" y="40553"/>
+                  <a:pt x="2767387" y="1863"/>
+                  <a:pt x="2552216" y="18288"/>
+                </a:cubicBezTo>
+                <a:cubicBezTo>
+                  <a:pt x="2337046" y="34713"/>
+                  <a:pt x="2181871" y="19527"/>
+                  <a:pt x="1903553" y="18288"/>
+                </a:cubicBezTo>
+                <a:cubicBezTo>
+                  <a:pt x="1625235" y="17049"/>
+                  <a:pt x="1557672" y="24174"/>
+                  <a:pt x="1212454" y="18288"/>
+                </a:cubicBezTo>
+                <a:cubicBezTo>
+                  <a:pt x="867236" y="12402"/>
+                  <a:pt x="874382" y="15627"/>
+                  <a:pt x="733535" y="18288"/>
+                </a:cubicBezTo>
+                <a:cubicBezTo>
+                  <a:pt x="592688" y="20949"/>
+                  <a:pt x="183477" y="14753"/>
+                  <a:pt x="0" y="18288"/>
+                </a:cubicBezTo>
+                <a:cubicBezTo>
+                  <a:pt x="-229" y="14222"/>
+                  <a:pt x="509" y="5816"/>
+                  <a:pt x="0" y="0"/>
+                </a:cubicBezTo>
+                <a:close/>
+              </a:path>
+              <a:path w="4243589" h="18288" stroke="0" extrusionOk="0">
+                <a:moveTo>
+                  <a:pt x="0" y="0"/>
+                </a:moveTo>
+                <a:cubicBezTo>
+                  <a:pt x="143690" y="16630"/>
+                  <a:pt x="266667" y="14847"/>
+                  <a:pt x="521355" y="0"/>
+                </a:cubicBezTo>
+                <a:cubicBezTo>
+                  <a:pt x="776043" y="-14847"/>
+                  <a:pt x="814491" y="-17363"/>
+                  <a:pt x="1000275" y="0"/>
+                </a:cubicBezTo>
+                <a:cubicBezTo>
+                  <a:pt x="1186059" y="17363"/>
+                  <a:pt x="1352504" y="-23507"/>
+                  <a:pt x="1521630" y="0"/>
+                </a:cubicBezTo>
+                <a:cubicBezTo>
+                  <a:pt x="1690756" y="23507"/>
+                  <a:pt x="1889525" y="5871"/>
+                  <a:pt x="2127857" y="0"/>
+                </a:cubicBezTo>
+                <a:cubicBezTo>
+                  <a:pt x="2366189" y="-5871"/>
+                  <a:pt x="2620628" y="-27997"/>
+                  <a:pt x="2776520" y="0"/>
+                </a:cubicBezTo>
+                <a:cubicBezTo>
+                  <a:pt x="2932412" y="27997"/>
+                  <a:pt x="3131683" y="-25073"/>
+                  <a:pt x="3467618" y="0"/>
+                </a:cubicBezTo>
+                <a:cubicBezTo>
+                  <a:pt x="3803553" y="25073"/>
+                  <a:pt x="4017371" y="3071"/>
+                  <a:pt x="4243589" y="0"/>
+                </a:cubicBezTo>
+                <a:cubicBezTo>
+                  <a:pt x="4243134" y="6162"/>
+                  <a:pt x="4243492" y="11775"/>
+                  <a:pt x="4243589" y="18288"/>
+                </a:cubicBezTo>
+                <a:cubicBezTo>
+                  <a:pt x="4017834" y="-5779"/>
+                  <a:pt x="3834586" y="13376"/>
+                  <a:pt x="3594926" y="18288"/>
+                </a:cubicBezTo>
+                <a:cubicBezTo>
+                  <a:pt x="3355266" y="23200"/>
+                  <a:pt x="3204179" y="2869"/>
+                  <a:pt x="2903827" y="18288"/>
+                </a:cubicBezTo>
+                <a:cubicBezTo>
+                  <a:pt x="2603475" y="33707"/>
+                  <a:pt x="2526187" y="46187"/>
+                  <a:pt x="2212729" y="18288"/>
+                </a:cubicBezTo>
+                <a:cubicBezTo>
+                  <a:pt x="1899271" y="-9611"/>
+                  <a:pt x="1966289" y="29692"/>
+                  <a:pt x="1733809" y="18288"/>
+                </a:cubicBezTo>
+                <a:cubicBezTo>
+                  <a:pt x="1501329" y="6884"/>
+                  <a:pt x="1343612" y="12492"/>
+                  <a:pt x="1085146" y="18288"/>
+                </a:cubicBezTo>
+                <a:cubicBezTo>
+                  <a:pt x="826680" y="24084"/>
+                  <a:pt x="778184" y="35607"/>
+                  <a:pt x="521355" y="18288"/>
+                </a:cubicBezTo>
+                <a:cubicBezTo>
+                  <a:pt x="264526" y="969"/>
+                  <a:pt x="120277" y="4268"/>
+                  <a:pt x="0" y="18288"/>
+                </a:cubicBezTo>
+                <a:cubicBezTo>
+                  <a:pt x="766" y="10800"/>
+                  <a:pt x="-457" y="8180"/>
+                  <a:pt x="0" y="0"/>
+                </a:cubicBezTo>
+                <a:close/>
+              </a:path>
+            </a:pathLst>
+          </a:custGeom>
+          <a:solidFill>
+            <a:schemeClr val="accent2"/>
+          </a:solidFill>
+          <a:ln w="41275" cap="rnd">
+            <a:solidFill>
+              <a:schemeClr val="accent2"/>
+            </a:solidFill>
+            <a:round/>
+            <a:extLst>
+              <a:ext uri="{C807C97D-BFC1-408E-A445-0C87EB9F89A2}">
+                <ask:lineSketchStyleProps xmlns:ask="http://schemas.microsoft.com/office/drawing/2018/sketchyshapes" sd="2727557108">
+                  <a:prstGeom prst="rect">
+                    <a:avLst/>
+                  </a:prstGeom>
+                  <ask:type>
+                    <ask:lineSketchFreehand/>
+                  </ask:type>
+                </ask:lineSketchStyleProps>
+              </a:ext>
+            </a:extLst>
+          </a:ln>
+        </p:spPr>
+        <p:style>
+          <a:lnRef idx="2">
+            <a:schemeClr val="accent1">
+              <a:shade val="50000"/>
+            </a:schemeClr>
+          </a:lnRef>
+          <a:fillRef idx="1">
+            <a:schemeClr val="accent1"/>
+          </a:fillRef>
+          <a:effectRef idx="0">
+            <a:schemeClr val="accent1"/>
+          </a:effectRef>
+          <a:fontRef idx="minor">
+            <a:schemeClr val="lt1"/>
+          </a:fontRef>
+        </p:style>
+        <p:txBody>
+          <a:bodyPr rtlCol="0" anchor="ctr"/>
+          <a:lstStyle/>
+          <a:p>
+            <a:pPr algn="ctr"/>
+            <a:endParaRPr lang="en-US"/>
+          </a:p>
+        </p:txBody>
+      </p:sp>
+      <p:sp>
+        <p:nvSpPr>
+          <p:cNvPr id="3" name="Content Placeholder 2">
+            <a:extLst>
+              <a:ext uri="{FF2B5EF4-FFF2-40B4-BE49-F238E27FC236}">
+                <a16:creationId xmlns:a16="http://schemas.microsoft.com/office/drawing/2014/main" id="{D24EFA88-7847-FCDB-090E-9343EF22EC6C}"/>
+              </a:ext>
+            </a:extLst>
+          </p:cNvPr>
+          <p:cNvSpPr>
+            <a:spLocks noGrp="1"/>
+          </p:cNvSpPr>
+          <p:nvPr>
+            <p:ph idx="1"/>
+          </p:nvPr>
+        </p:nvSpPr>
+        <p:spPr>
+          <a:xfrm>
+            <a:off x="640080" y="2706624"/>
+            <a:ext cx="6894576" cy="3483864"/>
+          </a:xfrm>
+        </p:spPr>
+        <p:txBody>
+          <a:bodyPr>
+            <a:normAutofit/>
+          </a:bodyPr>
+          <a:lstStyle/>
+          <a:p>
+            <a:r>
+              <a:rPr lang="en-US" sz="1700" dirty="0"/>
+              <a:t>No code completion unless you add your project as “DDL Data source”</a:t>
+            </a:r>
+          </a:p>
+          <a:p>
+            <a:r>
+              <a:rPr lang="en-US" sz="1700" dirty="0"/>
+              <a:t>Publish dialog</a:t>
+            </a:r>
+          </a:p>
+          <a:p>
+            <a:r>
+              <a:rPr lang="en-US" sz="1700" dirty="0"/>
+              <a:t>Supports Legacy project style</a:t>
+            </a:r>
+          </a:p>
+          <a:p>
+            <a:r>
+              <a:rPr lang="en-US" sz="1700" dirty="0"/>
+              <a:t>Syntax errors highlighted but not reference errors</a:t>
+            </a:r>
+          </a:p>
+          <a:p>
+            <a:pPr marL="457200" lvl="1" indent="0">
+              <a:buNone/>
+            </a:pPr>
+            <a:endParaRPr lang="en-US" sz="1700" dirty="0"/>
+          </a:p>
+        </p:txBody>
+      </p:sp>
+      <p:pic>
+        <p:nvPicPr>
+          <p:cNvPr id="5" name="Picture 4">
+            <a:extLst>
+              <a:ext uri="{FF2B5EF4-FFF2-40B4-BE49-F238E27FC236}">
+                <a16:creationId xmlns:a16="http://schemas.microsoft.com/office/drawing/2014/main" id="{E3A6EB62-0D12-8F3C-8BBE-0545B01F6796}"/>
+              </a:ext>
+            </a:extLst>
+          </p:cNvPr>
+          <p:cNvPicPr>
+            <a:picLocks noChangeAspect="1"/>
+          </p:cNvPicPr>
+          <p:nvPr/>
+        </p:nvPicPr>
+        <p:blipFill>
+          <a:blip r:embed="rId3"/>
+          <a:stretch>
+            <a:fillRect/>
+          </a:stretch>
+        </p:blipFill>
+        <p:spPr>
+          <a:xfrm>
+            <a:off x="7085493" y="130539"/>
+            <a:ext cx="4763613" cy="3750752"/>
+          </a:xfrm>
+          <a:prstGeom prst="rect">
+            <a:avLst/>
+          </a:prstGeom>
+        </p:spPr>
+      </p:pic>
+      <p:pic>
+        <p:nvPicPr>
+          <p:cNvPr id="7" name="Picture 6">
+            <a:extLst>
+              <a:ext uri="{FF2B5EF4-FFF2-40B4-BE49-F238E27FC236}">
+                <a16:creationId xmlns:a16="http://schemas.microsoft.com/office/drawing/2014/main" id="{78CC8ADA-82C5-0453-085C-9203739C71BF}"/>
+              </a:ext>
+            </a:extLst>
+          </p:cNvPr>
+          <p:cNvPicPr>
+            <a:picLocks noChangeAspect="1"/>
+          </p:cNvPicPr>
+          <p:nvPr/>
+        </p:nvPicPr>
+        <p:blipFill>
+          <a:blip r:embed="rId4"/>
+          <a:stretch>
+            <a:fillRect/>
+          </a:stretch>
+        </p:blipFill>
+        <p:spPr>
+          <a:xfrm>
+            <a:off x="5772480" y="3983564"/>
+            <a:ext cx="5715798" cy="2772162"/>
+          </a:xfrm>
+          <a:prstGeom prst="rect">
+            <a:avLst/>
+          </a:prstGeom>
+        </p:spPr>
+      </p:pic>
+    </p:spTree>
+    <p:extLst>
+      <p:ext uri="{BB962C8B-B14F-4D97-AF65-F5344CB8AC3E}">
+        <p14:creationId xmlns:p14="http://schemas.microsoft.com/office/powerpoint/2010/main" val="71871404"/>
+      </p:ext>
+    </p:extLst>
+  </p:cSld>
+  <p:clrMapOvr>
+    <a:masterClrMapping/>
+  </p:clrMapOvr>
+</p:sld>
+</file>
+
+<file path=ppt/slides/slide11.xml><?xml version="1.0" encoding="utf-8"?>
+<p:sld xmlns:a="http://schemas.openxmlformats.org/drawingml/2006/main" xmlns:r="http://schemas.openxmlformats.org/officeDocument/2006/relationships" xmlns:p="http://schemas.openxmlformats.org/presentationml/2006/main">
+  <p:cSld>
     <p:spTree>
       <p:nvGrpSpPr>
         <p:cNvPr id="1" name="">
@@ -12556,7 +13476,7 @@
 </p:sld>
 </file>
 
-<file path=ppt/slides/slide11.xml><?xml version="1.0" encoding="utf-8"?>
+<file path=ppt/slides/slide12.xml><?xml version="1.0" encoding="utf-8"?>
 <p:sld xmlns:a="http://schemas.openxmlformats.org/drawingml/2006/main" xmlns:r="http://schemas.openxmlformats.org/officeDocument/2006/relationships" xmlns:p="http://schemas.openxmlformats.org/presentationml/2006/main">
   <p:cSld>
     <p:bg>
@@ -15855,7 +16775,7 @@
 </p:sld>
 </file>
 
-<file path=ppt/slides/slide12.xml><?xml version="1.0" encoding="utf-8"?>
+<file path=ppt/slides/slide13.xml><?xml version="1.0" encoding="utf-8"?>
 <p:sld xmlns:a="http://schemas.openxmlformats.org/drawingml/2006/main" xmlns:r="http://schemas.openxmlformats.org/officeDocument/2006/relationships" xmlns:p="http://schemas.openxmlformats.org/presentationml/2006/main">
   <p:cSld>
     <p:bg>
@@ -16407,7 +17327,7 @@
 </p:sld>
 </file>
 
-<file path=ppt/slides/slide13.xml><?xml version="1.0" encoding="utf-8"?>
+<file path=ppt/slides/slide14.xml><?xml version="1.0" encoding="utf-8"?>
 <p:sld xmlns:a="http://schemas.openxmlformats.org/drawingml/2006/main" xmlns:r="http://schemas.openxmlformats.org/officeDocument/2006/relationships" xmlns:p="http://schemas.openxmlformats.org/presentationml/2006/main">
   <p:cSld>
     <p:bg>
@@ -17376,7 +18296,7 @@
 </p:sld>
 </file>
 
-<file path=ppt/slides/slide14.xml><?xml version="1.0" encoding="utf-8"?>
+<file path=ppt/slides/slide15.xml><?xml version="1.0" encoding="utf-8"?>
 <p:sld xmlns:a="http://schemas.openxmlformats.org/drawingml/2006/main" xmlns:r="http://schemas.openxmlformats.org/officeDocument/2006/relationships" xmlns:p="http://schemas.openxmlformats.org/presentationml/2006/main">
   <p:cSld>
     <p:spTree>
@@ -17825,7 +18745,7 @@
 </p:sld>
 </file>
 
-<file path=ppt/slides/slide15.xml><?xml version="1.0" encoding="utf-8"?>
+<file path=ppt/slides/slide16.xml><?xml version="1.0" encoding="utf-8"?>
 <p:sld xmlns:a="http://schemas.openxmlformats.org/drawingml/2006/main" xmlns:r="http://schemas.openxmlformats.org/officeDocument/2006/relationships" xmlns:p="http://schemas.openxmlformats.org/presentationml/2006/main">
   <p:cSld>
     <p:spTree>
@@ -18164,7 +19084,7 @@
 </p:sld>
 </file>
 
-<file path=ppt/slides/slide16.xml><?xml version="1.0" encoding="utf-8"?>
+<file path=ppt/slides/slide17.xml><?xml version="1.0" encoding="utf-8"?>
 <p:sld xmlns:a="http://schemas.openxmlformats.org/drawingml/2006/main" xmlns:r="http://schemas.openxmlformats.org/officeDocument/2006/relationships" xmlns:p="http://schemas.openxmlformats.org/presentationml/2006/main">
   <p:cSld>
     <p:spTree>
@@ -18543,7 +19463,7 @@
 </p:sld>
 </file>
 
-<file path=ppt/slides/slide17.xml><?xml version="1.0" encoding="utf-8"?>
+<file path=ppt/slides/slide18.xml><?xml version="1.0" encoding="utf-8"?>
 <p:sld xmlns:a="http://schemas.openxmlformats.org/drawingml/2006/main" xmlns:r="http://schemas.openxmlformats.org/officeDocument/2006/relationships" xmlns:p="http://schemas.openxmlformats.org/presentationml/2006/main">
   <p:cSld>
     <p:spTree>
@@ -18922,7 +19842,7 @@
 </p:sld>
 </file>
 
-<file path=ppt/slides/slide18.xml><?xml version="1.0" encoding="utf-8"?>
+<file path=ppt/slides/slide19.xml><?xml version="1.0" encoding="utf-8"?>
 <p:sld xmlns:a="http://schemas.openxmlformats.org/drawingml/2006/main" xmlns:r="http://schemas.openxmlformats.org/officeDocument/2006/relationships" xmlns:p="http://schemas.openxmlformats.org/presentationml/2006/main">
   <p:cSld>
     <p:spTree>
@@ -19270,345 +20190,6 @@
     <p:extLst>
       <p:ext uri="{BB962C8B-B14F-4D97-AF65-F5344CB8AC3E}">
         <p14:creationId xmlns:p14="http://schemas.microsoft.com/office/powerpoint/2010/main" val="3873014463"/>
-      </p:ext>
-    </p:extLst>
-  </p:cSld>
-  <p:clrMapOvr>
-    <a:masterClrMapping/>
-  </p:clrMapOvr>
-</p:sld>
-</file>
-
-<file path=ppt/slides/slide19.xml><?xml version="1.0" encoding="utf-8"?>
-<p:sld xmlns:a="http://schemas.openxmlformats.org/drawingml/2006/main" xmlns:r="http://schemas.openxmlformats.org/officeDocument/2006/relationships" xmlns:p="http://schemas.openxmlformats.org/presentationml/2006/main">
-  <p:cSld>
-    <p:spTree>
-      <p:nvGrpSpPr>
-        <p:cNvPr id="1" name="">
-          <a:extLst>
-            <a:ext uri="{FF2B5EF4-FFF2-40B4-BE49-F238E27FC236}">
-              <a16:creationId xmlns:a16="http://schemas.microsoft.com/office/drawing/2014/main" id="{5951B3A8-B991-7EC5-7413-2BF5C66D6092}"/>
-            </a:ext>
-          </a:extLst>
-        </p:cNvPr>
-        <p:cNvGrpSpPr/>
-        <p:nvPr/>
-      </p:nvGrpSpPr>
-      <p:grpSpPr>
-        <a:xfrm>
-          <a:off x="0" y="0"/>
-          <a:ext cx="0" cy="0"/>
-          <a:chOff x="0" y="0"/>
-          <a:chExt cx="0" cy="0"/>
-        </a:xfrm>
-      </p:grpSpPr>
-      <p:sp>
-        <p:nvSpPr>
-          <p:cNvPr id="2" name="Title 1">
-            <a:extLst>
-              <a:ext uri="{FF2B5EF4-FFF2-40B4-BE49-F238E27FC236}">
-                <a16:creationId xmlns:a16="http://schemas.microsoft.com/office/drawing/2014/main" id="{592467DE-4E42-4A83-7A86-6693D75AE821}"/>
-              </a:ext>
-            </a:extLst>
-          </p:cNvPr>
-          <p:cNvSpPr>
-            <a:spLocks noGrp="1"/>
-          </p:cNvSpPr>
-          <p:nvPr>
-            <p:ph type="title"/>
-          </p:nvPr>
-        </p:nvSpPr>
-        <p:spPr>
-          <a:xfrm>
-            <a:off x="838200" y="365125"/>
-            <a:ext cx="10515600" cy="1325563"/>
-          </a:xfrm>
-        </p:spPr>
-        <p:txBody>
-          <a:bodyPr>
-            <a:normAutofit/>
-          </a:bodyPr>
-          <a:lstStyle/>
-          <a:p>
-            <a:r>
-              <a:rPr lang="en-US" sz="5400" dirty="0"/>
-              <a:t>Change Sample – New primary key</a:t>
-            </a:r>
-          </a:p>
-        </p:txBody>
-      </p:sp>
-      <p:pic>
-        <p:nvPicPr>
-          <p:cNvPr id="1026" name="Picture 2">
-            <a:extLst>
-              <a:ext uri="{FF2B5EF4-FFF2-40B4-BE49-F238E27FC236}">
-                <a16:creationId xmlns:a16="http://schemas.microsoft.com/office/drawing/2014/main" id="{8308FDD4-0F58-342E-BA39-01AE9636CF36}"/>
-              </a:ext>
-            </a:extLst>
-          </p:cNvPr>
-          <p:cNvPicPr>
-            <a:picLocks noChangeAspect="1" noChangeArrowheads="1"/>
-          </p:cNvPicPr>
-          <p:nvPr/>
-        </p:nvPicPr>
-        <p:blipFill>
-          <a:blip r:embed="rId3">
-            <a:extLst>
-              <a:ext uri="{28A0092B-C50C-407E-A947-70E740481C1C}">
-                <a14:useLocalDpi xmlns:a14="http://schemas.microsoft.com/office/drawing/2010/main" val="0"/>
-              </a:ext>
-            </a:extLst>
-          </a:blip>
-          <a:srcRect/>
-          <a:stretch>
-            <a:fillRect/>
-          </a:stretch>
-        </p:blipFill>
-        <p:spPr bwMode="auto">
-          <a:xfrm>
-            <a:off x="63500" y="-7185025"/>
-            <a:ext cx="3686175" cy="1238250"/>
-          </a:xfrm>
-          <a:prstGeom prst="rect">
-            <a:avLst/>
-          </a:prstGeom>
-          <a:noFill/>
-          <a:extLst>
-            <a:ext uri="{909E8E84-426E-40DD-AFC4-6F175D3DCCD1}">
-              <a14:hiddenFill xmlns:a14="http://schemas.microsoft.com/office/drawing/2010/main">
-                <a:solidFill>
-                  <a:srgbClr val="FFFFFF"/>
-                </a:solidFill>
-              </a14:hiddenFill>
-            </a:ext>
-          </a:extLst>
-        </p:spPr>
-      </p:pic>
-      <p:sp>
-        <p:nvSpPr>
-          <p:cNvPr id="8" name="Arrow: Right 7">
-            <a:extLst>
-              <a:ext uri="{FF2B5EF4-FFF2-40B4-BE49-F238E27FC236}">
-                <a16:creationId xmlns:a16="http://schemas.microsoft.com/office/drawing/2014/main" id="{3C34B046-D784-495C-C228-BE9847C2C630}"/>
-              </a:ext>
-            </a:extLst>
-          </p:cNvPr>
-          <p:cNvSpPr/>
-          <p:nvPr/>
-        </p:nvSpPr>
-        <p:spPr>
-          <a:xfrm>
-            <a:off x="5191797" y="3489990"/>
-            <a:ext cx="840259" cy="259492"/>
-          </a:xfrm>
-          <a:prstGeom prst="rightArrow">
-            <a:avLst/>
-          </a:prstGeom>
-        </p:spPr>
-        <p:style>
-          <a:lnRef idx="2">
-            <a:schemeClr val="accent1">
-              <a:shade val="15000"/>
-            </a:schemeClr>
-          </a:lnRef>
-          <a:fillRef idx="1">
-            <a:schemeClr val="accent1"/>
-          </a:fillRef>
-          <a:effectRef idx="0">
-            <a:schemeClr val="accent1"/>
-          </a:effectRef>
-          <a:fontRef idx="minor">
-            <a:schemeClr val="lt1"/>
-          </a:fontRef>
-        </p:style>
-        <p:txBody>
-          <a:bodyPr rtlCol="0" anchor="ctr"/>
-          <a:lstStyle/>
-          <a:p>
-            <a:pPr algn="ctr"/>
-            <a:endParaRPr lang="en-US"/>
-          </a:p>
-        </p:txBody>
-      </p:sp>
-      <p:sp>
-        <p:nvSpPr>
-          <p:cNvPr id="17" name="TextBox 16">
-            <a:extLst>
-              <a:ext uri="{FF2B5EF4-FFF2-40B4-BE49-F238E27FC236}">
-                <a16:creationId xmlns:a16="http://schemas.microsoft.com/office/drawing/2014/main" id="{D354F90E-D376-FDD3-FABC-46062396C21B}"/>
-              </a:ext>
-            </a:extLst>
-          </p:cNvPr>
-          <p:cNvSpPr txBox="1"/>
-          <p:nvPr/>
-        </p:nvSpPr>
-        <p:spPr>
-          <a:xfrm>
-            <a:off x="790883" y="5251494"/>
-            <a:ext cx="6035061" cy="646331"/>
-          </a:xfrm>
-          <a:prstGeom prst="rect">
-            <a:avLst/>
-          </a:prstGeom>
-          <a:noFill/>
-        </p:spPr>
-        <p:txBody>
-          <a:bodyPr wrap="square" rtlCol="0">
-            <a:spAutoFit/>
-          </a:bodyPr>
-          <a:lstStyle/>
-          <a:p>
-            <a:pPr marL="342900" indent="-342900">
-              <a:buFont typeface="+mj-lt"/>
-              <a:buAutoNum type="arabicPeriod"/>
-            </a:pPr>
-            <a:r>
-              <a:rPr lang="en-US" dirty="0"/>
-              <a:t>Full table re-creation with a data copy within a transaction </a:t>
-            </a:r>
-          </a:p>
-        </p:txBody>
-      </p:sp>
-      <p:sp>
-        <p:nvSpPr>
-          <p:cNvPr id="18" name="Arrow: Down 17">
-            <a:extLst>
-              <a:ext uri="{FF2B5EF4-FFF2-40B4-BE49-F238E27FC236}">
-                <a16:creationId xmlns:a16="http://schemas.microsoft.com/office/drawing/2014/main" id="{BAA0C25A-3422-9ED4-B6BB-85FAB20A45A6}"/>
-              </a:ext>
-            </a:extLst>
-          </p:cNvPr>
-          <p:cNvSpPr/>
-          <p:nvPr/>
-        </p:nvSpPr>
-        <p:spPr>
-          <a:xfrm>
-            <a:off x="2836404" y="2878829"/>
-            <a:ext cx="208105" cy="236979"/>
-          </a:xfrm>
-          <a:prstGeom prst="downArrow">
-            <a:avLst/>
-          </a:prstGeom>
-        </p:spPr>
-        <p:style>
-          <a:lnRef idx="2">
-            <a:schemeClr val="accent1">
-              <a:shade val="15000"/>
-            </a:schemeClr>
-          </a:lnRef>
-          <a:fillRef idx="1">
-            <a:schemeClr val="accent1"/>
-          </a:fillRef>
-          <a:effectRef idx="0">
-            <a:schemeClr val="accent1"/>
-          </a:effectRef>
-          <a:fontRef idx="minor">
-            <a:schemeClr val="lt1"/>
-          </a:fontRef>
-        </p:style>
-        <p:txBody>
-          <a:bodyPr rtlCol="0" anchor="ctr"/>
-          <a:lstStyle/>
-          <a:p>
-            <a:pPr algn="ctr"/>
-            <a:endParaRPr lang="en-US"/>
-          </a:p>
-        </p:txBody>
-      </p:sp>
-      <p:pic>
-        <p:nvPicPr>
-          <p:cNvPr id="4" name="Picture 3">
-            <a:extLst>
-              <a:ext uri="{FF2B5EF4-FFF2-40B4-BE49-F238E27FC236}">
-                <a16:creationId xmlns:a16="http://schemas.microsoft.com/office/drawing/2014/main" id="{FDAEED80-81BB-55C6-28DF-CCA8A999F17B}"/>
-              </a:ext>
-            </a:extLst>
-          </p:cNvPr>
-          <p:cNvPicPr>
-            <a:picLocks noChangeAspect="1"/>
-          </p:cNvPicPr>
-          <p:nvPr/>
-        </p:nvPicPr>
-        <p:blipFill>
-          <a:blip r:embed="rId4"/>
-          <a:stretch>
-            <a:fillRect/>
-          </a:stretch>
-        </p:blipFill>
-        <p:spPr>
-          <a:xfrm>
-            <a:off x="1080539" y="1738699"/>
-            <a:ext cx="3511730" cy="958899"/>
-          </a:xfrm>
-          <a:prstGeom prst="rect">
-            <a:avLst/>
-          </a:prstGeom>
-        </p:spPr>
-      </p:pic>
-      <p:pic>
-        <p:nvPicPr>
-          <p:cNvPr id="7" name="Picture 6">
-            <a:extLst>
-              <a:ext uri="{FF2B5EF4-FFF2-40B4-BE49-F238E27FC236}">
-                <a16:creationId xmlns:a16="http://schemas.microsoft.com/office/drawing/2014/main" id="{AEE37AD5-573A-1622-7CB2-7AF752D8C2CF}"/>
-              </a:ext>
-            </a:extLst>
-          </p:cNvPr>
-          <p:cNvPicPr>
-            <a:picLocks noChangeAspect="1"/>
-          </p:cNvPicPr>
-          <p:nvPr/>
-        </p:nvPicPr>
-        <p:blipFill>
-          <a:blip r:embed="rId5"/>
-          <a:stretch>
-            <a:fillRect/>
-          </a:stretch>
-        </p:blipFill>
-        <p:spPr>
-          <a:xfrm>
-            <a:off x="1080539" y="3274473"/>
-            <a:ext cx="3314870" cy="914447"/>
-          </a:xfrm>
-          <a:prstGeom prst="rect">
-            <a:avLst/>
-          </a:prstGeom>
-        </p:spPr>
-      </p:pic>
-      <p:pic>
-        <p:nvPicPr>
-          <p:cNvPr id="10" name="Picture 9">
-            <a:extLst>
-              <a:ext uri="{FF2B5EF4-FFF2-40B4-BE49-F238E27FC236}">
-                <a16:creationId xmlns:a16="http://schemas.microsoft.com/office/drawing/2014/main" id="{12B66F46-EE9D-B308-BA95-B0AD34505D57}"/>
-              </a:ext>
-            </a:extLst>
-          </p:cNvPr>
-          <p:cNvPicPr>
-            <a:picLocks noChangeAspect="1"/>
-          </p:cNvPicPr>
-          <p:nvPr/>
-        </p:nvPicPr>
-        <p:blipFill>
-          <a:blip r:embed="rId6"/>
-          <a:stretch>
-            <a:fillRect/>
-          </a:stretch>
-        </p:blipFill>
-        <p:spPr>
-          <a:xfrm>
-            <a:off x="7196846" y="1636836"/>
-            <a:ext cx="4156954" cy="4189723"/>
-          </a:xfrm>
-          <a:prstGeom prst="rect">
-            <a:avLst/>
-          </a:prstGeom>
-        </p:spPr>
-      </p:pic>
-    </p:spTree>
-    <p:extLst>
-      <p:ext uri="{BB962C8B-B14F-4D97-AF65-F5344CB8AC3E}">
-        <p14:creationId xmlns:p14="http://schemas.microsoft.com/office/powerpoint/2010/main" val="358663127"/>
       </p:ext>
     </p:extLst>
   </p:cSld>
@@ -20425,6 +21006,345 @@
 <file path=ppt/slides/slide20.xml><?xml version="1.0" encoding="utf-8"?>
 <p:sld xmlns:a="http://schemas.openxmlformats.org/drawingml/2006/main" xmlns:r="http://schemas.openxmlformats.org/officeDocument/2006/relationships" xmlns:p="http://schemas.openxmlformats.org/presentationml/2006/main">
   <p:cSld>
+    <p:spTree>
+      <p:nvGrpSpPr>
+        <p:cNvPr id="1" name="">
+          <a:extLst>
+            <a:ext uri="{FF2B5EF4-FFF2-40B4-BE49-F238E27FC236}">
+              <a16:creationId xmlns:a16="http://schemas.microsoft.com/office/drawing/2014/main" id="{5951B3A8-B991-7EC5-7413-2BF5C66D6092}"/>
+            </a:ext>
+          </a:extLst>
+        </p:cNvPr>
+        <p:cNvGrpSpPr/>
+        <p:nvPr/>
+      </p:nvGrpSpPr>
+      <p:grpSpPr>
+        <a:xfrm>
+          <a:off x="0" y="0"/>
+          <a:ext cx="0" cy="0"/>
+          <a:chOff x="0" y="0"/>
+          <a:chExt cx="0" cy="0"/>
+        </a:xfrm>
+      </p:grpSpPr>
+      <p:sp>
+        <p:nvSpPr>
+          <p:cNvPr id="2" name="Title 1">
+            <a:extLst>
+              <a:ext uri="{FF2B5EF4-FFF2-40B4-BE49-F238E27FC236}">
+                <a16:creationId xmlns:a16="http://schemas.microsoft.com/office/drawing/2014/main" id="{592467DE-4E42-4A83-7A86-6693D75AE821}"/>
+              </a:ext>
+            </a:extLst>
+          </p:cNvPr>
+          <p:cNvSpPr>
+            <a:spLocks noGrp="1"/>
+          </p:cNvSpPr>
+          <p:nvPr>
+            <p:ph type="title"/>
+          </p:nvPr>
+        </p:nvSpPr>
+        <p:spPr>
+          <a:xfrm>
+            <a:off x="838200" y="365125"/>
+            <a:ext cx="10515600" cy="1325563"/>
+          </a:xfrm>
+        </p:spPr>
+        <p:txBody>
+          <a:bodyPr>
+            <a:normAutofit/>
+          </a:bodyPr>
+          <a:lstStyle/>
+          <a:p>
+            <a:r>
+              <a:rPr lang="en-US" sz="5400" dirty="0"/>
+              <a:t>Change Sample – New primary key</a:t>
+            </a:r>
+          </a:p>
+        </p:txBody>
+      </p:sp>
+      <p:pic>
+        <p:nvPicPr>
+          <p:cNvPr id="1026" name="Picture 2">
+            <a:extLst>
+              <a:ext uri="{FF2B5EF4-FFF2-40B4-BE49-F238E27FC236}">
+                <a16:creationId xmlns:a16="http://schemas.microsoft.com/office/drawing/2014/main" id="{8308FDD4-0F58-342E-BA39-01AE9636CF36}"/>
+              </a:ext>
+            </a:extLst>
+          </p:cNvPr>
+          <p:cNvPicPr>
+            <a:picLocks noChangeAspect="1" noChangeArrowheads="1"/>
+          </p:cNvPicPr>
+          <p:nvPr/>
+        </p:nvPicPr>
+        <p:blipFill>
+          <a:blip r:embed="rId3">
+            <a:extLst>
+              <a:ext uri="{28A0092B-C50C-407E-A947-70E740481C1C}">
+                <a14:useLocalDpi xmlns:a14="http://schemas.microsoft.com/office/drawing/2010/main" val="0"/>
+              </a:ext>
+            </a:extLst>
+          </a:blip>
+          <a:srcRect/>
+          <a:stretch>
+            <a:fillRect/>
+          </a:stretch>
+        </p:blipFill>
+        <p:spPr bwMode="auto">
+          <a:xfrm>
+            <a:off x="63500" y="-7185025"/>
+            <a:ext cx="3686175" cy="1238250"/>
+          </a:xfrm>
+          <a:prstGeom prst="rect">
+            <a:avLst/>
+          </a:prstGeom>
+          <a:noFill/>
+          <a:extLst>
+            <a:ext uri="{909E8E84-426E-40DD-AFC4-6F175D3DCCD1}">
+              <a14:hiddenFill xmlns:a14="http://schemas.microsoft.com/office/drawing/2010/main">
+                <a:solidFill>
+                  <a:srgbClr val="FFFFFF"/>
+                </a:solidFill>
+              </a14:hiddenFill>
+            </a:ext>
+          </a:extLst>
+        </p:spPr>
+      </p:pic>
+      <p:sp>
+        <p:nvSpPr>
+          <p:cNvPr id="8" name="Arrow: Right 7">
+            <a:extLst>
+              <a:ext uri="{FF2B5EF4-FFF2-40B4-BE49-F238E27FC236}">
+                <a16:creationId xmlns:a16="http://schemas.microsoft.com/office/drawing/2014/main" id="{3C34B046-D784-495C-C228-BE9847C2C630}"/>
+              </a:ext>
+            </a:extLst>
+          </p:cNvPr>
+          <p:cNvSpPr/>
+          <p:nvPr/>
+        </p:nvSpPr>
+        <p:spPr>
+          <a:xfrm>
+            <a:off x="5191797" y="3489990"/>
+            <a:ext cx="840259" cy="259492"/>
+          </a:xfrm>
+          <a:prstGeom prst="rightArrow">
+            <a:avLst/>
+          </a:prstGeom>
+        </p:spPr>
+        <p:style>
+          <a:lnRef idx="2">
+            <a:schemeClr val="accent1">
+              <a:shade val="15000"/>
+            </a:schemeClr>
+          </a:lnRef>
+          <a:fillRef idx="1">
+            <a:schemeClr val="accent1"/>
+          </a:fillRef>
+          <a:effectRef idx="0">
+            <a:schemeClr val="accent1"/>
+          </a:effectRef>
+          <a:fontRef idx="minor">
+            <a:schemeClr val="lt1"/>
+          </a:fontRef>
+        </p:style>
+        <p:txBody>
+          <a:bodyPr rtlCol="0" anchor="ctr"/>
+          <a:lstStyle/>
+          <a:p>
+            <a:pPr algn="ctr"/>
+            <a:endParaRPr lang="en-US"/>
+          </a:p>
+        </p:txBody>
+      </p:sp>
+      <p:sp>
+        <p:nvSpPr>
+          <p:cNvPr id="17" name="TextBox 16">
+            <a:extLst>
+              <a:ext uri="{FF2B5EF4-FFF2-40B4-BE49-F238E27FC236}">
+                <a16:creationId xmlns:a16="http://schemas.microsoft.com/office/drawing/2014/main" id="{D354F90E-D376-FDD3-FABC-46062396C21B}"/>
+              </a:ext>
+            </a:extLst>
+          </p:cNvPr>
+          <p:cNvSpPr txBox="1"/>
+          <p:nvPr/>
+        </p:nvSpPr>
+        <p:spPr>
+          <a:xfrm>
+            <a:off x="790883" y="5251494"/>
+            <a:ext cx="6035061" cy="646331"/>
+          </a:xfrm>
+          <a:prstGeom prst="rect">
+            <a:avLst/>
+          </a:prstGeom>
+          <a:noFill/>
+        </p:spPr>
+        <p:txBody>
+          <a:bodyPr wrap="square" rtlCol="0">
+            <a:spAutoFit/>
+          </a:bodyPr>
+          <a:lstStyle/>
+          <a:p>
+            <a:pPr marL="342900" indent="-342900">
+              <a:buFont typeface="+mj-lt"/>
+              <a:buAutoNum type="arabicPeriod"/>
+            </a:pPr>
+            <a:r>
+              <a:rPr lang="en-US" dirty="0"/>
+              <a:t>Full table re-creation with a data copy within a transaction </a:t>
+            </a:r>
+          </a:p>
+        </p:txBody>
+      </p:sp>
+      <p:sp>
+        <p:nvSpPr>
+          <p:cNvPr id="18" name="Arrow: Down 17">
+            <a:extLst>
+              <a:ext uri="{FF2B5EF4-FFF2-40B4-BE49-F238E27FC236}">
+                <a16:creationId xmlns:a16="http://schemas.microsoft.com/office/drawing/2014/main" id="{BAA0C25A-3422-9ED4-B6BB-85FAB20A45A6}"/>
+              </a:ext>
+            </a:extLst>
+          </p:cNvPr>
+          <p:cNvSpPr/>
+          <p:nvPr/>
+        </p:nvSpPr>
+        <p:spPr>
+          <a:xfrm>
+            <a:off x="2836404" y="2878829"/>
+            <a:ext cx="208105" cy="236979"/>
+          </a:xfrm>
+          <a:prstGeom prst="downArrow">
+            <a:avLst/>
+          </a:prstGeom>
+        </p:spPr>
+        <p:style>
+          <a:lnRef idx="2">
+            <a:schemeClr val="accent1">
+              <a:shade val="15000"/>
+            </a:schemeClr>
+          </a:lnRef>
+          <a:fillRef idx="1">
+            <a:schemeClr val="accent1"/>
+          </a:fillRef>
+          <a:effectRef idx="0">
+            <a:schemeClr val="accent1"/>
+          </a:effectRef>
+          <a:fontRef idx="minor">
+            <a:schemeClr val="lt1"/>
+          </a:fontRef>
+        </p:style>
+        <p:txBody>
+          <a:bodyPr rtlCol="0" anchor="ctr"/>
+          <a:lstStyle/>
+          <a:p>
+            <a:pPr algn="ctr"/>
+            <a:endParaRPr lang="en-US"/>
+          </a:p>
+        </p:txBody>
+      </p:sp>
+      <p:pic>
+        <p:nvPicPr>
+          <p:cNvPr id="4" name="Picture 3">
+            <a:extLst>
+              <a:ext uri="{FF2B5EF4-FFF2-40B4-BE49-F238E27FC236}">
+                <a16:creationId xmlns:a16="http://schemas.microsoft.com/office/drawing/2014/main" id="{FDAEED80-81BB-55C6-28DF-CCA8A999F17B}"/>
+              </a:ext>
+            </a:extLst>
+          </p:cNvPr>
+          <p:cNvPicPr>
+            <a:picLocks noChangeAspect="1"/>
+          </p:cNvPicPr>
+          <p:nvPr/>
+        </p:nvPicPr>
+        <p:blipFill>
+          <a:blip r:embed="rId4"/>
+          <a:stretch>
+            <a:fillRect/>
+          </a:stretch>
+        </p:blipFill>
+        <p:spPr>
+          <a:xfrm>
+            <a:off x="1080539" y="1738699"/>
+            <a:ext cx="3511730" cy="958899"/>
+          </a:xfrm>
+          <a:prstGeom prst="rect">
+            <a:avLst/>
+          </a:prstGeom>
+        </p:spPr>
+      </p:pic>
+      <p:pic>
+        <p:nvPicPr>
+          <p:cNvPr id="7" name="Picture 6">
+            <a:extLst>
+              <a:ext uri="{FF2B5EF4-FFF2-40B4-BE49-F238E27FC236}">
+                <a16:creationId xmlns:a16="http://schemas.microsoft.com/office/drawing/2014/main" id="{AEE37AD5-573A-1622-7CB2-7AF752D8C2CF}"/>
+              </a:ext>
+            </a:extLst>
+          </p:cNvPr>
+          <p:cNvPicPr>
+            <a:picLocks noChangeAspect="1"/>
+          </p:cNvPicPr>
+          <p:nvPr/>
+        </p:nvPicPr>
+        <p:blipFill>
+          <a:blip r:embed="rId5"/>
+          <a:stretch>
+            <a:fillRect/>
+          </a:stretch>
+        </p:blipFill>
+        <p:spPr>
+          <a:xfrm>
+            <a:off x="1080539" y="3274473"/>
+            <a:ext cx="3314870" cy="914447"/>
+          </a:xfrm>
+          <a:prstGeom prst="rect">
+            <a:avLst/>
+          </a:prstGeom>
+        </p:spPr>
+      </p:pic>
+      <p:pic>
+        <p:nvPicPr>
+          <p:cNvPr id="10" name="Picture 9">
+            <a:extLst>
+              <a:ext uri="{FF2B5EF4-FFF2-40B4-BE49-F238E27FC236}">
+                <a16:creationId xmlns:a16="http://schemas.microsoft.com/office/drawing/2014/main" id="{12B66F46-EE9D-B308-BA95-B0AD34505D57}"/>
+              </a:ext>
+            </a:extLst>
+          </p:cNvPr>
+          <p:cNvPicPr>
+            <a:picLocks noChangeAspect="1"/>
+          </p:cNvPicPr>
+          <p:nvPr/>
+        </p:nvPicPr>
+        <p:blipFill>
+          <a:blip r:embed="rId6"/>
+          <a:stretch>
+            <a:fillRect/>
+          </a:stretch>
+        </p:blipFill>
+        <p:spPr>
+          <a:xfrm>
+            <a:off x="7196846" y="1636836"/>
+            <a:ext cx="4156954" cy="4189723"/>
+          </a:xfrm>
+          <a:prstGeom prst="rect">
+            <a:avLst/>
+          </a:prstGeom>
+        </p:spPr>
+      </p:pic>
+    </p:spTree>
+    <p:extLst>
+      <p:ext uri="{BB962C8B-B14F-4D97-AF65-F5344CB8AC3E}">
+        <p14:creationId xmlns:p14="http://schemas.microsoft.com/office/powerpoint/2010/main" val="358663127"/>
+      </p:ext>
+    </p:extLst>
+  </p:cSld>
+  <p:clrMapOvr>
+    <a:masterClrMapping/>
+  </p:clrMapOvr>
+</p:sld>
+</file>
+
+<file path=ppt/slides/slide21.xml><?xml version="1.0" encoding="utf-8"?>
+<p:sld xmlns:a="http://schemas.openxmlformats.org/drawingml/2006/main" xmlns:r="http://schemas.openxmlformats.org/officeDocument/2006/relationships" xmlns:p="http://schemas.openxmlformats.org/presentationml/2006/main">
+  <p:cSld>
     <p:bg>
       <p:bgPr>
         <a:solidFill>
@@ -20829,7 +21749,7 @@
 </p:sld>
 </file>
 
-<file path=ppt/slides/slide21.xml><?xml version="1.0" encoding="utf-8"?>
+<file path=ppt/slides/slide22.xml><?xml version="1.0" encoding="utf-8"?>
 <p:sld xmlns:a="http://schemas.openxmlformats.org/drawingml/2006/main" xmlns:r="http://schemas.openxmlformats.org/officeDocument/2006/relationships" xmlns:p="http://schemas.openxmlformats.org/presentationml/2006/main">
   <p:cSld>
     <p:bg>
@@ -21910,7 +22830,7 @@
 </p:sld>
 </file>
 
-<file path=ppt/slides/slide22.xml><?xml version="1.0" encoding="utf-8"?>
+<file path=ppt/slides/slide23.xml><?xml version="1.0" encoding="utf-8"?>
 <p:sld xmlns:a="http://schemas.openxmlformats.org/drawingml/2006/main" xmlns:r="http://schemas.openxmlformats.org/officeDocument/2006/relationships" xmlns:p="http://schemas.openxmlformats.org/presentationml/2006/main">
   <p:cSld>
     <p:bg>
@@ -23056,7 +23976,7 @@
 </p:sld>
 </file>
 
-<file path=ppt/slides/slide23.xml><?xml version="1.0" encoding="utf-8"?>
+<file path=ppt/slides/slide24.xml><?xml version="1.0" encoding="utf-8"?>
 <p:sld xmlns:a="http://schemas.openxmlformats.org/drawingml/2006/main" xmlns:r="http://schemas.openxmlformats.org/officeDocument/2006/relationships" xmlns:p="http://schemas.openxmlformats.org/presentationml/2006/main">
   <p:cSld>
     <p:spTree>
@@ -23144,7 +24064,7 @@
 </p:sld>
 </file>
 
-<file path=ppt/slides/slide24.xml><?xml version="1.0" encoding="utf-8"?>
+<file path=ppt/slides/slide25.xml><?xml version="1.0" encoding="utf-8"?>
 <p:sld xmlns:a="http://schemas.openxmlformats.org/drawingml/2006/main" xmlns:r="http://schemas.openxmlformats.org/officeDocument/2006/relationships" xmlns:p="http://schemas.openxmlformats.org/presentationml/2006/main">
   <p:cSld>
     <p:bg>
@@ -24317,7 +25237,7 @@
 </p:sld>
 </file>
 
-<file path=ppt/slides/slide25.xml><?xml version="1.0" encoding="utf-8"?>
+<file path=ppt/slides/slide26.xml><?xml version="1.0" encoding="utf-8"?>
 <p:sld xmlns:a="http://schemas.openxmlformats.org/drawingml/2006/main" xmlns:r="http://schemas.openxmlformats.org/officeDocument/2006/relationships" xmlns:p="http://schemas.openxmlformats.org/presentationml/2006/main">
   <p:cSld>
     <p:bg>
@@ -24864,7 +25784,7 @@
 </p:sld>
 </file>
 
-<file path=ppt/slides/slide26.xml><?xml version="1.0" encoding="utf-8"?>
+<file path=ppt/slides/slide27.xml><?xml version="1.0" encoding="utf-8"?>
 <p:sld xmlns:a="http://schemas.openxmlformats.org/drawingml/2006/main" xmlns:r="http://schemas.openxmlformats.org/officeDocument/2006/relationships" xmlns:p="http://schemas.openxmlformats.org/presentationml/2006/main">
   <p:cSld>
     <p:bg>
@@ -25709,7 +26629,7 @@
 </p:sld>
 </file>
 
-<file path=ppt/slides/slide27.xml><?xml version="1.0" encoding="utf-8"?>
+<file path=ppt/slides/slide28.xml><?xml version="1.0" encoding="utf-8"?>
 <p:sld xmlns:a="http://schemas.openxmlformats.org/drawingml/2006/main" xmlns:r="http://schemas.openxmlformats.org/officeDocument/2006/relationships" xmlns:p="http://schemas.openxmlformats.org/presentationml/2006/main">
   <p:cSld>
     <p:spTree>
@@ -25829,7 +26749,7 @@
 </p:sld>
 </file>
 
-<file path=ppt/slides/slide28.xml><?xml version="1.0" encoding="utf-8"?>
+<file path=ppt/slides/slide29.xml><?xml version="1.0" encoding="utf-8"?>
 <p:sld xmlns:a="http://schemas.openxmlformats.org/drawingml/2006/main" xmlns:r="http://schemas.openxmlformats.org/officeDocument/2006/relationships" xmlns:p="http://schemas.openxmlformats.org/presentationml/2006/main">
   <p:cSld>
     <p:bg>
@@ -26563,182 +27483,6 @@
     <p:extLst>
       <p:ext uri="{BB962C8B-B14F-4D97-AF65-F5344CB8AC3E}">
         <p14:creationId xmlns:p14="http://schemas.microsoft.com/office/powerpoint/2010/main" val="3822062440"/>
-      </p:ext>
-    </p:extLst>
-  </p:cSld>
-  <p:clrMapOvr>
-    <a:masterClrMapping/>
-  </p:clrMapOvr>
-</p:sld>
-</file>
-
-<file path=ppt/slides/slide29.xml><?xml version="1.0" encoding="utf-8"?>
-<p:sld xmlns:a="http://schemas.openxmlformats.org/drawingml/2006/main" xmlns:r="http://schemas.openxmlformats.org/officeDocument/2006/relationships" xmlns:p="http://schemas.openxmlformats.org/presentationml/2006/main">
-  <p:cSld>
-    <p:spTree>
-      <p:nvGrpSpPr>
-        <p:cNvPr id="1" name="">
-          <a:extLst>
-            <a:ext uri="{FF2B5EF4-FFF2-40B4-BE49-F238E27FC236}">
-              <a16:creationId xmlns:a16="http://schemas.microsoft.com/office/drawing/2014/main" id="{93D22FE9-DBFD-41B7-3F83-B34A6314E566}"/>
-            </a:ext>
-          </a:extLst>
-        </p:cNvPr>
-        <p:cNvGrpSpPr/>
-        <p:nvPr/>
-      </p:nvGrpSpPr>
-      <p:grpSpPr>
-        <a:xfrm>
-          <a:off x="0" y="0"/>
-          <a:ext cx="0" cy="0"/>
-          <a:chOff x="0" y="0"/>
-          <a:chExt cx="0" cy="0"/>
-        </a:xfrm>
-      </p:grpSpPr>
-      <p:sp>
-        <p:nvSpPr>
-          <p:cNvPr id="2" name="Title 1">
-            <a:extLst>
-              <a:ext uri="{FF2B5EF4-FFF2-40B4-BE49-F238E27FC236}">
-                <a16:creationId xmlns:a16="http://schemas.microsoft.com/office/drawing/2014/main" id="{1EB26454-B13E-DA78-41B0-2D3D6374D17A}"/>
-              </a:ext>
-            </a:extLst>
-          </p:cNvPr>
-          <p:cNvSpPr>
-            <a:spLocks noGrp="1"/>
-          </p:cNvSpPr>
-          <p:nvPr>
-            <p:ph type="title"/>
-          </p:nvPr>
-        </p:nvSpPr>
-        <p:spPr>
-          <a:xfrm>
-            <a:off x="841248" y="548640"/>
-            <a:ext cx="3600860" cy="5431536"/>
-          </a:xfrm>
-        </p:spPr>
-        <p:txBody>
-          <a:bodyPr>
-            <a:normAutofit/>
-          </a:bodyPr>
-          <a:lstStyle/>
-          <a:p>
-            <a:r>
-              <a:rPr lang="en-US" sz="5400"/>
-              <a:t>Additional Resources</a:t>
-            </a:r>
-          </a:p>
-        </p:txBody>
-      </p:sp>
-      <p:sp>
-        <p:nvSpPr>
-          <p:cNvPr id="3" name="Content Placeholder 2">
-            <a:extLst>
-              <a:ext uri="{FF2B5EF4-FFF2-40B4-BE49-F238E27FC236}">
-                <a16:creationId xmlns:a16="http://schemas.microsoft.com/office/drawing/2014/main" id="{6FB8ADDA-F911-B32E-1FE9-3E8F8478173F}"/>
-              </a:ext>
-            </a:extLst>
-          </p:cNvPr>
-          <p:cNvSpPr>
-            <a:spLocks noGrp="1"/>
-          </p:cNvSpPr>
-          <p:nvPr>
-            <p:ph idx="1"/>
-          </p:nvPr>
-        </p:nvSpPr>
-        <p:spPr>
-          <a:xfrm>
-            <a:off x="5126418" y="552091"/>
-            <a:ext cx="6224335" cy="5431536"/>
-          </a:xfrm>
-        </p:spPr>
-        <p:txBody>
-          <a:bodyPr anchor="ctr">
-            <a:normAutofit/>
-          </a:bodyPr>
-          <a:lstStyle/>
-          <a:p>
-            <a:pPr marL="0" marR="0">
-              <a:buNone/>
-            </a:pPr>
-            <a:r>
-              <a:rPr lang="en-US" sz="1700" b="1" dirty="0">
-                <a:effectLst/>
-                <a:latin typeface="Calibri" panose="020F0502020204030204" pitchFamily="34" charset="0"/>
-              </a:rPr>
-              <a:t>Resources</a:t>
-            </a:r>
-          </a:p>
-          <a:p>
-            <a:pPr fontAlgn="ctr"/>
-            <a:r>
-              <a:rPr lang="en-US" dirty="0">
-                <a:hlinkClick r:id="rId3"/>
-              </a:rPr>
-              <a:t>sql-projects-devops-samples/Demos/2-ContinuousIntegration.md at main · Azure-Samples/</a:t>
-            </a:r>
-            <a:r>
-              <a:rPr lang="en-US" dirty="0" err="1">
-                <a:hlinkClick r:id="rId3"/>
-              </a:rPr>
-              <a:t>sql</a:t>
-            </a:r>
-            <a:r>
-              <a:rPr lang="en-US" dirty="0">
-                <a:hlinkClick r:id="rId3"/>
-              </a:rPr>
-              <a:t>-projects-</a:t>
-            </a:r>
-            <a:r>
-              <a:rPr lang="en-US" dirty="0" err="1">
-                <a:hlinkClick r:id="rId3"/>
-              </a:rPr>
-              <a:t>devops</a:t>
-            </a:r>
-            <a:r>
-              <a:rPr lang="en-US" dirty="0">
-                <a:hlinkClick r:id="rId3"/>
-              </a:rPr>
-              <a:t>-samples · GitHub</a:t>
-            </a:r>
-            <a:r>
-              <a:rPr lang="en-US" dirty="0"/>
-              <a:t> (CI/CD with containers)</a:t>
-            </a:r>
-          </a:p>
-          <a:p>
-            <a:pPr fontAlgn="ctr"/>
-            <a:r>
-              <a:rPr lang="en-US" dirty="0" err="1"/>
-              <a:t>.net</a:t>
-            </a:r>
-            <a:r>
-              <a:rPr lang="en-US" dirty="0"/>
-              <a:t> conf 2024 talk: </a:t>
-            </a:r>
-            <a:r>
-              <a:rPr lang="en-US" dirty="0">
-                <a:hlinkClick r:id="rId4"/>
-              </a:rPr>
-              <a:t>Next-gen SQL projects with </a:t>
-            </a:r>
-            <a:r>
-              <a:rPr lang="en-US" dirty="0" err="1">
-                <a:hlinkClick r:id="rId4"/>
-              </a:rPr>
-              <a:t>Microsoft.Build.Sql</a:t>
-            </a:r>
-            <a:endParaRPr lang="en-US" dirty="0"/>
-          </a:p>
-          <a:p>
-            <a:endParaRPr lang="en-US" sz="1700" dirty="0"/>
-          </a:p>
-        </p:txBody>
-      </p:sp>
-    </p:spTree>
-    <p:extLst>
-      <p:ext uri="{BB962C8B-B14F-4D97-AF65-F5344CB8AC3E}">
-        <p14:creationId xmlns:p14="http://schemas.microsoft.com/office/powerpoint/2010/main" val="2762649843"/>
       </p:ext>
     </p:extLst>
   </p:cSld>
@@ -27603,6 +28347,182 @@
 <file path=ppt/slides/slide30.xml><?xml version="1.0" encoding="utf-8"?>
 <p:sld xmlns:a="http://schemas.openxmlformats.org/drawingml/2006/main" xmlns:r="http://schemas.openxmlformats.org/officeDocument/2006/relationships" xmlns:p="http://schemas.openxmlformats.org/presentationml/2006/main">
   <p:cSld>
+    <p:spTree>
+      <p:nvGrpSpPr>
+        <p:cNvPr id="1" name="">
+          <a:extLst>
+            <a:ext uri="{FF2B5EF4-FFF2-40B4-BE49-F238E27FC236}">
+              <a16:creationId xmlns:a16="http://schemas.microsoft.com/office/drawing/2014/main" id="{93D22FE9-DBFD-41B7-3F83-B34A6314E566}"/>
+            </a:ext>
+          </a:extLst>
+        </p:cNvPr>
+        <p:cNvGrpSpPr/>
+        <p:nvPr/>
+      </p:nvGrpSpPr>
+      <p:grpSpPr>
+        <a:xfrm>
+          <a:off x="0" y="0"/>
+          <a:ext cx="0" cy="0"/>
+          <a:chOff x="0" y="0"/>
+          <a:chExt cx="0" cy="0"/>
+        </a:xfrm>
+      </p:grpSpPr>
+      <p:sp>
+        <p:nvSpPr>
+          <p:cNvPr id="2" name="Title 1">
+            <a:extLst>
+              <a:ext uri="{FF2B5EF4-FFF2-40B4-BE49-F238E27FC236}">
+                <a16:creationId xmlns:a16="http://schemas.microsoft.com/office/drawing/2014/main" id="{1EB26454-B13E-DA78-41B0-2D3D6374D17A}"/>
+              </a:ext>
+            </a:extLst>
+          </p:cNvPr>
+          <p:cNvSpPr>
+            <a:spLocks noGrp="1"/>
+          </p:cNvSpPr>
+          <p:nvPr>
+            <p:ph type="title"/>
+          </p:nvPr>
+        </p:nvSpPr>
+        <p:spPr>
+          <a:xfrm>
+            <a:off x="841248" y="548640"/>
+            <a:ext cx="3600860" cy="5431536"/>
+          </a:xfrm>
+        </p:spPr>
+        <p:txBody>
+          <a:bodyPr>
+            <a:normAutofit/>
+          </a:bodyPr>
+          <a:lstStyle/>
+          <a:p>
+            <a:r>
+              <a:rPr lang="en-US" sz="5400"/>
+              <a:t>Additional Resources</a:t>
+            </a:r>
+          </a:p>
+        </p:txBody>
+      </p:sp>
+      <p:sp>
+        <p:nvSpPr>
+          <p:cNvPr id="3" name="Content Placeholder 2">
+            <a:extLst>
+              <a:ext uri="{FF2B5EF4-FFF2-40B4-BE49-F238E27FC236}">
+                <a16:creationId xmlns:a16="http://schemas.microsoft.com/office/drawing/2014/main" id="{6FB8ADDA-F911-B32E-1FE9-3E8F8478173F}"/>
+              </a:ext>
+            </a:extLst>
+          </p:cNvPr>
+          <p:cNvSpPr>
+            <a:spLocks noGrp="1"/>
+          </p:cNvSpPr>
+          <p:nvPr>
+            <p:ph idx="1"/>
+          </p:nvPr>
+        </p:nvSpPr>
+        <p:spPr>
+          <a:xfrm>
+            <a:off x="5126418" y="552091"/>
+            <a:ext cx="6224335" cy="5431536"/>
+          </a:xfrm>
+        </p:spPr>
+        <p:txBody>
+          <a:bodyPr anchor="ctr">
+            <a:normAutofit/>
+          </a:bodyPr>
+          <a:lstStyle/>
+          <a:p>
+            <a:pPr marL="0" marR="0">
+              <a:buNone/>
+            </a:pPr>
+            <a:r>
+              <a:rPr lang="en-US" sz="1700" b="1" dirty="0">
+                <a:effectLst/>
+                <a:latin typeface="Calibri" panose="020F0502020204030204" pitchFamily="34" charset="0"/>
+              </a:rPr>
+              <a:t>Resources</a:t>
+            </a:r>
+          </a:p>
+          <a:p>
+            <a:pPr fontAlgn="ctr"/>
+            <a:r>
+              <a:rPr lang="en-US" dirty="0">
+                <a:hlinkClick r:id="rId3"/>
+              </a:rPr>
+              <a:t>sql-projects-devops-samples/Demos/2-ContinuousIntegration.md at main · Azure-Samples/</a:t>
+            </a:r>
+            <a:r>
+              <a:rPr lang="en-US" dirty="0" err="1">
+                <a:hlinkClick r:id="rId3"/>
+              </a:rPr>
+              <a:t>sql</a:t>
+            </a:r>
+            <a:r>
+              <a:rPr lang="en-US" dirty="0">
+                <a:hlinkClick r:id="rId3"/>
+              </a:rPr>
+              <a:t>-projects-</a:t>
+            </a:r>
+            <a:r>
+              <a:rPr lang="en-US" dirty="0" err="1">
+                <a:hlinkClick r:id="rId3"/>
+              </a:rPr>
+              <a:t>devops</a:t>
+            </a:r>
+            <a:r>
+              <a:rPr lang="en-US" dirty="0">
+                <a:hlinkClick r:id="rId3"/>
+              </a:rPr>
+              <a:t>-samples · GitHub</a:t>
+            </a:r>
+            <a:r>
+              <a:rPr lang="en-US" dirty="0"/>
+              <a:t> (CI/CD with containers)</a:t>
+            </a:r>
+          </a:p>
+          <a:p>
+            <a:pPr fontAlgn="ctr"/>
+            <a:r>
+              <a:rPr lang="en-US" dirty="0" err="1"/>
+              <a:t>.net</a:t>
+            </a:r>
+            <a:r>
+              <a:rPr lang="en-US" dirty="0"/>
+              <a:t> conf 2024 talk: </a:t>
+            </a:r>
+            <a:r>
+              <a:rPr lang="en-US" dirty="0">
+                <a:hlinkClick r:id="rId4"/>
+              </a:rPr>
+              <a:t>Next-gen SQL projects with </a:t>
+            </a:r>
+            <a:r>
+              <a:rPr lang="en-US" dirty="0" err="1">
+                <a:hlinkClick r:id="rId4"/>
+              </a:rPr>
+              <a:t>Microsoft.Build.Sql</a:t>
+            </a:r>
+            <a:endParaRPr lang="en-US" dirty="0"/>
+          </a:p>
+          <a:p>
+            <a:endParaRPr lang="en-US" sz="1700" dirty="0"/>
+          </a:p>
+        </p:txBody>
+      </p:sp>
+    </p:spTree>
+    <p:extLst>
+      <p:ext uri="{BB962C8B-B14F-4D97-AF65-F5344CB8AC3E}">
+        <p14:creationId xmlns:p14="http://schemas.microsoft.com/office/powerpoint/2010/main" val="2762649843"/>
+      </p:ext>
+    </p:extLst>
+  </p:cSld>
+  <p:clrMapOvr>
+    <a:masterClrMapping/>
+  </p:clrMapOvr>
+</p:sld>
+</file>
+
+<file path=ppt/slides/slide31.xml><?xml version="1.0" encoding="utf-8"?>
+<p:sld xmlns:a="http://schemas.openxmlformats.org/drawingml/2006/main" xmlns:r="http://schemas.openxmlformats.org/officeDocument/2006/relationships" xmlns:p="http://schemas.openxmlformats.org/presentationml/2006/main">
+  <p:cSld>
     <p:bg>
       <p:bgPr>
         <a:solidFill>
@@ -28142,7 +29062,7 @@
 </p:sld>
 </file>
 
-<file path=ppt/slides/slide31.xml><?xml version="1.0" encoding="utf-8"?>
+<file path=ppt/slides/slide32.xml><?xml version="1.0" encoding="utf-8"?>
 <p:sld xmlns:a="http://schemas.openxmlformats.org/drawingml/2006/main" xmlns:r="http://schemas.openxmlformats.org/officeDocument/2006/relationships" xmlns:p="http://schemas.openxmlformats.org/presentationml/2006/main">
   <p:cSld>
     <p:bg>
@@ -28960,7 +29880,7 @@
 </p:sld>
 </file>
 
-<file path=ppt/slides/slide32.xml><?xml version="1.0" encoding="utf-8"?>
+<file path=ppt/slides/slide33.xml><?xml version="1.0" encoding="utf-8"?>
 <p:sld xmlns:a="http://schemas.openxmlformats.org/drawingml/2006/main" xmlns:r="http://schemas.openxmlformats.org/officeDocument/2006/relationships" xmlns:p="http://schemas.openxmlformats.org/presentationml/2006/main">
   <p:cSld>
     <p:spTree>

--- a/slides/VS sql project - sql saturday 2025.pptx
+++ b/slides/VS sql project - sql saturday 2025.pptx
@@ -5,7 +5,7 @@
     <p:sldMasterId id="2147483648" r:id="rId1"/>
   </p:sldMasterIdLst>
   <p:notesMasterIdLst>
-    <p:notesMasterId r:id="rId35"/>
+    <p:notesMasterId r:id="rId36"/>
   </p:notesMasterIdLst>
   <p:sldIdLst>
     <p:sldId id="256" r:id="rId2"/>
@@ -19,28 +19,29 @@
     <p:sldId id="295" r:id="rId10"/>
     <p:sldId id="296" r:id="rId11"/>
     <p:sldId id="277" r:id="rId12"/>
-    <p:sldId id="288" r:id="rId13"/>
-    <p:sldId id="264" r:id="rId14"/>
-    <p:sldId id="275" r:id="rId15"/>
-    <p:sldId id="281" r:id="rId16"/>
-    <p:sldId id="283" r:id="rId17"/>
-    <p:sldId id="282" r:id="rId18"/>
-    <p:sldId id="284" r:id="rId19"/>
-    <p:sldId id="286" r:id="rId20"/>
-    <p:sldId id="285" r:id="rId21"/>
-    <p:sldId id="291" r:id="rId22"/>
-    <p:sldId id="290" r:id="rId23"/>
-    <p:sldId id="274" r:id="rId24"/>
-    <p:sldId id="287" r:id="rId25"/>
-    <p:sldId id="289" r:id="rId26"/>
-    <p:sldId id="265" r:id="rId27"/>
-    <p:sldId id="272" r:id="rId28"/>
-    <p:sldId id="292" r:id="rId29"/>
-    <p:sldId id="271" r:id="rId30"/>
-    <p:sldId id="276" r:id="rId31"/>
-    <p:sldId id="270" r:id="rId32"/>
-    <p:sldId id="266" r:id="rId33"/>
-    <p:sldId id="294" r:id="rId34"/>
+    <p:sldId id="297" r:id="rId13"/>
+    <p:sldId id="288" r:id="rId14"/>
+    <p:sldId id="264" r:id="rId15"/>
+    <p:sldId id="275" r:id="rId16"/>
+    <p:sldId id="281" r:id="rId17"/>
+    <p:sldId id="283" r:id="rId18"/>
+    <p:sldId id="282" r:id="rId19"/>
+    <p:sldId id="284" r:id="rId20"/>
+    <p:sldId id="286" r:id="rId21"/>
+    <p:sldId id="285" r:id="rId22"/>
+    <p:sldId id="291" r:id="rId23"/>
+    <p:sldId id="290" r:id="rId24"/>
+    <p:sldId id="274" r:id="rId25"/>
+    <p:sldId id="287" r:id="rId26"/>
+    <p:sldId id="289" r:id="rId27"/>
+    <p:sldId id="265" r:id="rId28"/>
+    <p:sldId id="272" r:id="rId29"/>
+    <p:sldId id="292" r:id="rId30"/>
+    <p:sldId id="271" r:id="rId31"/>
+    <p:sldId id="276" r:id="rId32"/>
+    <p:sldId id="270" r:id="rId33"/>
+    <p:sldId id="266" r:id="rId34"/>
+    <p:sldId id="294" r:id="rId35"/>
   </p:sldIdLst>
   <p:sldSz cx="12192000" cy="6858000"/>
   <p:notesSz cx="7102475" cy="9388475"/>
@@ -3958,7 +3959,7 @@
           <a:p>
             <a:fld id="{B80220B6-429B-4346-82FA-969B751203E9}" type="datetimeFigureOut">
               <a:rPr lang="en-US" smtClean="0"/>
-              <a:t>4/25/2026</a:t>
+              <a:t>4/27/2026</a:t>
             </a:fld>
             <a:endParaRPr lang="en-US"/>
           </a:p>
@@ -5649,7 +5650,7 @@
           <a:p>
             <a:fld id="{CDDD3684-6E52-4019-8D61-A9B0BAC0DBD6}" type="slidenum">
               <a:rPr lang="en-US" smtClean="0"/>
-              <a:t>13</a:t>
+              <a:t>14</a:t>
             </a:fld>
             <a:endParaRPr lang="en-US"/>
           </a:p>
@@ -5733,7 +5734,7 @@
           <a:p>
             <a:fld id="{CDDD3684-6E52-4019-8D61-A9B0BAC0DBD6}" type="slidenum">
               <a:rPr lang="en-US" smtClean="0"/>
-              <a:t>14</a:t>
+              <a:t>15</a:t>
             </a:fld>
             <a:endParaRPr lang="en-US"/>
           </a:p>
@@ -5841,7 +5842,7 @@
           <a:p>
             <a:fld id="{CDDD3684-6E52-4019-8D61-A9B0BAC0DBD6}" type="slidenum">
               <a:rPr lang="en-US" smtClean="0"/>
-              <a:t>15</a:t>
+              <a:t>16</a:t>
             </a:fld>
             <a:endParaRPr lang="en-US"/>
           </a:p>
@@ -5949,7 +5950,7 @@
           <a:p>
             <a:fld id="{CDDD3684-6E52-4019-8D61-A9B0BAC0DBD6}" type="slidenum">
               <a:rPr lang="en-US" smtClean="0"/>
-              <a:t>16</a:t>
+              <a:t>17</a:t>
             </a:fld>
             <a:endParaRPr lang="en-US"/>
           </a:p>
@@ -6057,7 +6058,7 @@
           <a:p>
             <a:fld id="{CDDD3684-6E52-4019-8D61-A9B0BAC0DBD6}" type="slidenum">
               <a:rPr lang="en-US" smtClean="0"/>
-              <a:t>17</a:t>
+              <a:t>18</a:t>
             </a:fld>
             <a:endParaRPr lang="en-US"/>
           </a:p>
@@ -6165,7 +6166,7 @@
           <a:p>
             <a:fld id="{CDDD3684-6E52-4019-8D61-A9B0BAC0DBD6}" type="slidenum">
               <a:rPr lang="en-US" smtClean="0"/>
-              <a:t>18</a:t>
+              <a:t>19</a:t>
             </a:fld>
             <a:endParaRPr lang="en-US"/>
           </a:p>
@@ -6273,7 +6274,7 @@
           <a:p>
             <a:fld id="{CDDD3684-6E52-4019-8D61-A9B0BAC0DBD6}" type="slidenum">
               <a:rPr lang="en-US" smtClean="0"/>
-              <a:t>19</a:t>
+              <a:t>20</a:t>
             </a:fld>
             <a:endParaRPr lang="en-US"/>
           </a:p>
@@ -6381,7 +6382,7 @@
           <a:p>
             <a:fld id="{CDDD3684-6E52-4019-8D61-A9B0BAC0DBD6}" type="slidenum">
               <a:rPr lang="en-US" smtClean="0"/>
-              <a:t>20</a:t>
+              <a:t>21</a:t>
             </a:fld>
             <a:endParaRPr lang="en-US"/>
           </a:p>
@@ -6570,7 +6571,7 @@
           <a:p>
             <a:fld id="{CDDD3684-6E52-4019-8D61-A9B0BAC0DBD6}" type="slidenum">
               <a:rPr lang="en-US" smtClean="0"/>
-              <a:t>23</a:t>
+              <a:t>24</a:t>
             </a:fld>
             <a:endParaRPr lang="en-US"/>
           </a:p>
@@ -6868,7 +6869,7 @@
           <a:p>
             <a:fld id="{CDDD3684-6E52-4019-8D61-A9B0BAC0DBD6}" type="slidenum">
               <a:rPr lang="en-US" smtClean="0"/>
-              <a:t>26</a:t>
+              <a:t>27</a:t>
             </a:fld>
             <a:endParaRPr lang="en-US"/>
           </a:p>
@@ -6952,7 +6953,7 @@
           <a:p>
             <a:fld id="{CDDD3684-6E52-4019-8D61-A9B0BAC0DBD6}" type="slidenum">
               <a:rPr lang="en-US" smtClean="0"/>
-              <a:t>27</a:t>
+              <a:t>28</a:t>
             </a:fld>
             <a:endParaRPr lang="en-US"/>
           </a:p>
@@ -7036,7 +7037,7 @@
           <a:p>
             <a:fld id="{CDDD3684-6E52-4019-8D61-A9B0BAC0DBD6}" type="slidenum">
               <a:rPr lang="en-US" smtClean="0"/>
-              <a:t>29</a:t>
+              <a:t>30</a:t>
             </a:fld>
             <a:endParaRPr lang="en-US"/>
           </a:p>
@@ -7144,7 +7145,7 @@
           <a:p>
             <a:fld id="{CDDD3684-6E52-4019-8D61-A9B0BAC0DBD6}" type="slidenum">
               <a:rPr lang="en-US" smtClean="0"/>
-              <a:t>30</a:t>
+              <a:t>31</a:t>
             </a:fld>
             <a:endParaRPr lang="en-US"/>
           </a:p>
@@ -7228,7 +7229,7 @@
           <a:p>
             <a:fld id="{CDDD3684-6E52-4019-8D61-A9B0BAC0DBD6}" type="slidenum">
               <a:rPr lang="en-US" smtClean="0"/>
-              <a:t>31</a:t>
+              <a:t>32</a:t>
             </a:fld>
             <a:endParaRPr lang="en-US"/>
           </a:p>
@@ -7312,7 +7313,7 @@
           <a:p>
             <a:fld id="{CDDD3684-6E52-4019-8D61-A9B0BAC0DBD6}" type="slidenum">
               <a:rPr lang="en-US" smtClean="0"/>
-              <a:t>32</a:t>
+              <a:t>33</a:t>
             </a:fld>
             <a:endParaRPr lang="en-US"/>
           </a:p>
@@ -7525,7 +7526,7 @@
           <a:p>
             <a:fld id="{CDDD3684-6E52-4019-8D61-A9B0BAC0DBD6}" type="slidenum">
               <a:rPr lang="en-US" smtClean="0"/>
-              <a:t>33</a:t>
+              <a:t>34</a:t>
             </a:fld>
             <a:endParaRPr lang="en-US"/>
           </a:p>
@@ -7971,15 +7972,7 @@
           <a:p>
             <a:r>
               <a:rPr lang="en-US" dirty="0"/>
-              <a:t>One day David comes to the team with a new project from the Business Unit: The business unit runs a weekly podcast where they interview Pizza Chefs from all over the world. The business unit needs an application to keep track of the publishing of the episodes in the podcast and any other information related to running the </a:t>
-            </a:r>
-            <a:r>
-              <a:rPr lang="en-US" dirty="0" err="1"/>
-              <a:t>odcasts</a:t>
-            </a:r>
-            <a:r>
-              <a:rPr lang="en-US" dirty="0"/>
-              <a:t>, such as payments made to guests and requests from Chefs to appear in the podcast.</a:t>
+              <a:t>One day David comes to the team with a new project from the Business Unit: The business unit runs a weekly podcast where they interview Pizza Chefs from all over the world. The business unit needs an application to keep track of the publishing of the episodes in the podcast and any other information related to running the Podcasts, such as payments made to guests and requests from Chefs to appear in the podcast.</a:t>
             </a:r>
           </a:p>
           <a:p>
@@ -8183,15 +8176,7 @@
           <a:p>
             <a:r>
               <a:rPr lang="en-US" dirty="0"/>
-              <a:t>She goes back to research again to find a way to define her database in a way that can be maintained in source control and that will have the same </a:t>
-            </a:r>
-            <a:r>
-              <a:rPr lang="en-US" dirty="0" err="1"/>
-              <a:t>firendlness</a:t>
-            </a:r>
-            <a:r>
-              <a:rPr lang="en-US" dirty="0"/>
-              <a:t> and SQL features she finds in SSMS </a:t>
+              <a:t>She goes back to research again to find a way to define her database in a way that can be maintained in source control and that will have the same friendliness and SQL features she finds in SSMS </a:t>
             </a:r>
             <a:r>
               <a:rPr lang="en-US" dirty="0" err="1"/>
@@ -8302,16 +8287,29 @@
           </a:p>
           <a:p>
             <a:r>
+              <a:rPr lang="en-US" dirty="0" err="1"/>
+              <a:t>Sql</a:t>
+            </a:r>
+            <a:r>
               <a:rPr lang="en-US" dirty="0"/>
-              <a:t>To create a new SQL project, she </a:t>
+              <a:t> Projects are a declarative, source control and CI/CD friendly way to define your database from within Visual </a:t>
             </a:r>
             <a:r>
               <a:rPr lang="en-US" dirty="0" err="1"/>
-              <a:t>gwork,and</a:t>
+              <a:t>Stuio</a:t>
             </a:r>
             <a:r>
               <a:rPr lang="en-US" dirty="0"/>
-              <a:t> searches for the SQL template. If you do not see the template, it is possible that the component is not installed in VS. You can look for “SQL Server Data Tools” in the VS installer (VS 2026 only supports legacy style projects).</a:t>
+              <a:t>.</a:t>
+            </a:r>
+          </a:p>
+          <a:p>
+            <a:endParaRPr lang="en-US" dirty="0"/>
+          </a:p>
+          <a:p>
+            <a:r>
+              <a:rPr lang="en-US" dirty="0"/>
+              <a:t>To create a new SQL project, she searches for the SQL template. If you do not see the template, it is possible that the component is not installed in VS. You can look for “SQL Server Data Tools” in the VS installer (VS 2026 only supports legacy style projects).</a:t>
             </a:r>
           </a:p>
           <a:p>
@@ -8354,7 +8352,7 @@
           <a:p>
             <a:r>
               <a:rPr lang="en-US" dirty="0"/>
-              <a:t>The Visual Studio project allows her to create folder so that she can organize the SQL code. The folders are just for organization, the do not translate to any special structure in SQL. However, you can add schemas to your </a:t>
+              <a:t>The Visual Studio project allows her to create folders so that she can organize the SQL code. The folders are just for organization, the do not translate to any special structure in SQL. However, you can add schemas to your </a:t>
             </a:r>
             <a:r>
               <a:rPr lang="en-US" dirty="0" err="1"/>
@@ -9007,7 +9005,7 @@
           <a:p>
             <a:fld id="{714D8E22-EC7C-4185-AE99-0F7C1FB157B6}" type="datetimeFigureOut">
               <a:rPr lang="en-US" smtClean="0"/>
-              <a:t>4/25/2026</a:t>
+              <a:t>4/27/2026</a:t>
             </a:fld>
             <a:endParaRPr lang="en-US"/>
           </a:p>
@@ -9205,7 +9203,7 @@
           <a:p>
             <a:fld id="{714D8E22-EC7C-4185-AE99-0F7C1FB157B6}" type="datetimeFigureOut">
               <a:rPr lang="en-US" smtClean="0"/>
-              <a:t>4/25/2026</a:t>
+              <a:t>4/27/2026</a:t>
             </a:fld>
             <a:endParaRPr lang="en-US"/>
           </a:p>
@@ -9413,7 +9411,7 @@
           <a:p>
             <a:fld id="{714D8E22-EC7C-4185-AE99-0F7C1FB157B6}" type="datetimeFigureOut">
               <a:rPr lang="en-US" smtClean="0"/>
-              <a:t>4/25/2026</a:t>
+              <a:t>4/27/2026</a:t>
             </a:fld>
             <a:endParaRPr lang="en-US"/>
           </a:p>
@@ -9611,7 +9609,7 @@
           <a:p>
             <a:fld id="{714D8E22-EC7C-4185-AE99-0F7C1FB157B6}" type="datetimeFigureOut">
               <a:rPr lang="en-US" smtClean="0"/>
-              <a:t>4/25/2026</a:t>
+              <a:t>4/27/2026</a:t>
             </a:fld>
             <a:endParaRPr lang="en-US"/>
           </a:p>
@@ -9886,7 +9884,7 @@
           <a:p>
             <a:fld id="{714D8E22-EC7C-4185-AE99-0F7C1FB157B6}" type="datetimeFigureOut">
               <a:rPr lang="en-US" smtClean="0"/>
-              <a:t>4/25/2026</a:t>
+              <a:t>4/27/2026</a:t>
             </a:fld>
             <a:endParaRPr lang="en-US"/>
           </a:p>
@@ -10151,7 +10149,7 @@
           <a:p>
             <a:fld id="{714D8E22-EC7C-4185-AE99-0F7C1FB157B6}" type="datetimeFigureOut">
               <a:rPr lang="en-US" smtClean="0"/>
-              <a:t>4/25/2026</a:t>
+              <a:t>4/27/2026</a:t>
             </a:fld>
             <a:endParaRPr lang="en-US"/>
           </a:p>
@@ -10563,7 +10561,7 @@
           <a:p>
             <a:fld id="{714D8E22-EC7C-4185-AE99-0F7C1FB157B6}" type="datetimeFigureOut">
               <a:rPr lang="en-US" smtClean="0"/>
-              <a:t>4/25/2026</a:t>
+              <a:t>4/27/2026</a:t>
             </a:fld>
             <a:endParaRPr lang="en-US"/>
           </a:p>
@@ -10704,7 +10702,7 @@
           <a:p>
             <a:fld id="{714D8E22-EC7C-4185-AE99-0F7C1FB157B6}" type="datetimeFigureOut">
               <a:rPr lang="en-US" smtClean="0"/>
-              <a:t>4/25/2026</a:t>
+              <a:t>4/27/2026</a:t>
             </a:fld>
             <a:endParaRPr lang="en-US"/>
           </a:p>
@@ -10817,7 +10815,7 @@
           <a:p>
             <a:fld id="{714D8E22-EC7C-4185-AE99-0F7C1FB157B6}" type="datetimeFigureOut">
               <a:rPr lang="en-US" smtClean="0"/>
-              <a:t>4/25/2026</a:t>
+              <a:t>4/27/2026</a:t>
             </a:fld>
             <a:endParaRPr lang="en-US"/>
           </a:p>
@@ -11128,7 +11126,7 @@
           <a:p>
             <a:fld id="{714D8E22-EC7C-4185-AE99-0F7C1FB157B6}" type="datetimeFigureOut">
               <a:rPr lang="en-US" smtClean="0"/>
-              <a:t>4/25/2026</a:t>
+              <a:t>4/27/2026</a:t>
             </a:fld>
             <a:endParaRPr lang="en-US"/>
           </a:p>
@@ -11416,7 +11414,7 @@
           <a:p>
             <a:fld id="{714D8E22-EC7C-4185-AE99-0F7C1FB157B6}" type="datetimeFigureOut">
               <a:rPr lang="en-US" smtClean="0"/>
-              <a:t>4/25/2026</a:t>
+              <a:t>4/27/2026</a:t>
             </a:fld>
             <a:endParaRPr lang="en-US"/>
           </a:p>
@@ -11657,7 +11655,7 @@
           <a:p>
             <a:fld id="{714D8E22-EC7C-4185-AE99-0F7C1FB157B6}" type="datetimeFigureOut">
               <a:rPr lang="en-US" smtClean="0"/>
-              <a:t>4/25/2026</a:t>
+              <a:t>4/27/2026</a:t>
             </a:fld>
             <a:endParaRPr lang="en-US"/>
           </a:p>
@@ -13477,6 +13475,151 @@
 </file>
 
 <file path=ppt/slides/slide12.xml><?xml version="1.0" encoding="utf-8"?>
+<p:sld xmlns:a="http://schemas.openxmlformats.org/drawingml/2006/main" xmlns:r="http://schemas.openxmlformats.org/officeDocument/2006/relationships" xmlns:p="http://schemas.openxmlformats.org/presentationml/2006/main">
+  <p:cSld>
+    <p:spTree>
+      <p:nvGrpSpPr>
+        <p:cNvPr id="1" name=""/>
+        <p:cNvGrpSpPr/>
+        <p:nvPr/>
+      </p:nvGrpSpPr>
+      <p:grpSpPr>
+        <a:xfrm>
+          <a:off x="0" y="0"/>
+          <a:ext cx="0" cy="0"/>
+          <a:chOff x="0" y="0"/>
+          <a:chExt cx="0" cy="0"/>
+        </a:xfrm>
+      </p:grpSpPr>
+      <p:sp>
+        <p:nvSpPr>
+          <p:cNvPr id="2" name="Title 1">
+            <a:extLst>
+              <a:ext uri="{FF2B5EF4-FFF2-40B4-BE49-F238E27FC236}">
+                <a16:creationId xmlns:a16="http://schemas.microsoft.com/office/drawing/2014/main" id="{E2A4AA00-7E87-F272-FE85-605C7046A362}"/>
+              </a:ext>
+            </a:extLst>
+          </p:cNvPr>
+          <p:cNvSpPr>
+            <a:spLocks noGrp="1"/>
+          </p:cNvSpPr>
+          <p:nvPr>
+            <p:ph type="title"/>
+          </p:nvPr>
+        </p:nvSpPr>
+        <p:spPr/>
+        <p:txBody>
+          <a:bodyPr/>
+          <a:lstStyle/>
+          <a:p>
+            <a:r>
+              <a:rPr lang="en-US" dirty="0"/>
+              <a:t>Demo VS SQL Project</a:t>
+            </a:r>
+          </a:p>
+        </p:txBody>
+      </p:sp>
+      <p:sp>
+        <p:nvSpPr>
+          <p:cNvPr id="3" name="Content Placeholder 2">
+            <a:extLst>
+              <a:ext uri="{FF2B5EF4-FFF2-40B4-BE49-F238E27FC236}">
+                <a16:creationId xmlns:a16="http://schemas.microsoft.com/office/drawing/2014/main" id="{1E3B5A24-80A8-FE1E-8428-A25A6A14A51C}"/>
+              </a:ext>
+            </a:extLst>
+          </p:cNvPr>
+          <p:cNvSpPr>
+            <a:spLocks noGrp="1"/>
+          </p:cNvSpPr>
+          <p:nvPr>
+            <p:ph idx="1"/>
+          </p:nvPr>
+        </p:nvSpPr>
+        <p:spPr/>
+        <p:txBody>
+          <a:bodyPr/>
+          <a:lstStyle/>
+          <a:p>
+            <a:r>
+              <a:rPr lang="en-US" dirty="0" err="1"/>
+              <a:t>Intellisense</a:t>
+            </a:r>
+            <a:endParaRPr lang="en-US" dirty="0"/>
+          </a:p>
+          <a:p>
+            <a:r>
+              <a:rPr lang="en-US" dirty="0"/>
+              <a:t>Reference errors</a:t>
+            </a:r>
+          </a:p>
+          <a:p>
+            <a:r>
+              <a:rPr lang="en-US" dirty="0"/>
+              <a:t>Find all references</a:t>
+            </a:r>
+          </a:p>
+          <a:p>
+            <a:r>
+              <a:rPr lang="en-US" dirty="0"/>
+              <a:t>Rename </a:t>
+            </a:r>
+            <a:r>
+              <a:rPr lang="en-US" dirty="0" err="1"/>
+              <a:t>refactorings</a:t>
+            </a:r>
+            <a:endParaRPr lang="en-US" dirty="0"/>
+          </a:p>
+          <a:p>
+            <a:r>
+              <a:rPr lang="en-US" dirty="0"/>
+              <a:t>Folder organization</a:t>
+            </a:r>
+          </a:p>
+          <a:p>
+            <a:r>
+              <a:rPr lang="en-US" dirty="0"/>
+              <a:t>DB-level properties</a:t>
+            </a:r>
+          </a:p>
+          <a:p>
+            <a:r>
+              <a:rPr lang="en-US" dirty="0"/>
+              <a:t>One </a:t>
+            </a:r>
+            <a:r>
+              <a:rPr lang="en-US" dirty="0" err="1"/>
+              <a:t>db</a:t>
+            </a:r>
+            <a:r>
+              <a:rPr lang="en-US" dirty="0"/>
+              <a:t> per project</a:t>
+            </a:r>
+          </a:p>
+          <a:p>
+            <a:r>
+              <a:rPr lang="en-US" dirty="0"/>
+              <a:t>DB references</a:t>
+            </a:r>
+          </a:p>
+          <a:p>
+            <a:endParaRPr lang="en-US" dirty="0"/>
+          </a:p>
+        </p:txBody>
+      </p:sp>
+    </p:spTree>
+    <p:extLst>
+      <p:ext uri="{BB962C8B-B14F-4D97-AF65-F5344CB8AC3E}">
+        <p14:creationId xmlns:p14="http://schemas.microsoft.com/office/powerpoint/2010/main" val="449127763"/>
+      </p:ext>
+    </p:extLst>
+  </p:cSld>
+  <p:clrMapOvr>
+    <a:masterClrMapping/>
+  </p:clrMapOvr>
+</p:sld>
+</file>
+
+<file path=ppt/slides/slide13.xml><?xml version="1.0" encoding="utf-8"?>
 <p:sld xmlns:a="http://schemas.openxmlformats.org/drawingml/2006/main" xmlns:r="http://schemas.openxmlformats.org/officeDocument/2006/relationships" xmlns:p="http://schemas.openxmlformats.org/presentationml/2006/main">
   <p:cSld>
     <p:bg>
@@ -16775,7 +16918,7 @@
 </p:sld>
 </file>
 
-<file path=ppt/slides/slide13.xml><?xml version="1.0" encoding="utf-8"?>
+<file path=ppt/slides/slide14.xml><?xml version="1.0" encoding="utf-8"?>
 <p:sld xmlns:a="http://schemas.openxmlformats.org/drawingml/2006/main" xmlns:r="http://schemas.openxmlformats.org/officeDocument/2006/relationships" xmlns:p="http://schemas.openxmlformats.org/presentationml/2006/main">
   <p:cSld>
     <p:bg>
@@ -17327,7 +17470,7 @@
 </p:sld>
 </file>
 
-<file path=ppt/slides/slide14.xml><?xml version="1.0" encoding="utf-8"?>
+<file path=ppt/slides/slide15.xml><?xml version="1.0" encoding="utf-8"?>
 <p:sld xmlns:a="http://schemas.openxmlformats.org/drawingml/2006/main" xmlns:r="http://schemas.openxmlformats.org/officeDocument/2006/relationships" xmlns:p="http://schemas.openxmlformats.org/presentationml/2006/main">
   <p:cSld>
     <p:bg>
@@ -18296,7 +18439,7 @@
 </p:sld>
 </file>
 
-<file path=ppt/slides/slide15.xml><?xml version="1.0" encoding="utf-8"?>
+<file path=ppt/slides/slide16.xml><?xml version="1.0" encoding="utf-8"?>
 <p:sld xmlns:a="http://schemas.openxmlformats.org/drawingml/2006/main" xmlns:r="http://schemas.openxmlformats.org/officeDocument/2006/relationships" xmlns:p="http://schemas.openxmlformats.org/presentationml/2006/main">
   <p:cSld>
     <p:spTree>
@@ -18745,7 +18888,7 @@
 </p:sld>
 </file>
 
-<file path=ppt/slides/slide16.xml><?xml version="1.0" encoding="utf-8"?>
+<file path=ppt/slides/slide17.xml><?xml version="1.0" encoding="utf-8"?>
 <p:sld xmlns:a="http://schemas.openxmlformats.org/drawingml/2006/main" xmlns:r="http://schemas.openxmlformats.org/officeDocument/2006/relationships" xmlns:p="http://schemas.openxmlformats.org/presentationml/2006/main">
   <p:cSld>
     <p:spTree>
@@ -19084,7 +19227,7 @@
 </p:sld>
 </file>
 
-<file path=ppt/slides/slide17.xml><?xml version="1.0" encoding="utf-8"?>
+<file path=ppt/slides/slide18.xml><?xml version="1.0" encoding="utf-8"?>
 <p:sld xmlns:a="http://schemas.openxmlformats.org/drawingml/2006/main" xmlns:r="http://schemas.openxmlformats.org/officeDocument/2006/relationships" xmlns:p="http://schemas.openxmlformats.org/presentationml/2006/main">
   <p:cSld>
     <p:spTree>
@@ -19463,7 +19606,7 @@
 </p:sld>
 </file>
 
-<file path=ppt/slides/slide18.xml><?xml version="1.0" encoding="utf-8"?>
+<file path=ppt/slides/slide19.xml><?xml version="1.0" encoding="utf-8"?>
 <p:sld xmlns:a="http://schemas.openxmlformats.org/drawingml/2006/main" xmlns:r="http://schemas.openxmlformats.org/officeDocument/2006/relationships" xmlns:p="http://schemas.openxmlformats.org/presentationml/2006/main">
   <p:cSld>
     <p:spTree>
@@ -19833,363 +19976,6 @@
     <p:extLst>
       <p:ext uri="{BB962C8B-B14F-4D97-AF65-F5344CB8AC3E}">
         <p14:creationId xmlns:p14="http://schemas.microsoft.com/office/powerpoint/2010/main" val="4273200505"/>
-      </p:ext>
-    </p:extLst>
-  </p:cSld>
-  <p:clrMapOvr>
-    <a:masterClrMapping/>
-  </p:clrMapOvr>
-</p:sld>
-</file>
-
-<file path=ppt/slides/slide19.xml><?xml version="1.0" encoding="utf-8"?>
-<p:sld xmlns:a="http://schemas.openxmlformats.org/drawingml/2006/main" xmlns:r="http://schemas.openxmlformats.org/officeDocument/2006/relationships" xmlns:p="http://schemas.openxmlformats.org/presentationml/2006/main">
-  <p:cSld>
-    <p:spTree>
-      <p:nvGrpSpPr>
-        <p:cNvPr id="1" name="">
-          <a:extLst>
-            <a:ext uri="{FF2B5EF4-FFF2-40B4-BE49-F238E27FC236}">
-              <a16:creationId xmlns:a16="http://schemas.microsoft.com/office/drawing/2014/main" id="{07D21E5F-B5CD-2290-D7AB-BB23099EEA28}"/>
-            </a:ext>
-          </a:extLst>
-        </p:cNvPr>
-        <p:cNvGrpSpPr/>
-        <p:nvPr/>
-      </p:nvGrpSpPr>
-      <p:grpSpPr>
-        <a:xfrm>
-          <a:off x="0" y="0"/>
-          <a:ext cx="0" cy="0"/>
-          <a:chOff x="0" y="0"/>
-          <a:chExt cx="0" cy="0"/>
-        </a:xfrm>
-      </p:grpSpPr>
-      <p:sp>
-        <p:nvSpPr>
-          <p:cNvPr id="2" name="Title 1">
-            <a:extLst>
-              <a:ext uri="{FF2B5EF4-FFF2-40B4-BE49-F238E27FC236}">
-                <a16:creationId xmlns:a16="http://schemas.microsoft.com/office/drawing/2014/main" id="{75DC3336-36FB-A80C-C7C0-8EC059EEACA9}"/>
-              </a:ext>
-            </a:extLst>
-          </p:cNvPr>
-          <p:cNvSpPr>
-            <a:spLocks noGrp="1"/>
-          </p:cNvSpPr>
-          <p:nvPr>
-            <p:ph type="title"/>
-          </p:nvPr>
-        </p:nvSpPr>
-        <p:spPr>
-          <a:xfrm>
-            <a:off x="838200" y="365125"/>
-            <a:ext cx="10515600" cy="1325563"/>
-          </a:xfrm>
-        </p:spPr>
-        <p:txBody>
-          <a:bodyPr>
-            <a:normAutofit/>
-          </a:bodyPr>
-          <a:lstStyle/>
-          <a:p>
-            <a:r>
-              <a:rPr lang="en-US" sz="5400" dirty="0"/>
-              <a:t>Change Sample – Rename column</a:t>
-            </a:r>
-          </a:p>
-        </p:txBody>
-      </p:sp>
-      <p:pic>
-        <p:nvPicPr>
-          <p:cNvPr id="1026" name="Picture 2">
-            <a:extLst>
-              <a:ext uri="{FF2B5EF4-FFF2-40B4-BE49-F238E27FC236}">
-                <a16:creationId xmlns:a16="http://schemas.microsoft.com/office/drawing/2014/main" id="{0EE28F63-2E4D-A0B9-1E57-1B783865E067}"/>
-              </a:ext>
-            </a:extLst>
-          </p:cNvPr>
-          <p:cNvPicPr>
-            <a:picLocks noChangeAspect="1" noChangeArrowheads="1"/>
-          </p:cNvPicPr>
-          <p:nvPr/>
-        </p:nvPicPr>
-        <p:blipFill>
-          <a:blip r:embed="rId3">
-            <a:extLst>
-              <a:ext uri="{28A0092B-C50C-407E-A947-70E740481C1C}">
-                <a14:useLocalDpi xmlns:a14="http://schemas.microsoft.com/office/drawing/2010/main" val="0"/>
-              </a:ext>
-            </a:extLst>
-          </a:blip>
-          <a:srcRect/>
-          <a:stretch>
-            <a:fillRect/>
-          </a:stretch>
-        </p:blipFill>
-        <p:spPr bwMode="auto">
-          <a:xfrm>
-            <a:off x="63500" y="-7185025"/>
-            <a:ext cx="3686175" cy="1238250"/>
-          </a:xfrm>
-          <a:prstGeom prst="rect">
-            <a:avLst/>
-          </a:prstGeom>
-          <a:noFill/>
-          <a:extLst>
-            <a:ext uri="{909E8E84-426E-40DD-AFC4-6F175D3DCCD1}">
-              <a14:hiddenFill xmlns:a14="http://schemas.microsoft.com/office/drawing/2010/main">
-                <a:solidFill>
-                  <a:srgbClr val="FFFFFF"/>
-                </a:solidFill>
-              </a14:hiddenFill>
-            </a:ext>
-          </a:extLst>
-        </p:spPr>
-      </p:pic>
-      <p:sp>
-        <p:nvSpPr>
-          <p:cNvPr id="8" name="Arrow: Right 7">
-            <a:extLst>
-              <a:ext uri="{FF2B5EF4-FFF2-40B4-BE49-F238E27FC236}">
-                <a16:creationId xmlns:a16="http://schemas.microsoft.com/office/drawing/2014/main" id="{B564A71D-318E-CB72-E3C5-29A3285D7963}"/>
-              </a:ext>
-            </a:extLst>
-          </p:cNvPr>
-          <p:cNvSpPr/>
-          <p:nvPr/>
-        </p:nvSpPr>
-        <p:spPr>
-          <a:xfrm>
-            <a:off x="4436715" y="2055198"/>
-            <a:ext cx="840259" cy="259492"/>
-          </a:xfrm>
-          <a:prstGeom prst="rightArrow">
-            <a:avLst/>
-          </a:prstGeom>
-        </p:spPr>
-        <p:style>
-          <a:lnRef idx="2">
-            <a:schemeClr val="accent1">
-              <a:shade val="15000"/>
-            </a:schemeClr>
-          </a:lnRef>
-          <a:fillRef idx="1">
-            <a:schemeClr val="accent1"/>
-          </a:fillRef>
-          <a:effectRef idx="0">
-            <a:schemeClr val="accent1"/>
-          </a:effectRef>
-          <a:fontRef idx="minor">
-            <a:schemeClr val="lt1"/>
-          </a:fontRef>
-        </p:style>
-        <p:txBody>
-          <a:bodyPr rtlCol="0" anchor="ctr"/>
-          <a:lstStyle/>
-          <a:p>
-            <a:pPr algn="ctr"/>
-            <a:endParaRPr lang="en-US"/>
-          </a:p>
-        </p:txBody>
-      </p:sp>
-      <p:sp>
-        <p:nvSpPr>
-          <p:cNvPr id="17" name="TextBox 16">
-            <a:extLst>
-              <a:ext uri="{FF2B5EF4-FFF2-40B4-BE49-F238E27FC236}">
-                <a16:creationId xmlns:a16="http://schemas.microsoft.com/office/drawing/2014/main" id="{D59F6DD9-993D-6B14-4288-07854F1521B2}"/>
-              </a:ext>
-            </a:extLst>
-          </p:cNvPr>
-          <p:cNvSpPr txBox="1"/>
-          <p:nvPr/>
-        </p:nvSpPr>
-        <p:spPr>
-          <a:xfrm>
-            <a:off x="5318739" y="5409149"/>
-            <a:ext cx="6035061" cy="923330"/>
-          </a:xfrm>
-          <a:prstGeom prst="rect">
-            <a:avLst/>
-          </a:prstGeom>
-          <a:noFill/>
-        </p:spPr>
-        <p:txBody>
-          <a:bodyPr wrap="square" rtlCol="0">
-            <a:spAutoFit/>
-          </a:bodyPr>
-          <a:lstStyle/>
-          <a:p>
-            <a:pPr marL="342900" indent="-342900">
-              <a:buFont typeface="+mj-lt"/>
-              <a:buAutoNum type="arabicPeriod"/>
-            </a:pPr>
-            <a:r>
-              <a:rPr lang="en-US" dirty="0"/>
-              <a:t>A </a:t>
-            </a:r>
-            <a:r>
-              <a:rPr lang="en-US" dirty="0" err="1"/>
-              <a:t>sp_rename</a:t>
-            </a:r>
-            <a:r>
-              <a:rPr lang="en-US" dirty="0"/>
-              <a:t> command is generated</a:t>
-            </a:r>
-          </a:p>
-          <a:p>
-            <a:pPr marL="342900" indent="-342900">
-              <a:buFont typeface="+mj-lt"/>
-              <a:buAutoNum type="arabicPeriod"/>
-            </a:pPr>
-            <a:r>
-              <a:rPr lang="en-US" dirty="0"/>
-              <a:t>Any other alters caused by the rename refactoring (e.g.: views referencing this column) are also issued.</a:t>
-            </a:r>
-          </a:p>
-        </p:txBody>
-      </p:sp>
-      <p:pic>
-        <p:nvPicPr>
-          <p:cNvPr id="4" name="Picture 3">
-            <a:extLst>
-              <a:ext uri="{FF2B5EF4-FFF2-40B4-BE49-F238E27FC236}">
-                <a16:creationId xmlns:a16="http://schemas.microsoft.com/office/drawing/2014/main" id="{4F633152-AB51-4E23-5BD3-A7CFC4D2A5F9}"/>
-              </a:ext>
-            </a:extLst>
-          </p:cNvPr>
-          <p:cNvPicPr>
-            <a:picLocks noChangeAspect="1"/>
-          </p:cNvPicPr>
-          <p:nvPr/>
-        </p:nvPicPr>
-        <p:blipFill>
-          <a:blip r:embed="rId4"/>
-          <a:stretch>
-            <a:fillRect/>
-          </a:stretch>
-        </p:blipFill>
-        <p:spPr>
-          <a:xfrm>
-            <a:off x="1262531" y="1799326"/>
-            <a:ext cx="2654436" cy="762039"/>
-          </a:xfrm>
-          <a:prstGeom prst="rect">
-            <a:avLst/>
-          </a:prstGeom>
-        </p:spPr>
-      </p:pic>
-      <p:pic>
-        <p:nvPicPr>
-          <p:cNvPr id="7" name="Picture 6">
-            <a:extLst>
-              <a:ext uri="{FF2B5EF4-FFF2-40B4-BE49-F238E27FC236}">
-                <a16:creationId xmlns:a16="http://schemas.microsoft.com/office/drawing/2014/main" id="{56E5995A-B0D2-E64F-3DDF-FD72DB7BB529}"/>
-              </a:ext>
-            </a:extLst>
-          </p:cNvPr>
-          <p:cNvPicPr>
-            <a:picLocks noChangeAspect="1"/>
-          </p:cNvPicPr>
-          <p:nvPr/>
-        </p:nvPicPr>
-        <p:blipFill>
-          <a:blip r:embed="rId5"/>
-          <a:stretch>
-            <a:fillRect/>
-          </a:stretch>
-        </p:blipFill>
-        <p:spPr>
-          <a:xfrm>
-            <a:off x="6463861" y="1648767"/>
-            <a:ext cx="4755385" cy="1901151"/>
-          </a:xfrm>
-          <a:prstGeom prst="rect">
-            <a:avLst/>
-          </a:prstGeom>
-        </p:spPr>
-      </p:pic>
-      <p:pic>
-        <p:nvPicPr>
-          <p:cNvPr id="10" name="Picture 9">
-            <a:extLst>
-              <a:ext uri="{FF2B5EF4-FFF2-40B4-BE49-F238E27FC236}">
-                <a16:creationId xmlns:a16="http://schemas.microsoft.com/office/drawing/2014/main" id="{EB7F5638-39F6-8264-4D5E-0B07BA663E1C}"/>
-              </a:ext>
-            </a:extLst>
-          </p:cNvPr>
-          <p:cNvPicPr>
-            <a:picLocks noChangeAspect="1"/>
-          </p:cNvPicPr>
-          <p:nvPr/>
-        </p:nvPicPr>
-        <p:blipFill>
-          <a:blip r:embed="rId6"/>
-          <a:stretch>
-            <a:fillRect/>
-          </a:stretch>
-        </p:blipFill>
-        <p:spPr>
-          <a:xfrm>
-            <a:off x="1049211" y="4296636"/>
-            <a:ext cx="9601693" cy="615982"/>
-          </a:xfrm>
-          <a:prstGeom prst="rect">
-            <a:avLst/>
-          </a:prstGeom>
-        </p:spPr>
-      </p:pic>
-      <p:sp>
-        <p:nvSpPr>
-          <p:cNvPr id="11" name="Arrow: Down 10">
-            <a:extLst>
-              <a:ext uri="{FF2B5EF4-FFF2-40B4-BE49-F238E27FC236}">
-                <a16:creationId xmlns:a16="http://schemas.microsoft.com/office/drawing/2014/main" id="{FA6FED3F-B7DD-301E-0F2D-11A803BFA277}"/>
-              </a:ext>
-            </a:extLst>
-          </p:cNvPr>
-          <p:cNvSpPr/>
-          <p:nvPr/>
-        </p:nvSpPr>
-        <p:spPr>
-          <a:xfrm>
-            <a:off x="8147082" y="3562694"/>
-            <a:ext cx="189187" cy="611226"/>
-          </a:xfrm>
-          <a:prstGeom prst="downArrow">
-            <a:avLst/>
-          </a:prstGeom>
-        </p:spPr>
-        <p:style>
-          <a:lnRef idx="2">
-            <a:schemeClr val="accent1">
-              <a:shade val="15000"/>
-            </a:schemeClr>
-          </a:lnRef>
-          <a:fillRef idx="1">
-            <a:schemeClr val="accent1"/>
-          </a:fillRef>
-          <a:effectRef idx="0">
-            <a:schemeClr val="accent1"/>
-          </a:effectRef>
-          <a:fontRef idx="minor">
-            <a:schemeClr val="lt1"/>
-          </a:fontRef>
-        </p:style>
-        <p:txBody>
-          <a:bodyPr rtlCol="0" anchor="ctr"/>
-          <a:lstStyle/>
-          <a:p>
-            <a:pPr algn="ctr"/>
-            <a:endParaRPr lang="en-US"/>
-          </a:p>
-        </p:txBody>
-      </p:sp>
-    </p:spTree>
-    <p:extLst>
-      <p:ext uri="{BB962C8B-B14F-4D97-AF65-F5344CB8AC3E}">
-        <p14:creationId xmlns:p14="http://schemas.microsoft.com/office/powerpoint/2010/main" val="3873014463"/>
       </p:ext>
     </p:extLst>
   </p:cSld>
@@ -21011,6 +20797,363 @@
         <p:cNvPr id="1" name="">
           <a:extLst>
             <a:ext uri="{FF2B5EF4-FFF2-40B4-BE49-F238E27FC236}">
+              <a16:creationId xmlns:a16="http://schemas.microsoft.com/office/drawing/2014/main" id="{07D21E5F-B5CD-2290-D7AB-BB23099EEA28}"/>
+            </a:ext>
+          </a:extLst>
+        </p:cNvPr>
+        <p:cNvGrpSpPr/>
+        <p:nvPr/>
+      </p:nvGrpSpPr>
+      <p:grpSpPr>
+        <a:xfrm>
+          <a:off x="0" y="0"/>
+          <a:ext cx="0" cy="0"/>
+          <a:chOff x="0" y="0"/>
+          <a:chExt cx="0" cy="0"/>
+        </a:xfrm>
+      </p:grpSpPr>
+      <p:sp>
+        <p:nvSpPr>
+          <p:cNvPr id="2" name="Title 1">
+            <a:extLst>
+              <a:ext uri="{FF2B5EF4-FFF2-40B4-BE49-F238E27FC236}">
+                <a16:creationId xmlns:a16="http://schemas.microsoft.com/office/drawing/2014/main" id="{75DC3336-36FB-A80C-C7C0-8EC059EEACA9}"/>
+              </a:ext>
+            </a:extLst>
+          </p:cNvPr>
+          <p:cNvSpPr>
+            <a:spLocks noGrp="1"/>
+          </p:cNvSpPr>
+          <p:nvPr>
+            <p:ph type="title"/>
+          </p:nvPr>
+        </p:nvSpPr>
+        <p:spPr>
+          <a:xfrm>
+            <a:off x="838200" y="365125"/>
+            <a:ext cx="10515600" cy="1325563"/>
+          </a:xfrm>
+        </p:spPr>
+        <p:txBody>
+          <a:bodyPr>
+            <a:normAutofit/>
+          </a:bodyPr>
+          <a:lstStyle/>
+          <a:p>
+            <a:r>
+              <a:rPr lang="en-US" sz="5400" dirty="0"/>
+              <a:t>Change Sample – Rename column</a:t>
+            </a:r>
+          </a:p>
+        </p:txBody>
+      </p:sp>
+      <p:pic>
+        <p:nvPicPr>
+          <p:cNvPr id="1026" name="Picture 2">
+            <a:extLst>
+              <a:ext uri="{FF2B5EF4-FFF2-40B4-BE49-F238E27FC236}">
+                <a16:creationId xmlns:a16="http://schemas.microsoft.com/office/drawing/2014/main" id="{0EE28F63-2E4D-A0B9-1E57-1B783865E067}"/>
+              </a:ext>
+            </a:extLst>
+          </p:cNvPr>
+          <p:cNvPicPr>
+            <a:picLocks noChangeAspect="1" noChangeArrowheads="1"/>
+          </p:cNvPicPr>
+          <p:nvPr/>
+        </p:nvPicPr>
+        <p:blipFill>
+          <a:blip r:embed="rId3">
+            <a:extLst>
+              <a:ext uri="{28A0092B-C50C-407E-A947-70E740481C1C}">
+                <a14:useLocalDpi xmlns:a14="http://schemas.microsoft.com/office/drawing/2010/main" val="0"/>
+              </a:ext>
+            </a:extLst>
+          </a:blip>
+          <a:srcRect/>
+          <a:stretch>
+            <a:fillRect/>
+          </a:stretch>
+        </p:blipFill>
+        <p:spPr bwMode="auto">
+          <a:xfrm>
+            <a:off x="63500" y="-7185025"/>
+            <a:ext cx="3686175" cy="1238250"/>
+          </a:xfrm>
+          <a:prstGeom prst="rect">
+            <a:avLst/>
+          </a:prstGeom>
+          <a:noFill/>
+          <a:extLst>
+            <a:ext uri="{909E8E84-426E-40DD-AFC4-6F175D3DCCD1}">
+              <a14:hiddenFill xmlns:a14="http://schemas.microsoft.com/office/drawing/2010/main">
+                <a:solidFill>
+                  <a:srgbClr val="FFFFFF"/>
+                </a:solidFill>
+              </a14:hiddenFill>
+            </a:ext>
+          </a:extLst>
+        </p:spPr>
+      </p:pic>
+      <p:sp>
+        <p:nvSpPr>
+          <p:cNvPr id="8" name="Arrow: Right 7">
+            <a:extLst>
+              <a:ext uri="{FF2B5EF4-FFF2-40B4-BE49-F238E27FC236}">
+                <a16:creationId xmlns:a16="http://schemas.microsoft.com/office/drawing/2014/main" id="{B564A71D-318E-CB72-E3C5-29A3285D7963}"/>
+              </a:ext>
+            </a:extLst>
+          </p:cNvPr>
+          <p:cNvSpPr/>
+          <p:nvPr/>
+        </p:nvSpPr>
+        <p:spPr>
+          <a:xfrm>
+            <a:off x="4436715" y="2055198"/>
+            <a:ext cx="840259" cy="259492"/>
+          </a:xfrm>
+          <a:prstGeom prst="rightArrow">
+            <a:avLst/>
+          </a:prstGeom>
+        </p:spPr>
+        <p:style>
+          <a:lnRef idx="2">
+            <a:schemeClr val="accent1">
+              <a:shade val="15000"/>
+            </a:schemeClr>
+          </a:lnRef>
+          <a:fillRef idx="1">
+            <a:schemeClr val="accent1"/>
+          </a:fillRef>
+          <a:effectRef idx="0">
+            <a:schemeClr val="accent1"/>
+          </a:effectRef>
+          <a:fontRef idx="minor">
+            <a:schemeClr val="lt1"/>
+          </a:fontRef>
+        </p:style>
+        <p:txBody>
+          <a:bodyPr rtlCol="0" anchor="ctr"/>
+          <a:lstStyle/>
+          <a:p>
+            <a:pPr algn="ctr"/>
+            <a:endParaRPr lang="en-US"/>
+          </a:p>
+        </p:txBody>
+      </p:sp>
+      <p:sp>
+        <p:nvSpPr>
+          <p:cNvPr id="17" name="TextBox 16">
+            <a:extLst>
+              <a:ext uri="{FF2B5EF4-FFF2-40B4-BE49-F238E27FC236}">
+                <a16:creationId xmlns:a16="http://schemas.microsoft.com/office/drawing/2014/main" id="{D59F6DD9-993D-6B14-4288-07854F1521B2}"/>
+              </a:ext>
+            </a:extLst>
+          </p:cNvPr>
+          <p:cNvSpPr txBox="1"/>
+          <p:nvPr/>
+        </p:nvSpPr>
+        <p:spPr>
+          <a:xfrm>
+            <a:off x="5318739" y="5409149"/>
+            <a:ext cx="6035061" cy="923330"/>
+          </a:xfrm>
+          <a:prstGeom prst="rect">
+            <a:avLst/>
+          </a:prstGeom>
+          <a:noFill/>
+        </p:spPr>
+        <p:txBody>
+          <a:bodyPr wrap="square" rtlCol="0">
+            <a:spAutoFit/>
+          </a:bodyPr>
+          <a:lstStyle/>
+          <a:p>
+            <a:pPr marL="342900" indent="-342900">
+              <a:buFont typeface="+mj-lt"/>
+              <a:buAutoNum type="arabicPeriod"/>
+            </a:pPr>
+            <a:r>
+              <a:rPr lang="en-US" dirty="0"/>
+              <a:t>A </a:t>
+            </a:r>
+            <a:r>
+              <a:rPr lang="en-US" dirty="0" err="1"/>
+              <a:t>sp_rename</a:t>
+            </a:r>
+            <a:r>
+              <a:rPr lang="en-US" dirty="0"/>
+              <a:t> command is generated</a:t>
+            </a:r>
+          </a:p>
+          <a:p>
+            <a:pPr marL="342900" indent="-342900">
+              <a:buFont typeface="+mj-lt"/>
+              <a:buAutoNum type="arabicPeriod"/>
+            </a:pPr>
+            <a:r>
+              <a:rPr lang="en-US" dirty="0"/>
+              <a:t>Any other alters caused by the rename refactoring (e.g.: views referencing this column) are also issued.</a:t>
+            </a:r>
+          </a:p>
+        </p:txBody>
+      </p:sp>
+      <p:pic>
+        <p:nvPicPr>
+          <p:cNvPr id="4" name="Picture 3">
+            <a:extLst>
+              <a:ext uri="{FF2B5EF4-FFF2-40B4-BE49-F238E27FC236}">
+                <a16:creationId xmlns:a16="http://schemas.microsoft.com/office/drawing/2014/main" id="{4F633152-AB51-4E23-5BD3-A7CFC4D2A5F9}"/>
+              </a:ext>
+            </a:extLst>
+          </p:cNvPr>
+          <p:cNvPicPr>
+            <a:picLocks noChangeAspect="1"/>
+          </p:cNvPicPr>
+          <p:nvPr/>
+        </p:nvPicPr>
+        <p:blipFill>
+          <a:blip r:embed="rId4"/>
+          <a:stretch>
+            <a:fillRect/>
+          </a:stretch>
+        </p:blipFill>
+        <p:spPr>
+          <a:xfrm>
+            <a:off x="1262531" y="1799326"/>
+            <a:ext cx="2654436" cy="762039"/>
+          </a:xfrm>
+          <a:prstGeom prst="rect">
+            <a:avLst/>
+          </a:prstGeom>
+        </p:spPr>
+      </p:pic>
+      <p:pic>
+        <p:nvPicPr>
+          <p:cNvPr id="7" name="Picture 6">
+            <a:extLst>
+              <a:ext uri="{FF2B5EF4-FFF2-40B4-BE49-F238E27FC236}">
+                <a16:creationId xmlns:a16="http://schemas.microsoft.com/office/drawing/2014/main" id="{56E5995A-B0D2-E64F-3DDF-FD72DB7BB529}"/>
+              </a:ext>
+            </a:extLst>
+          </p:cNvPr>
+          <p:cNvPicPr>
+            <a:picLocks noChangeAspect="1"/>
+          </p:cNvPicPr>
+          <p:nvPr/>
+        </p:nvPicPr>
+        <p:blipFill>
+          <a:blip r:embed="rId5"/>
+          <a:stretch>
+            <a:fillRect/>
+          </a:stretch>
+        </p:blipFill>
+        <p:spPr>
+          <a:xfrm>
+            <a:off x="6463861" y="1648767"/>
+            <a:ext cx="4755385" cy="1901151"/>
+          </a:xfrm>
+          <a:prstGeom prst="rect">
+            <a:avLst/>
+          </a:prstGeom>
+        </p:spPr>
+      </p:pic>
+      <p:pic>
+        <p:nvPicPr>
+          <p:cNvPr id="10" name="Picture 9">
+            <a:extLst>
+              <a:ext uri="{FF2B5EF4-FFF2-40B4-BE49-F238E27FC236}">
+                <a16:creationId xmlns:a16="http://schemas.microsoft.com/office/drawing/2014/main" id="{EB7F5638-39F6-8264-4D5E-0B07BA663E1C}"/>
+              </a:ext>
+            </a:extLst>
+          </p:cNvPr>
+          <p:cNvPicPr>
+            <a:picLocks noChangeAspect="1"/>
+          </p:cNvPicPr>
+          <p:nvPr/>
+        </p:nvPicPr>
+        <p:blipFill>
+          <a:blip r:embed="rId6"/>
+          <a:stretch>
+            <a:fillRect/>
+          </a:stretch>
+        </p:blipFill>
+        <p:spPr>
+          <a:xfrm>
+            <a:off x="1049211" y="4296636"/>
+            <a:ext cx="9601693" cy="615982"/>
+          </a:xfrm>
+          <a:prstGeom prst="rect">
+            <a:avLst/>
+          </a:prstGeom>
+        </p:spPr>
+      </p:pic>
+      <p:sp>
+        <p:nvSpPr>
+          <p:cNvPr id="11" name="Arrow: Down 10">
+            <a:extLst>
+              <a:ext uri="{FF2B5EF4-FFF2-40B4-BE49-F238E27FC236}">
+                <a16:creationId xmlns:a16="http://schemas.microsoft.com/office/drawing/2014/main" id="{FA6FED3F-B7DD-301E-0F2D-11A803BFA277}"/>
+              </a:ext>
+            </a:extLst>
+          </p:cNvPr>
+          <p:cNvSpPr/>
+          <p:nvPr/>
+        </p:nvSpPr>
+        <p:spPr>
+          <a:xfrm>
+            <a:off x="8147082" y="3562694"/>
+            <a:ext cx="189187" cy="611226"/>
+          </a:xfrm>
+          <a:prstGeom prst="downArrow">
+            <a:avLst/>
+          </a:prstGeom>
+        </p:spPr>
+        <p:style>
+          <a:lnRef idx="2">
+            <a:schemeClr val="accent1">
+              <a:shade val="15000"/>
+            </a:schemeClr>
+          </a:lnRef>
+          <a:fillRef idx="1">
+            <a:schemeClr val="accent1"/>
+          </a:fillRef>
+          <a:effectRef idx="0">
+            <a:schemeClr val="accent1"/>
+          </a:effectRef>
+          <a:fontRef idx="minor">
+            <a:schemeClr val="lt1"/>
+          </a:fontRef>
+        </p:style>
+        <p:txBody>
+          <a:bodyPr rtlCol="0" anchor="ctr"/>
+          <a:lstStyle/>
+          <a:p>
+            <a:pPr algn="ctr"/>
+            <a:endParaRPr lang="en-US"/>
+          </a:p>
+        </p:txBody>
+      </p:sp>
+    </p:spTree>
+    <p:extLst>
+      <p:ext uri="{BB962C8B-B14F-4D97-AF65-F5344CB8AC3E}">
+        <p14:creationId xmlns:p14="http://schemas.microsoft.com/office/powerpoint/2010/main" val="3873014463"/>
+      </p:ext>
+    </p:extLst>
+  </p:cSld>
+  <p:clrMapOvr>
+    <a:masterClrMapping/>
+  </p:clrMapOvr>
+</p:sld>
+</file>
+
+<file path=ppt/slides/slide21.xml><?xml version="1.0" encoding="utf-8"?>
+<p:sld xmlns:a="http://schemas.openxmlformats.org/drawingml/2006/main" xmlns:r="http://schemas.openxmlformats.org/officeDocument/2006/relationships" xmlns:p="http://schemas.openxmlformats.org/presentationml/2006/main">
+  <p:cSld>
+    <p:spTree>
+      <p:nvGrpSpPr>
+        <p:cNvPr id="1" name="">
+          <a:extLst>
+            <a:ext uri="{FF2B5EF4-FFF2-40B4-BE49-F238E27FC236}">
               <a16:creationId xmlns:a16="http://schemas.microsoft.com/office/drawing/2014/main" id="{5951B3A8-B991-7EC5-7413-2BF5C66D6092}"/>
             </a:ext>
           </a:extLst>
@@ -21342,7 +21485,7 @@
 </p:sld>
 </file>
 
-<file path=ppt/slides/slide21.xml><?xml version="1.0" encoding="utf-8"?>
+<file path=ppt/slides/slide22.xml><?xml version="1.0" encoding="utf-8"?>
 <p:sld xmlns:a="http://schemas.openxmlformats.org/drawingml/2006/main" xmlns:r="http://schemas.openxmlformats.org/officeDocument/2006/relationships" xmlns:p="http://schemas.openxmlformats.org/presentationml/2006/main">
   <p:cSld>
     <p:bg>
@@ -21749,7 +21892,7 @@
 </p:sld>
 </file>
 
-<file path=ppt/slides/slide22.xml><?xml version="1.0" encoding="utf-8"?>
+<file path=ppt/slides/slide23.xml><?xml version="1.0" encoding="utf-8"?>
 <p:sld xmlns:a="http://schemas.openxmlformats.org/drawingml/2006/main" xmlns:r="http://schemas.openxmlformats.org/officeDocument/2006/relationships" xmlns:p="http://schemas.openxmlformats.org/presentationml/2006/main">
   <p:cSld>
     <p:bg>
@@ -22830,7 +22973,7 @@
 </p:sld>
 </file>
 
-<file path=ppt/slides/slide23.xml><?xml version="1.0" encoding="utf-8"?>
+<file path=ppt/slides/slide24.xml><?xml version="1.0" encoding="utf-8"?>
 <p:sld xmlns:a="http://schemas.openxmlformats.org/drawingml/2006/main" xmlns:r="http://schemas.openxmlformats.org/officeDocument/2006/relationships" xmlns:p="http://schemas.openxmlformats.org/presentationml/2006/main">
   <p:cSld>
     <p:bg>
@@ -23976,7 +24119,7 @@
 </p:sld>
 </file>
 
-<file path=ppt/slides/slide24.xml><?xml version="1.0" encoding="utf-8"?>
+<file path=ppt/slides/slide25.xml><?xml version="1.0" encoding="utf-8"?>
 <p:sld xmlns:a="http://schemas.openxmlformats.org/drawingml/2006/main" xmlns:r="http://schemas.openxmlformats.org/officeDocument/2006/relationships" xmlns:p="http://schemas.openxmlformats.org/presentationml/2006/main">
   <p:cSld>
     <p:spTree>
@@ -24064,7 +24207,7 @@
 </p:sld>
 </file>
 
-<file path=ppt/slides/slide25.xml><?xml version="1.0" encoding="utf-8"?>
+<file path=ppt/slides/slide26.xml><?xml version="1.0" encoding="utf-8"?>
 <p:sld xmlns:a="http://schemas.openxmlformats.org/drawingml/2006/main" xmlns:r="http://schemas.openxmlformats.org/officeDocument/2006/relationships" xmlns:p="http://schemas.openxmlformats.org/presentationml/2006/main">
   <p:cSld>
     <p:bg>
@@ -25237,7 +25380,7 @@
 </p:sld>
 </file>
 
-<file path=ppt/slides/slide26.xml><?xml version="1.0" encoding="utf-8"?>
+<file path=ppt/slides/slide27.xml><?xml version="1.0" encoding="utf-8"?>
 <p:sld xmlns:a="http://schemas.openxmlformats.org/drawingml/2006/main" xmlns:r="http://schemas.openxmlformats.org/officeDocument/2006/relationships" xmlns:p="http://schemas.openxmlformats.org/presentationml/2006/main">
   <p:cSld>
     <p:bg>
@@ -25784,7 +25927,7 @@
 </p:sld>
 </file>
 
-<file path=ppt/slides/slide27.xml><?xml version="1.0" encoding="utf-8"?>
+<file path=ppt/slides/slide28.xml><?xml version="1.0" encoding="utf-8"?>
 <p:sld xmlns:a="http://schemas.openxmlformats.org/drawingml/2006/main" xmlns:r="http://schemas.openxmlformats.org/officeDocument/2006/relationships" xmlns:p="http://schemas.openxmlformats.org/presentationml/2006/main">
   <p:cSld>
     <p:bg>
@@ -26629,7 +26772,7 @@
 </p:sld>
 </file>
 
-<file path=ppt/slides/slide28.xml><?xml version="1.0" encoding="utf-8"?>
+<file path=ppt/slides/slide29.xml><?xml version="1.0" encoding="utf-8"?>
 <p:sld xmlns:a="http://schemas.openxmlformats.org/drawingml/2006/main" xmlns:r="http://schemas.openxmlformats.org/officeDocument/2006/relationships" xmlns:p="http://schemas.openxmlformats.org/presentationml/2006/main">
   <p:cSld>
     <p:spTree>
@@ -26740,749 +26883,6 @@
     <p:extLst>
       <p:ext uri="{BB962C8B-B14F-4D97-AF65-F5344CB8AC3E}">
         <p14:creationId xmlns:p14="http://schemas.microsoft.com/office/powerpoint/2010/main" val="1558062922"/>
-      </p:ext>
-    </p:extLst>
-  </p:cSld>
-  <p:clrMapOvr>
-    <a:masterClrMapping/>
-  </p:clrMapOvr>
-</p:sld>
-</file>
-
-<file path=ppt/slides/slide29.xml><?xml version="1.0" encoding="utf-8"?>
-<p:sld xmlns:a="http://schemas.openxmlformats.org/drawingml/2006/main" xmlns:r="http://schemas.openxmlformats.org/officeDocument/2006/relationships" xmlns:p="http://schemas.openxmlformats.org/presentationml/2006/main">
-  <p:cSld>
-    <p:bg>
-      <p:bgPr>
-        <a:solidFill>
-          <a:schemeClr val="bg1"/>
-        </a:solidFill>
-        <a:effectLst/>
-      </p:bgPr>
-    </p:bg>
-    <p:spTree>
-      <p:nvGrpSpPr>
-        <p:cNvPr id="1" name="">
-          <a:extLst>
-            <a:ext uri="{FF2B5EF4-FFF2-40B4-BE49-F238E27FC236}">
-              <a16:creationId xmlns:a16="http://schemas.microsoft.com/office/drawing/2014/main" id="{E15886ED-D919-B5F1-9F94-257220A369FC}"/>
-            </a:ext>
-          </a:extLst>
-        </p:cNvPr>
-        <p:cNvGrpSpPr/>
-        <p:nvPr/>
-      </p:nvGrpSpPr>
-      <p:grpSpPr>
-        <a:xfrm>
-          <a:off x="0" y="0"/>
-          <a:ext cx="0" cy="0"/>
-          <a:chOff x="0" y="0"/>
-          <a:chExt cx="0" cy="0"/>
-        </a:xfrm>
-      </p:grpSpPr>
-      <p:sp useBgFill="1">
-        <p:nvSpPr>
-          <p:cNvPr id="8" name="Rectangle 7">
-            <a:extLst>
-              <a:ext uri="{FF2B5EF4-FFF2-40B4-BE49-F238E27FC236}">
-                <a16:creationId xmlns:a16="http://schemas.microsoft.com/office/drawing/2014/main" id="{777A147A-9ED8-46B4-8660-1B3C2AA880B5}"/>
-              </a:ext>
-              <a:ext uri="{C183D7F6-B498-43B3-948B-1728B52AA6E4}">
-                <adec:decorative xmlns:adec="http://schemas.microsoft.com/office/drawing/2017/decorative" val="1"/>
-              </a:ext>
-            </a:extLst>
-          </p:cNvPr>
-          <p:cNvSpPr>
-            <a:spLocks noGrp="1" noRot="1" noChangeAspect="1" noMove="1" noResize="1" noEditPoints="1" noAdjustHandles="1" noChangeArrowheads="1" noChangeShapeType="1" noTextEdit="1"/>
-          </p:cNvSpPr>
-          <p:nvPr>
-            <p:extLst>
-              <p:ext uri="{386F3935-93C4-4BCD-93E2-E3B085C9AB24}">
-                <p16:designElem xmlns:p16="http://schemas.microsoft.com/office/powerpoint/2015/main" val="1"/>
-              </p:ext>
-            </p:extLst>
-          </p:nvPr>
-        </p:nvSpPr>
-        <p:spPr>
-          <a:xfrm>
-            <a:off x="0" y="0"/>
-            <a:ext cx="12188952" cy="6858000"/>
-          </a:xfrm>
-          <a:prstGeom prst="rect">
-            <a:avLst/>
-          </a:prstGeom>
-          <a:ln>
-            <a:noFill/>
-          </a:ln>
-        </p:spPr>
-        <p:style>
-          <a:lnRef idx="2">
-            <a:schemeClr val="accent1">
-              <a:shade val="50000"/>
-            </a:schemeClr>
-          </a:lnRef>
-          <a:fillRef idx="1">
-            <a:schemeClr val="accent1"/>
-          </a:fillRef>
-          <a:effectRef idx="0">
-            <a:schemeClr val="accent1"/>
-          </a:effectRef>
-          <a:fontRef idx="minor">
-            <a:schemeClr val="lt1"/>
-          </a:fontRef>
-        </p:style>
-        <p:txBody>
-          <a:bodyPr rtlCol="0" anchor="ctr"/>
-          <a:lstStyle/>
-          <a:p>
-            <a:pPr algn="ctr"/>
-            <a:endParaRPr lang="en-US"/>
-          </a:p>
-        </p:txBody>
-      </p:sp>
-      <p:sp>
-        <p:nvSpPr>
-          <p:cNvPr id="2" name="Title 1">
-            <a:extLst>
-              <a:ext uri="{FF2B5EF4-FFF2-40B4-BE49-F238E27FC236}">
-                <a16:creationId xmlns:a16="http://schemas.microsoft.com/office/drawing/2014/main" id="{F0D2B4A5-A437-139E-1D1D-32A79EC1424D}"/>
-              </a:ext>
-            </a:extLst>
-          </p:cNvPr>
-          <p:cNvSpPr>
-            <a:spLocks noGrp="1"/>
-          </p:cNvSpPr>
-          <p:nvPr>
-            <p:ph type="title"/>
-          </p:nvPr>
-        </p:nvSpPr>
-        <p:spPr>
-          <a:xfrm>
-            <a:off x="841248" y="548640"/>
-            <a:ext cx="3600860" cy="5431536"/>
-          </a:xfrm>
-        </p:spPr>
-        <p:txBody>
-          <a:bodyPr>
-            <a:normAutofit/>
-          </a:bodyPr>
-          <a:lstStyle/>
-          <a:p>
-            <a:r>
-              <a:rPr lang="en-US" sz="5400"/>
-              <a:t>Additional Resources</a:t>
-            </a:r>
-          </a:p>
-        </p:txBody>
-      </p:sp>
-      <p:sp>
-        <p:nvSpPr>
-          <p:cNvPr id="10" name="sketch line">
-            <a:extLst>
-              <a:ext uri="{FF2B5EF4-FFF2-40B4-BE49-F238E27FC236}">
-                <a16:creationId xmlns:a16="http://schemas.microsoft.com/office/drawing/2014/main" id="{5D6C15A0-C087-4593-8414-2B4EC1CDC3DE}"/>
-              </a:ext>
-              <a:ext uri="{C183D7F6-B498-43B3-948B-1728B52AA6E4}">
-                <adec:decorative xmlns:adec="http://schemas.microsoft.com/office/drawing/2017/decorative" val="1"/>
-              </a:ext>
-            </a:extLst>
-          </p:cNvPr>
-          <p:cNvSpPr>
-            <a:spLocks noGrp="1" noRot="1" noChangeAspect="1" noMove="1" noResize="1" noEditPoints="1" noAdjustHandles="1" noChangeArrowheads="1" noChangeShapeType="1" noTextEdit="1"/>
-          </p:cNvSpPr>
-          <p:nvPr>
-            <p:extLst>
-              <p:ext uri="{386F3935-93C4-4BCD-93E2-E3B085C9AB24}">
-                <p16:designElem xmlns:p16="http://schemas.microsoft.com/office/powerpoint/2015/main" val="1"/>
-              </p:ext>
-            </p:extLst>
-          </p:nvPr>
-        </p:nvSpPr>
-        <p:spPr>
-          <a:xfrm rot="5400000">
-            <a:off x="2543983" y="3258715"/>
-            <a:ext cx="4480560" cy="18288"/>
-          </a:xfrm>
-          <a:custGeom>
-            <a:avLst/>
-            <a:gdLst>
-              <a:gd name="csX0" fmla="*/ 0 w 4480560"/>
-              <a:gd name="csY0" fmla="*/ 0 h 18288"/>
-              <a:gd name="csX1" fmla="*/ 595274 w 4480560"/>
-              <a:gd name="csY1" fmla="*/ 0 h 18288"/>
-              <a:gd name="csX2" fmla="*/ 1100938 w 4480560"/>
-              <a:gd name="csY2" fmla="*/ 0 h 18288"/>
-              <a:gd name="csX3" fmla="*/ 1651406 w 4480560"/>
-              <a:gd name="csY3" fmla="*/ 0 h 18288"/>
-              <a:gd name="csX4" fmla="*/ 2336292 w 4480560"/>
-              <a:gd name="csY4" fmla="*/ 0 h 18288"/>
-              <a:gd name="csX5" fmla="*/ 2931566 w 4480560"/>
-              <a:gd name="csY5" fmla="*/ 0 h 18288"/>
-              <a:gd name="csX6" fmla="*/ 3482035 w 4480560"/>
-              <a:gd name="csY6" fmla="*/ 0 h 18288"/>
-              <a:gd name="csX7" fmla="*/ 4480560 w 4480560"/>
-              <a:gd name="csY7" fmla="*/ 0 h 18288"/>
-              <a:gd name="csX8" fmla="*/ 4480560 w 4480560"/>
-              <a:gd name="csY8" fmla="*/ 18288 h 18288"/>
-              <a:gd name="csX9" fmla="*/ 3840480 w 4480560"/>
-              <a:gd name="csY9" fmla="*/ 18288 h 18288"/>
-              <a:gd name="csX10" fmla="*/ 3290011 w 4480560"/>
-              <a:gd name="csY10" fmla="*/ 18288 h 18288"/>
-              <a:gd name="csX11" fmla="*/ 2560320 w 4480560"/>
-              <a:gd name="csY11" fmla="*/ 18288 h 18288"/>
-              <a:gd name="csX12" fmla="*/ 1965046 w 4480560"/>
-              <a:gd name="csY12" fmla="*/ 18288 h 18288"/>
-              <a:gd name="csX13" fmla="*/ 1459382 w 4480560"/>
-              <a:gd name="csY13" fmla="*/ 18288 h 18288"/>
-              <a:gd name="csX14" fmla="*/ 774497 w 4480560"/>
-              <a:gd name="csY14" fmla="*/ 18288 h 18288"/>
-              <a:gd name="csX15" fmla="*/ 0 w 4480560"/>
-              <a:gd name="csY15" fmla="*/ 18288 h 18288"/>
-              <a:gd name="csX16" fmla="*/ 0 w 4480560"/>
-              <a:gd name="csY16" fmla="*/ 0 h 18288"/>
-            </a:gdLst>
-            <a:ahLst/>
-            <a:cxnLst>
-              <a:cxn ang="0">
-                <a:pos x="csX0" y="csY0"/>
-              </a:cxn>
-              <a:cxn ang="0">
-                <a:pos x="csX1" y="csY1"/>
-              </a:cxn>
-              <a:cxn ang="0">
-                <a:pos x="csX2" y="csY2"/>
-              </a:cxn>
-              <a:cxn ang="0">
-                <a:pos x="csX3" y="csY3"/>
-              </a:cxn>
-              <a:cxn ang="0">
-                <a:pos x="csX4" y="csY4"/>
-              </a:cxn>
-              <a:cxn ang="0">
-                <a:pos x="csX5" y="csY5"/>
-              </a:cxn>
-              <a:cxn ang="0">
-                <a:pos x="csX6" y="csY6"/>
-              </a:cxn>
-              <a:cxn ang="0">
-                <a:pos x="csX7" y="csY7"/>
-              </a:cxn>
-              <a:cxn ang="0">
-                <a:pos x="csX8" y="csY8"/>
-              </a:cxn>
-              <a:cxn ang="0">
-                <a:pos x="csX9" y="csY9"/>
-              </a:cxn>
-              <a:cxn ang="0">
-                <a:pos x="csX10" y="csY10"/>
-              </a:cxn>
-              <a:cxn ang="0">
-                <a:pos x="csX11" y="csY11"/>
-              </a:cxn>
-              <a:cxn ang="0">
-                <a:pos x="csX12" y="csY12"/>
-              </a:cxn>
-              <a:cxn ang="0">
-                <a:pos x="csX13" y="csY13"/>
-              </a:cxn>
-              <a:cxn ang="0">
-                <a:pos x="csX14" y="csY14"/>
-              </a:cxn>
-              <a:cxn ang="0">
-                <a:pos x="csX15" y="csY15"/>
-              </a:cxn>
-              <a:cxn ang="0">
-                <a:pos x="csX16" y="csY16"/>
-              </a:cxn>
-            </a:cxnLst>
-            <a:rect l="l" t="t" r="r" b="b"/>
-            <a:pathLst>
-              <a:path w="4480560" h="18288" fill="none" extrusionOk="0">
-                <a:moveTo>
-                  <a:pt x="0" y="0"/>
-                </a:moveTo>
-                <a:cubicBezTo>
-                  <a:pt x="267821" y="8731"/>
-                  <a:pt x="334105" y="2629"/>
-                  <a:pt x="595274" y="0"/>
-                </a:cubicBezTo>
-                <a:cubicBezTo>
-                  <a:pt x="856443" y="-2629"/>
-                  <a:pt x="863808" y="-13353"/>
-                  <a:pt x="1100938" y="0"/>
-                </a:cubicBezTo>
-                <a:cubicBezTo>
-                  <a:pt x="1338068" y="13353"/>
-                  <a:pt x="1431663" y="-25862"/>
-                  <a:pt x="1651406" y="0"/>
-                </a:cubicBezTo>
-                <a:cubicBezTo>
-                  <a:pt x="1871149" y="25862"/>
-                  <a:pt x="2173163" y="23827"/>
-                  <a:pt x="2336292" y="0"/>
-                </a:cubicBezTo>
-                <a:cubicBezTo>
-                  <a:pt x="2499421" y="-23827"/>
-                  <a:pt x="2720589" y="28148"/>
-                  <a:pt x="2931566" y="0"/>
-                </a:cubicBezTo>
-                <a:cubicBezTo>
-                  <a:pt x="3142543" y="-28148"/>
-                  <a:pt x="3323630" y="27022"/>
-                  <a:pt x="3482035" y="0"/>
-                </a:cubicBezTo>
-                <a:cubicBezTo>
-                  <a:pt x="3640440" y="-27022"/>
-                  <a:pt x="4012110" y="-20118"/>
-                  <a:pt x="4480560" y="0"/>
-                </a:cubicBezTo>
-                <a:cubicBezTo>
-                  <a:pt x="4480958" y="7429"/>
-                  <a:pt x="4480540" y="10822"/>
-                  <a:pt x="4480560" y="18288"/>
-                </a:cubicBezTo>
-                <a:cubicBezTo>
-                  <a:pt x="4314132" y="14924"/>
-                  <a:pt x="4028383" y="36632"/>
-                  <a:pt x="3840480" y="18288"/>
-                </a:cubicBezTo>
-                <a:cubicBezTo>
-                  <a:pt x="3652577" y="-56"/>
-                  <a:pt x="3547615" y="2848"/>
-                  <a:pt x="3290011" y="18288"/>
-                </a:cubicBezTo>
-                <a:cubicBezTo>
-                  <a:pt x="3032407" y="33728"/>
-                  <a:pt x="2830268" y="8719"/>
-                  <a:pt x="2560320" y="18288"/>
-                </a:cubicBezTo>
-                <a:cubicBezTo>
-                  <a:pt x="2290372" y="27857"/>
-                  <a:pt x="2147422" y="6728"/>
-                  <a:pt x="1965046" y="18288"/>
-                </a:cubicBezTo>
-                <a:cubicBezTo>
-                  <a:pt x="1782670" y="29848"/>
-                  <a:pt x="1689791" y="40680"/>
-                  <a:pt x="1459382" y="18288"/>
-                </a:cubicBezTo>
-                <a:cubicBezTo>
-                  <a:pt x="1228973" y="-4104"/>
-                  <a:pt x="915486" y="36501"/>
-                  <a:pt x="774497" y="18288"/>
-                </a:cubicBezTo>
-                <a:cubicBezTo>
-                  <a:pt x="633508" y="75"/>
-                  <a:pt x="361442" y="-11107"/>
-                  <a:pt x="0" y="18288"/>
-                </a:cubicBezTo>
-                <a:cubicBezTo>
-                  <a:pt x="-591" y="13205"/>
-                  <a:pt x="-663" y="6329"/>
-                  <a:pt x="0" y="0"/>
-                </a:cubicBezTo>
-                <a:close/>
-              </a:path>
-              <a:path w="4480560" h="18288" stroke="0" extrusionOk="0">
-                <a:moveTo>
-                  <a:pt x="0" y="0"/>
-                </a:moveTo>
-                <a:cubicBezTo>
-                  <a:pt x="285465" y="225"/>
-                  <a:pt x="322691" y="16223"/>
-                  <a:pt x="595274" y="0"/>
-                </a:cubicBezTo>
-                <a:cubicBezTo>
-                  <a:pt x="867857" y="-16223"/>
-                  <a:pt x="989129" y="-11242"/>
-                  <a:pt x="1100938" y="0"/>
-                </a:cubicBezTo>
-                <a:cubicBezTo>
-                  <a:pt x="1212747" y="11242"/>
-                  <a:pt x="1574350" y="-36410"/>
-                  <a:pt x="1830629" y="0"/>
-                </a:cubicBezTo>
-                <a:cubicBezTo>
-                  <a:pt x="2086908" y="36410"/>
-                  <a:pt x="2180922" y="4645"/>
-                  <a:pt x="2425903" y="0"/>
-                </a:cubicBezTo>
-                <a:cubicBezTo>
-                  <a:pt x="2670884" y="-4645"/>
-                  <a:pt x="2782024" y="22929"/>
-                  <a:pt x="3021178" y="0"/>
-                </a:cubicBezTo>
-                <a:cubicBezTo>
-                  <a:pt x="3260332" y="-22929"/>
-                  <a:pt x="3456982" y="-1586"/>
-                  <a:pt x="3750869" y="0"/>
-                </a:cubicBezTo>
-                <a:cubicBezTo>
-                  <a:pt x="4044756" y="1586"/>
-                  <a:pt x="4302726" y="17043"/>
-                  <a:pt x="4480560" y="0"/>
-                </a:cubicBezTo>
-                <a:cubicBezTo>
-                  <a:pt x="4479674" y="5429"/>
-                  <a:pt x="4481381" y="14046"/>
-                  <a:pt x="4480560" y="18288"/>
-                </a:cubicBezTo>
-                <a:cubicBezTo>
-                  <a:pt x="4279652" y="-6850"/>
-                  <a:pt x="4200762" y="41566"/>
-                  <a:pt x="3930091" y="18288"/>
-                </a:cubicBezTo>
-                <a:cubicBezTo>
-                  <a:pt x="3659420" y="-4990"/>
-                  <a:pt x="3456052" y="22294"/>
-                  <a:pt x="3290011" y="18288"/>
-                </a:cubicBezTo>
-                <a:cubicBezTo>
-                  <a:pt x="3123970" y="14282"/>
-                  <a:pt x="2882392" y="32818"/>
-                  <a:pt x="2649931" y="18288"/>
-                </a:cubicBezTo>
-                <a:cubicBezTo>
-                  <a:pt x="2417470" y="3758"/>
-                  <a:pt x="2238426" y="7337"/>
-                  <a:pt x="2054657" y="18288"/>
-                </a:cubicBezTo>
-                <a:cubicBezTo>
-                  <a:pt x="1870888" y="29239"/>
-                  <a:pt x="1566368" y="45040"/>
-                  <a:pt x="1324966" y="18288"/>
-                </a:cubicBezTo>
-                <a:cubicBezTo>
-                  <a:pt x="1083564" y="-8464"/>
-                  <a:pt x="787410" y="10946"/>
-                  <a:pt x="595274" y="18288"/>
-                </a:cubicBezTo>
-                <a:cubicBezTo>
-                  <a:pt x="403138" y="25630"/>
-                  <a:pt x="169622" y="10499"/>
-                  <a:pt x="0" y="18288"/>
-                </a:cubicBezTo>
-                <a:cubicBezTo>
-                  <a:pt x="668" y="13665"/>
-                  <a:pt x="578" y="5675"/>
-                  <a:pt x="0" y="0"/>
-                </a:cubicBezTo>
-                <a:close/>
-              </a:path>
-            </a:pathLst>
-          </a:custGeom>
-          <a:solidFill>
-            <a:schemeClr val="accent2"/>
-          </a:solidFill>
-          <a:ln w="41275" cap="rnd">
-            <a:solidFill>
-              <a:schemeClr val="accent2"/>
-            </a:solidFill>
-            <a:round/>
-            <a:extLst>
-              <a:ext uri="{C807C97D-BFC1-408E-A445-0C87EB9F89A2}">
-                <ask:lineSketchStyleProps xmlns:ask="http://schemas.microsoft.com/office/drawing/2018/sketchyshapes" sd="1219033472">
-                  <a:prstGeom prst="rect">
-                    <a:avLst/>
-                  </a:prstGeom>
-                  <ask:type>
-                    <ask:lineSketchFreehand/>
-                  </ask:type>
-                </ask:lineSketchStyleProps>
-              </a:ext>
-            </a:extLst>
-          </a:ln>
-        </p:spPr>
-        <p:style>
-          <a:lnRef idx="2">
-            <a:schemeClr val="accent1">
-              <a:shade val="50000"/>
-            </a:schemeClr>
-          </a:lnRef>
-          <a:fillRef idx="1">
-            <a:schemeClr val="accent1"/>
-          </a:fillRef>
-          <a:effectRef idx="0">
-            <a:schemeClr val="accent1"/>
-          </a:effectRef>
-          <a:fontRef idx="minor">
-            <a:schemeClr val="lt1"/>
-          </a:fontRef>
-        </p:style>
-        <p:txBody>
-          <a:bodyPr rtlCol="0" anchor="ctr"/>
-          <a:lstStyle/>
-          <a:p>
-            <a:pPr algn="ctr"/>
-            <a:endParaRPr lang="en-US"/>
-          </a:p>
-        </p:txBody>
-      </p:sp>
-      <p:sp>
-        <p:nvSpPr>
-          <p:cNvPr id="3" name="Content Placeholder 2">
-            <a:extLst>
-              <a:ext uri="{FF2B5EF4-FFF2-40B4-BE49-F238E27FC236}">
-                <a16:creationId xmlns:a16="http://schemas.microsoft.com/office/drawing/2014/main" id="{16683ECF-3A97-D7EE-4A8F-CE5E73BC7C4D}"/>
-              </a:ext>
-            </a:extLst>
-          </p:cNvPr>
-          <p:cNvSpPr>
-            <a:spLocks noGrp="1"/>
-          </p:cNvSpPr>
-          <p:nvPr>
-            <p:ph idx="1"/>
-          </p:nvPr>
-        </p:nvSpPr>
-        <p:spPr>
-          <a:xfrm>
-            <a:off x="5126418" y="552091"/>
-            <a:ext cx="6224335" cy="5431536"/>
-          </a:xfrm>
-        </p:spPr>
-        <p:txBody>
-          <a:bodyPr anchor="ctr">
-            <a:normAutofit fontScale="92500" lnSpcReduction="10000"/>
-          </a:bodyPr>
-          <a:lstStyle/>
-          <a:p>
-            <a:pPr marL="0" marR="0">
-              <a:buNone/>
-            </a:pPr>
-            <a:r>
-              <a:rPr lang="en-US" sz="1700" b="1" dirty="0">
-                <a:effectLst/>
-                <a:latin typeface="Calibri" panose="020F0502020204030204" pitchFamily="34" charset="0"/>
-              </a:rPr>
-              <a:t>Formatter</a:t>
-            </a:r>
-          </a:p>
-          <a:p>
-            <a:pPr marL="0" marR="0">
-              <a:buNone/>
-            </a:pPr>
-            <a:r>
-              <a:rPr lang="en-US" sz="1700" dirty="0">
-                <a:effectLst/>
-                <a:latin typeface="Calibri" panose="020F0502020204030204" pitchFamily="34" charset="0"/>
-              </a:rPr>
-              <a:t>Poor Man's T-</a:t>
-            </a:r>
-            <a:r>
-              <a:rPr lang="en-US" sz="1700" dirty="0" err="1">
-                <a:effectLst/>
-                <a:latin typeface="Calibri" panose="020F0502020204030204" pitchFamily="34" charset="0"/>
-              </a:rPr>
-              <a:t>Sql</a:t>
-            </a:r>
-            <a:r>
-              <a:rPr lang="en-US" sz="1700" dirty="0">
-                <a:effectLst/>
-                <a:latin typeface="Calibri" panose="020F0502020204030204" pitchFamily="34" charset="0"/>
-              </a:rPr>
-              <a:t> Formatter is a VS extension that allows you to format </a:t>
-            </a:r>
-            <a:r>
-              <a:rPr lang="en-US" sz="1700" dirty="0" err="1">
-                <a:effectLst/>
-                <a:latin typeface="Calibri" panose="020F0502020204030204" pitchFamily="34" charset="0"/>
-              </a:rPr>
-              <a:t>sql</a:t>
-            </a:r>
-            <a:r>
-              <a:rPr lang="en-US" sz="1700" dirty="0">
-                <a:effectLst/>
-                <a:latin typeface="Calibri" panose="020F0502020204030204" pitchFamily="34" charset="0"/>
-              </a:rPr>
-              <a:t> code in Visual Studio. It is my preferred formatter for T-SQL</a:t>
-            </a:r>
-          </a:p>
-          <a:p>
-            <a:pPr marL="0" marR="0">
-              <a:buNone/>
-            </a:pPr>
-            <a:r>
-              <a:rPr lang="en-US" sz="1700" dirty="0">
-                <a:effectLst/>
-                <a:latin typeface="Calibri" panose="020F0502020204030204" pitchFamily="34" charset="0"/>
-                <a:hlinkClick r:id="rId3"/>
-              </a:rPr>
-              <a:t>https://marketplace.visualstudio.com/items?itemName=mick9956.PoorMansTSqlFormatter</a:t>
-            </a:r>
-            <a:endParaRPr lang="en-US" sz="1700" dirty="0">
-              <a:effectLst/>
-              <a:latin typeface="Calibri" panose="020F0502020204030204" pitchFamily="34" charset="0"/>
-            </a:endParaRPr>
-          </a:p>
-          <a:p>
-            <a:pPr marL="0" marR="0">
-              <a:buNone/>
-            </a:pPr>
-            <a:r>
-              <a:rPr lang="en-US" sz="1700" b="1" dirty="0">
-                <a:effectLst/>
-                <a:latin typeface="Calibri" panose="020F0502020204030204" pitchFamily="34" charset="0"/>
-              </a:rPr>
-              <a:t>Resources</a:t>
-            </a:r>
-          </a:p>
-          <a:p>
-            <a:pPr marL="57150" indent="-285750"/>
-            <a:r>
-              <a:rPr lang="en-US" sz="1700" dirty="0">
-                <a:effectLst/>
-                <a:latin typeface="Calibri" panose="020F0502020204030204" pitchFamily="34" charset="0"/>
-                <a:hlinkClick r:id="rId4"/>
-              </a:rPr>
-              <a:t>Get started with SQL database projects - SQL Server | Microsoft Learn</a:t>
-            </a:r>
-            <a:r>
-              <a:rPr lang="en-US" sz="1700" dirty="0">
-                <a:effectLst/>
-                <a:latin typeface="Calibri" panose="020F0502020204030204" pitchFamily="34" charset="0"/>
-              </a:rPr>
-              <a:t> ( </a:t>
-            </a:r>
-            <a:r>
-              <a:rPr lang="en-US" sz="1700" dirty="0">
-                <a:latin typeface="Calibri" panose="020F0502020204030204" pitchFamily="34" charset="0"/>
-                <a:hlinkClick r:id="rId5"/>
-              </a:rPr>
-              <a:t>https://learn.microsoft.com/en-us/sql/tools/sql-database-projects/get-started</a:t>
-            </a:r>
-            <a:r>
-              <a:rPr lang="en-US" sz="1700" dirty="0">
-                <a:latin typeface="Calibri" panose="020F0502020204030204" pitchFamily="34" charset="0"/>
-              </a:rPr>
-              <a:t> </a:t>
-            </a:r>
-            <a:r>
-              <a:rPr lang="en-US" sz="1700" dirty="0">
-                <a:effectLst/>
-                <a:latin typeface="Calibri" panose="020F0502020204030204" pitchFamily="34" charset="0"/>
-              </a:rPr>
-              <a:t>)</a:t>
-            </a:r>
-          </a:p>
-          <a:p>
-            <a:pPr marL="57150" indent="-285750"/>
-            <a:r>
-              <a:rPr lang="en-US" sz="1700" dirty="0">
-                <a:effectLst/>
-                <a:latin typeface="Calibri" panose="020F0502020204030204" pitchFamily="34" charset="0"/>
-                <a:hlinkClick r:id="rId6"/>
-              </a:rPr>
-              <a:t>9 Tips for Faster SQL Server Applications - Brent Ozar Unlimited®</a:t>
-            </a:r>
-            <a:r>
-              <a:rPr lang="en-US" sz="1700" dirty="0">
-                <a:effectLst/>
-                <a:latin typeface="Calibri" panose="020F0502020204030204" pitchFamily="34" charset="0"/>
-              </a:rPr>
-              <a:t> (</a:t>
-            </a:r>
-            <a:r>
-              <a:rPr lang="en-US" sz="1700" dirty="0">
-                <a:effectLst/>
-                <a:latin typeface="Calibri" panose="020F0502020204030204" pitchFamily="34" charset="0"/>
-                <a:hlinkClick r:id="rId7"/>
-              </a:rPr>
-              <a:t>https://www.brentozar.com/archive/2019/05/9-tips-for-faster-sql-server-applications</a:t>
-            </a:r>
-            <a:r>
-              <a:rPr lang="en-US" sz="1700" dirty="0">
-                <a:effectLst/>
-                <a:latin typeface="Calibri" panose="020F0502020204030204" pitchFamily="34" charset="0"/>
-              </a:rPr>
-              <a:t> )</a:t>
-            </a:r>
-          </a:p>
-          <a:p>
-            <a:pPr marL="57150" indent="-285750"/>
-            <a:r>
-              <a:rPr lang="en-US" sz="1700" dirty="0">
-                <a:effectLst/>
-                <a:latin typeface="Calibri" panose="020F0502020204030204" pitchFamily="34" charset="0"/>
-                <a:hlinkClick r:id="rId8"/>
-              </a:rPr>
-              <a:t>https://jptarqu.blogspot.com/2023/04/add-sql-server-database-projects-to-ci.html</a:t>
-            </a:r>
-            <a:endParaRPr lang="en-US" sz="1700" dirty="0">
-              <a:effectLst/>
-              <a:latin typeface="Calibri" panose="020F0502020204030204" pitchFamily="34" charset="0"/>
-            </a:endParaRPr>
-          </a:p>
-          <a:p>
-            <a:r>
-              <a:rPr lang="en-US" sz="1700" dirty="0" err="1">
-                <a:effectLst/>
-                <a:latin typeface="Calibri" panose="020F0502020204030204" pitchFamily="34" charset="0"/>
-                <a:hlinkClick r:id="rId9"/>
-              </a:rPr>
-              <a:t>SqlPackage</a:t>
-            </a:r>
-            <a:r>
-              <a:rPr lang="en-US" sz="1700" dirty="0">
-                <a:effectLst/>
-                <a:latin typeface="Calibri" panose="020F0502020204030204" pitchFamily="34" charset="0"/>
-                <a:hlinkClick r:id="rId9"/>
-              </a:rPr>
-              <a:t> Publish - SQL Server | Microsoft Learn</a:t>
-            </a:r>
-            <a:r>
-              <a:rPr lang="en-US" sz="1700" dirty="0">
-                <a:effectLst/>
-                <a:latin typeface="Calibri" panose="020F0502020204030204" pitchFamily="34" charset="0"/>
-              </a:rPr>
-              <a:t> (</a:t>
-            </a:r>
-            <a:r>
-              <a:rPr lang="en-US" sz="1700" dirty="0">
-                <a:latin typeface="Calibri" panose="020F0502020204030204" pitchFamily="34" charset="0"/>
-                <a:hlinkClick r:id="rId10"/>
-              </a:rPr>
-              <a:t>https://learn.microsoft.com/en-us/sql/tools/sqlpackage/sqlpackage-publish</a:t>
-            </a:r>
-            <a:r>
-              <a:rPr lang="en-US" sz="1700" dirty="0">
-                <a:latin typeface="Calibri" panose="020F0502020204030204" pitchFamily="34" charset="0"/>
-              </a:rPr>
-              <a:t> </a:t>
-            </a:r>
-            <a:r>
-              <a:rPr lang="en-US" sz="1700" dirty="0">
-                <a:effectLst/>
-                <a:latin typeface="Calibri" panose="020F0502020204030204" pitchFamily="34" charset="0"/>
-              </a:rPr>
-              <a:t> )</a:t>
-            </a:r>
-          </a:p>
-          <a:p>
-            <a:r>
-              <a:rPr lang="en-US" sz="1700" dirty="0">
-                <a:effectLst/>
-                <a:latin typeface="Calibri" panose="020F0502020204030204" pitchFamily="34" charset="0"/>
-                <a:hlinkClick r:id="rId11"/>
-              </a:rPr>
-              <a:t>https://learn.microsoft.com/en-us/sql/tools/sql-database-projects/concepts/database-references?view=sql-server-ver17&amp;pivots=sq1-visual-studio</a:t>
-            </a:r>
-            <a:r>
-              <a:rPr lang="en-US" sz="1700" dirty="0">
-                <a:effectLst/>
-                <a:latin typeface="Calibri" panose="020F0502020204030204" pitchFamily="34" charset="0"/>
-              </a:rPr>
-              <a:t> </a:t>
-            </a:r>
-          </a:p>
-          <a:p>
-            <a:endParaRPr lang="en-US" sz="1700" dirty="0"/>
-          </a:p>
-        </p:txBody>
-      </p:sp>
-    </p:spTree>
-    <p:extLst>
-      <p:ext uri="{BB962C8B-B14F-4D97-AF65-F5344CB8AC3E}">
-        <p14:creationId xmlns:p14="http://schemas.microsoft.com/office/powerpoint/2010/main" val="3822062440"/>
       </p:ext>
     </p:extLst>
   </p:cSld>
@@ -28347,182 +27747,6 @@
 <file path=ppt/slides/slide30.xml><?xml version="1.0" encoding="utf-8"?>
 <p:sld xmlns:a="http://schemas.openxmlformats.org/drawingml/2006/main" xmlns:r="http://schemas.openxmlformats.org/officeDocument/2006/relationships" xmlns:p="http://schemas.openxmlformats.org/presentationml/2006/main">
   <p:cSld>
-    <p:spTree>
-      <p:nvGrpSpPr>
-        <p:cNvPr id="1" name="">
-          <a:extLst>
-            <a:ext uri="{FF2B5EF4-FFF2-40B4-BE49-F238E27FC236}">
-              <a16:creationId xmlns:a16="http://schemas.microsoft.com/office/drawing/2014/main" id="{93D22FE9-DBFD-41B7-3F83-B34A6314E566}"/>
-            </a:ext>
-          </a:extLst>
-        </p:cNvPr>
-        <p:cNvGrpSpPr/>
-        <p:nvPr/>
-      </p:nvGrpSpPr>
-      <p:grpSpPr>
-        <a:xfrm>
-          <a:off x="0" y="0"/>
-          <a:ext cx="0" cy="0"/>
-          <a:chOff x="0" y="0"/>
-          <a:chExt cx="0" cy="0"/>
-        </a:xfrm>
-      </p:grpSpPr>
-      <p:sp>
-        <p:nvSpPr>
-          <p:cNvPr id="2" name="Title 1">
-            <a:extLst>
-              <a:ext uri="{FF2B5EF4-FFF2-40B4-BE49-F238E27FC236}">
-                <a16:creationId xmlns:a16="http://schemas.microsoft.com/office/drawing/2014/main" id="{1EB26454-B13E-DA78-41B0-2D3D6374D17A}"/>
-              </a:ext>
-            </a:extLst>
-          </p:cNvPr>
-          <p:cNvSpPr>
-            <a:spLocks noGrp="1"/>
-          </p:cNvSpPr>
-          <p:nvPr>
-            <p:ph type="title"/>
-          </p:nvPr>
-        </p:nvSpPr>
-        <p:spPr>
-          <a:xfrm>
-            <a:off x="841248" y="548640"/>
-            <a:ext cx="3600860" cy="5431536"/>
-          </a:xfrm>
-        </p:spPr>
-        <p:txBody>
-          <a:bodyPr>
-            <a:normAutofit/>
-          </a:bodyPr>
-          <a:lstStyle/>
-          <a:p>
-            <a:r>
-              <a:rPr lang="en-US" sz="5400"/>
-              <a:t>Additional Resources</a:t>
-            </a:r>
-          </a:p>
-        </p:txBody>
-      </p:sp>
-      <p:sp>
-        <p:nvSpPr>
-          <p:cNvPr id="3" name="Content Placeholder 2">
-            <a:extLst>
-              <a:ext uri="{FF2B5EF4-FFF2-40B4-BE49-F238E27FC236}">
-                <a16:creationId xmlns:a16="http://schemas.microsoft.com/office/drawing/2014/main" id="{6FB8ADDA-F911-B32E-1FE9-3E8F8478173F}"/>
-              </a:ext>
-            </a:extLst>
-          </p:cNvPr>
-          <p:cNvSpPr>
-            <a:spLocks noGrp="1"/>
-          </p:cNvSpPr>
-          <p:nvPr>
-            <p:ph idx="1"/>
-          </p:nvPr>
-        </p:nvSpPr>
-        <p:spPr>
-          <a:xfrm>
-            <a:off x="5126418" y="552091"/>
-            <a:ext cx="6224335" cy="5431536"/>
-          </a:xfrm>
-        </p:spPr>
-        <p:txBody>
-          <a:bodyPr anchor="ctr">
-            <a:normAutofit/>
-          </a:bodyPr>
-          <a:lstStyle/>
-          <a:p>
-            <a:pPr marL="0" marR="0">
-              <a:buNone/>
-            </a:pPr>
-            <a:r>
-              <a:rPr lang="en-US" sz="1700" b="1" dirty="0">
-                <a:effectLst/>
-                <a:latin typeface="Calibri" panose="020F0502020204030204" pitchFamily="34" charset="0"/>
-              </a:rPr>
-              <a:t>Resources</a:t>
-            </a:r>
-          </a:p>
-          <a:p>
-            <a:pPr fontAlgn="ctr"/>
-            <a:r>
-              <a:rPr lang="en-US" dirty="0">
-                <a:hlinkClick r:id="rId3"/>
-              </a:rPr>
-              <a:t>sql-projects-devops-samples/Demos/2-ContinuousIntegration.md at main · Azure-Samples/</a:t>
-            </a:r>
-            <a:r>
-              <a:rPr lang="en-US" dirty="0" err="1">
-                <a:hlinkClick r:id="rId3"/>
-              </a:rPr>
-              <a:t>sql</a:t>
-            </a:r>
-            <a:r>
-              <a:rPr lang="en-US" dirty="0">
-                <a:hlinkClick r:id="rId3"/>
-              </a:rPr>
-              <a:t>-projects-</a:t>
-            </a:r>
-            <a:r>
-              <a:rPr lang="en-US" dirty="0" err="1">
-                <a:hlinkClick r:id="rId3"/>
-              </a:rPr>
-              <a:t>devops</a:t>
-            </a:r>
-            <a:r>
-              <a:rPr lang="en-US" dirty="0">
-                <a:hlinkClick r:id="rId3"/>
-              </a:rPr>
-              <a:t>-samples · GitHub</a:t>
-            </a:r>
-            <a:r>
-              <a:rPr lang="en-US" dirty="0"/>
-              <a:t> (CI/CD with containers)</a:t>
-            </a:r>
-          </a:p>
-          <a:p>
-            <a:pPr fontAlgn="ctr"/>
-            <a:r>
-              <a:rPr lang="en-US" dirty="0" err="1"/>
-              <a:t>.net</a:t>
-            </a:r>
-            <a:r>
-              <a:rPr lang="en-US" dirty="0"/>
-              <a:t> conf 2024 talk: </a:t>
-            </a:r>
-            <a:r>
-              <a:rPr lang="en-US" dirty="0">
-                <a:hlinkClick r:id="rId4"/>
-              </a:rPr>
-              <a:t>Next-gen SQL projects with </a:t>
-            </a:r>
-            <a:r>
-              <a:rPr lang="en-US" dirty="0" err="1">
-                <a:hlinkClick r:id="rId4"/>
-              </a:rPr>
-              <a:t>Microsoft.Build.Sql</a:t>
-            </a:r>
-            <a:endParaRPr lang="en-US" dirty="0"/>
-          </a:p>
-          <a:p>
-            <a:endParaRPr lang="en-US" sz="1700" dirty="0"/>
-          </a:p>
-        </p:txBody>
-      </p:sp>
-    </p:spTree>
-    <p:extLst>
-      <p:ext uri="{BB962C8B-B14F-4D97-AF65-F5344CB8AC3E}">
-        <p14:creationId xmlns:p14="http://schemas.microsoft.com/office/powerpoint/2010/main" val="2762649843"/>
-      </p:ext>
-    </p:extLst>
-  </p:cSld>
-  <p:clrMapOvr>
-    <a:masterClrMapping/>
-  </p:clrMapOvr>
-</p:sld>
-</file>
-
-<file path=ppt/slides/slide31.xml><?xml version="1.0" encoding="utf-8"?>
-<p:sld xmlns:a="http://schemas.openxmlformats.org/drawingml/2006/main" xmlns:r="http://schemas.openxmlformats.org/officeDocument/2006/relationships" xmlns:p="http://schemas.openxmlformats.org/presentationml/2006/main">
-  <p:cSld>
     <p:bg>
       <p:bgPr>
         <a:solidFill>
@@ -28533,7 +27757,13 @@
     </p:bg>
     <p:spTree>
       <p:nvGrpSpPr>
-        <p:cNvPr id="1" name=""/>
+        <p:cNvPr id="1" name="">
+          <a:extLst>
+            <a:ext uri="{FF2B5EF4-FFF2-40B4-BE49-F238E27FC236}">
+              <a16:creationId xmlns:a16="http://schemas.microsoft.com/office/drawing/2014/main" id="{E15886ED-D919-B5F1-9F94-257220A369FC}"/>
+            </a:ext>
+          </a:extLst>
+        </p:cNvPr>
         <p:cNvGrpSpPr/>
         <p:nvPr/>
       </p:nvGrpSpPr>
@@ -28610,7 +27840,7 @@
           <p:cNvPr id="2" name="Title 1">
             <a:extLst>
               <a:ext uri="{FF2B5EF4-FFF2-40B4-BE49-F238E27FC236}">
-                <a16:creationId xmlns:a16="http://schemas.microsoft.com/office/drawing/2014/main" id="{5E1647F5-9F62-325D-53BD-AB7FF4132B48}"/>
+                <a16:creationId xmlns:a16="http://schemas.microsoft.com/office/drawing/2014/main" id="{F0D2B4A5-A437-139E-1D1D-32A79EC1424D}"/>
               </a:ext>
             </a:extLst>
           </p:cNvPr>
@@ -28635,7 +27865,7 @@
           <a:p>
             <a:r>
               <a:rPr lang="en-US" sz="5400"/>
-              <a:t>SQL Projects for the Win!!!</a:t>
+              <a:t>Additional Resources</a:t>
             </a:r>
           </a:p>
         </p:txBody>
@@ -28988,7 +28218,339 @@
           <p:cNvPr id="3" name="Content Placeholder 2">
             <a:extLst>
               <a:ext uri="{FF2B5EF4-FFF2-40B4-BE49-F238E27FC236}">
-                <a16:creationId xmlns:a16="http://schemas.microsoft.com/office/drawing/2014/main" id="{1BBC1F27-5C52-251A-88F6-6A903623B483}"/>
+                <a16:creationId xmlns:a16="http://schemas.microsoft.com/office/drawing/2014/main" id="{16683ECF-3A97-D7EE-4A8F-CE5E73BC7C4D}"/>
+              </a:ext>
+            </a:extLst>
+          </p:cNvPr>
+          <p:cNvSpPr>
+            <a:spLocks noGrp="1"/>
+          </p:cNvSpPr>
+          <p:nvPr>
+            <p:ph idx="1"/>
+          </p:nvPr>
+        </p:nvSpPr>
+        <p:spPr>
+          <a:xfrm>
+            <a:off x="5126418" y="552091"/>
+            <a:ext cx="6224335" cy="5431536"/>
+          </a:xfrm>
+        </p:spPr>
+        <p:txBody>
+          <a:bodyPr anchor="ctr">
+            <a:normAutofit fontScale="92500" lnSpcReduction="10000"/>
+          </a:bodyPr>
+          <a:lstStyle/>
+          <a:p>
+            <a:pPr marL="0" marR="0">
+              <a:buNone/>
+            </a:pPr>
+            <a:r>
+              <a:rPr lang="en-US" sz="1700" b="1" dirty="0">
+                <a:effectLst/>
+                <a:latin typeface="Calibri" panose="020F0502020204030204" pitchFamily="34" charset="0"/>
+              </a:rPr>
+              <a:t>Formatter</a:t>
+            </a:r>
+          </a:p>
+          <a:p>
+            <a:pPr marL="0" marR="0">
+              <a:buNone/>
+            </a:pPr>
+            <a:r>
+              <a:rPr lang="en-US" sz="1700" dirty="0">
+                <a:effectLst/>
+                <a:latin typeface="Calibri" panose="020F0502020204030204" pitchFamily="34" charset="0"/>
+              </a:rPr>
+              <a:t>Poor Man's T-</a:t>
+            </a:r>
+            <a:r>
+              <a:rPr lang="en-US" sz="1700" dirty="0" err="1">
+                <a:effectLst/>
+                <a:latin typeface="Calibri" panose="020F0502020204030204" pitchFamily="34" charset="0"/>
+              </a:rPr>
+              <a:t>Sql</a:t>
+            </a:r>
+            <a:r>
+              <a:rPr lang="en-US" sz="1700" dirty="0">
+                <a:effectLst/>
+                <a:latin typeface="Calibri" panose="020F0502020204030204" pitchFamily="34" charset="0"/>
+              </a:rPr>
+              <a:t> Formatter is a VS extension that allows you to format </a:t>
+            </a:r>
+            <a:r>
+              <a:rPr lang="en-US" sz="1700" dirty="0" err="1">
+                <a:effectLst/>
+                <a:latin typeface="Calibri" panose="020F0502020204030204" pitchFamily="34" charset="0"/>
+              </a:rPr>
+              <a:t>sql</a:t>
+            </a:r>
+            <a:r>
+              <a:rPr lang="en-US" sz="1700" dirty="0">
+                <a:effectLst/>
+                <a:latin typeface="Calibri" panose="020F0502020204030204" pitchFamily="34" charset="0"/>
+              </a:rPr>
+              <a:t> code in Visual Studio. It is my preferred formatter for T-SQL</a:t>
+            </a:r>
+          </a:p>
+          <a:p>
+            <a:pPr marL="0" marR="0">
+              <a:buNone/>
+            </a:pPr>
+            <a:r>
+              <a:rPr lang="en-US" sz="1700" dirty="0">
+                <a:effectLst/>
+                <a:latin typeface="Calibri" panose="020F0502020204030204" pitchFamily="34" charset="0"/>
+                <a:hlinkClick r:id="rId3"/>
+              </a:rPr>
+              <a:t>https://marketplace.visualstudio.com/items?itemName=mick9956.PoorMansTSqlFormatter</a:t>
+            </a:r>
+            <a:endParaRPr lang="en-US" sz="1700" dirty="0">
+              <a:effectLst/>
+              <a:latin typeface="Calibri" panose="020F0502020204030204" pitchFamily="34" charset="0"/>
+            </a:endParaRPr>
+          </a:p>
+          <a:p>
+            <a:pPr marL="0" marR="0">
+              <a:buNone/>
+            </a:pPr>
+            <a:r>
+              <a:rPr lang="en-US" sz="1700" b="1" dirty="0">
+                <a:effectLst/>
+                <a:latin typeface="Calibri" panose="020F0502020204030204" pitchFamily="34" charset="0"/>
+              </a:rPr>
+              <a:t>Resources</a:t>
+            </a:r>
+          </a:p>
+          <a:p>
+            <a:pPr marL="57150" indent="-285750"/>
+            <a:r>
+              <a:rPr lang="en-US" sz="1700" dirty="0">
+                <a:effectLst/>
+                <a:latin typeface="Calibri" panose="020F0502020204030204" pitchFamily="34" charset="0"/>
+                <a:hlinkClick r:id="rId4"/>
+              </a:rPr>
+              <a:t>Get started with SQL database projects - SQL Server | Microsoft Learn</a:t>
+            </a:r>
+            <a:r>
+              <a:rPr lang="en-US" sz="1700" dirty="0">
+                <a:effectLst/>
+                <a:latin typeface="Calibri" panose="020F0502020204030204" pitchFamily="34" charset="0"/>
+              </a:rPr>
+              <a:t> ( </a:t>
+            </a:r>
+            <a:r>
+              <a:rPr lang="en-US" sz="1700" dirty="0">
+                <a:latin typeface="Calibri" panose="020F0502020204030204" pitchFamily="34" charset="0"/>
+                <a:hlinkClick r:id="rId5"/>
+              </a:rPr>
+              <a:t>https://learn.microsoft.com/en-us/sql/tools/sql-database-projects/get-started</a:t>
+            </a:r>
+            <a:r>
+              <a:rPr lang="en-US" sz="1700" dirty="0">
+                <a:latin typeface="Calibri" panose="020F0502020204030204" pitchFamily="34" charset="0"/>
+              </a:rPr>
+              <a:t> </a:t>
+            </a:r>
+            <a:r>
+              <a:rPr lang="en-US" sz="1700" dirty="0">
+                <a:effectLst/>
+                <a:latin typeface="Calibri" panose="020F0502020204030204" pitchFamily="34" charset="0"/>
+              </a:rPr>
+              <a:t>)</a:t>
+            </a:r>
+          </a:p>
+          <a:p>
+            <a:pPr marL="57150" indent="-285750"/>
+            <a:r>
+              <a:rPr lang="en-US" sz="1700" dirty="0">
+                <a:effectLst/>
+                <a:latin typeface="Calibri" panose="020F0502020204030204" pitchFamily="34" charset="0"/>
+                <a:hlinkClick r:id="rId6"/>
+              </a:rPr>
+              <a:t>9 Tips for Faster SQL Server Applications - Brent Ozar Unlimited®</a:t>
+            </a:r>
+            <a:r>
+              <a:rPr lang="en-US" sz="1700" dirty="0">
+                <a:effectLst/>
+                <a:latin typeface="Calibri" panose="020F0502020204030204" pitchFamily="34" charset="0"/>
+              </a:rPr>
+              <a:t> (</a:t>
+            </a:r>
+            <a:r>
+              <a:rPr lang="en-US" sz="1700" dirty="0">
+                <a:effectLst/>
+                <a:latin typeface="Calibri" panose="020F0502020204030204" pitchFamily="34" charset="0"/>
+                <a:hlinkClick r:id="rId7"/>
+              </a:rPr>
+              <a:t>https://www.brentozar.com/archive/2019/05/9-tips-for-faster-sql-server-applications</a:t>
+            </a:r>
+            <a:r>
+              <a:rPr lang="en-US" sz="1700" dirty="0">
+                <a:effectLst/>
+                <a:latin typeface="Calibri" panose="020F0502020204030204" pitchFamily="34" charset="0"/>
+              </a:rPr>
+              <a:t> )</a:t>
+            </a:r>
+          </a:p>
+          <a:p>
+            <a:pPr marL="57150" indent="-285750"/>
+            <a:r>
+              <a:rPr lang="en-US" sz="1700" dirty="0">
+                <a:effectLst/>
+                <a:latin typeface="Calibri" panose="020F0502020204030204" pitchFamily="34" charset="0"/>
+                <a:hlinkClick r:id="rId8"/>
+              </a:rPr>
+              <a:t>https://jptarqu.blogspot.com/2023/04/add-sql-server-database-projects-to-ci.html</a:t>
+            </a:r>
+            <a:endParaRPr lang="en-US" sz="1700" dirty="0">
+              <a:effectLst/>
+              <a:latin typeface="Calibri" panose="020F0502020204030204" pitchFamily="34" charset="0"/>
+            </a:endParaRPr>
+          </a:p>
+          <a:p>
+            <a:r>
+              <a:rPr lang="en-US" sz="1700" dirty="0" err="1">
+                <a:effectLst/>
+                <a:latin typeface="Calibri" panose="020F0502020204030204" pitchFamily="34" charset="0"/>
+                <a:hlinkClick r:id="rId9"/>
+              </a:rPr>
+              <a:t>SqlPackage</a:t>
+            </a:r>
+            <a:r>
+              <a:rPr lang="en-US" sz="1700" dirty="0">
+                <a:effectLst/>
+                <a:latin typeface="Calibri" panose="020F0502020204030204" pitchFamily="34" charset="0"/>
+                <a:hlinkClick r:id="rId9"/>
+              </a:rPr>
+              <a:t> Publish - SQL Server | Microsoft Learn</a:t>
+            </a:r>
+            <a:r>
+              <a:rPr lang="en-US" sz="1700" dirty="0">
+                <a:effectLst/>
+                <a:latin typeface="Calibri" panose="020F0502020204030204" pitchFamily="34" charset="0"/>
+              </a:rPr>
+              <a:t> (</a:t>
+            </a:r>
+            <a:r>
+              <a:rPr lang="en-US" sz="1700" dirty="0">
+                <a:latin typeface="Calibri" panose="020F0502020204030204" pitchFamily="34" charset="0"/>
+                <a:hlinkClick r:id="rId10"/>
+              </a:rPr>
+              <a:t>https://learn.microsoft.com/en-us/sql/tools/sqlpackage/sqlpackage-publish</a:t>
+            </a:r>
+            <a:r>
+              <a:rPr lang="en-US" sz="1700" dirty="0">
+                <a:latin typeface="Calibri" panose="020F0502020204030204" pitchFamily="34" charset="0"/>
+              </a:rPr>
+              <a:t> </a:t>
+            </a:r>
+            <a:r>
+              <a:rPr lang="en-US" sz="1700" dirty="0">
+                <a:effectLst/>
+                <a:latin typeface="Calibri" panose="020F0502020204030204" pitchFamily="34" charset="0"/>
+              </a:rPr>
+              <a:t> )</a:t>
+            </a:r>
+          </a:p>
+          <a:p>
+            <a:r>
+              <a:rPr lang="en-US" sz="1700" dirty="0">
+                <a:effectLst/>
+                <a:latin typeface="Calibri" panose="020F0502020204030204" pitchFamily="34" charset="0"/>
+                <a:hlinkClick r:id="rId11"/>
+              </a:rPr>
+              <a:t>https://learn.microsoft.com/en-us/sql/tools/sql-database-projects/concepts/database-references?view=sql-server-ver17&amp;pivots=sq1-visual-studio</a:t>
+            </a:r>
+            <a:r>
+              <a:rPr lang="en-US" sz="1700" dirty="0">
+                <a:effectLst/>
+                <a:latin typeface="Calibri" panose="020F0502020204030204" pitchFamily="34" charset="0"/>
+              </a:rPr>
+              <a:t> </a:t>
+            </a:r>
+          </a:p>
+          <a:p>
+            <a:endParaRPr lang="en-US" sz="1700" dirty="0"/>
+          </a:p>
+        </p:txBody>
+      </p:sp>
+    </p:spTree>
+    <p:extLst>
+      <p:ext uri="{BB962C8B-B14F-4D97-AF65-F5344CB8AC3E}">
+        <p14:creationId xmlns:p14="http://schemas.microsoft.com/office/powerpoint/2010/main" val="3822062440"/>
+      </p:ext>
+    </p:extLst>
+  </p:cSld>
+  <p:clrMapOvr>
+    <a:masterClrMapping/>
+  </p:clrMapOvr>
+</p:sld>
+</file>
+
+<file path=ppt/slides/slide31.xml><?xml version="1.0" encoding="utf-8"?>
+<p:sld xmlns:a="http://schemas.openxmlformats.org/drawingml/2006/main" xmlns:r="http://schemas.openxmlformats.org/officeDocument/2006/relationships" xmlns:p="http://schemas.openxmlformats.org/presentationml/2006/main">
+  <p:cSld>
+    <p:spTree>
+      <p:nvGrpSpPr>
+        <p:cNvPr id="1" name="">
+          <a:extLst>
+            <a:ext uri="{FF2B5EF4-FFF2-40B4-BE49-F238E27FC236}">
+              <a16:creationId xmlns:a16="http://schemas.microsoft.com/office/drawing/2014/main" id="{93D22FE9-DBFD-41B7-3F83-B34A6314E566}"/>
+            </a:ext>
+          </a:extLst>
+        </p:cNvPr>
+        <p:cNvGrpSpPr/>
+        <p:nvPr/>
+      </p:nvGrpSpPr>
+      <p:grpSpPr>
+        <a:xfrm>
+          <a:off x="0" y="0"/>
+          <a:ext cx="0" cy="0"/>
+          <a:chOff x="0" y="0"/>
+          <a:chExt cx="0" cy="0"/>
+        </a:xfrm>
+      </p:grpSpPr>
+      <p:sp>
+        <p:nvSpPr>
+          <p:cNvPr id="2" name="Title 1">
+            <a:extLst>
+              <a:ext uri="{FF2B5EF4-FFF2-40B4-BE49-F238E27FC236}">
+                <a16:creationId xmlns:a16="http://schemas.microsoft.com/office/drawing/2014/main" id="{1EB26454-B13E-DA78-41B0-2D3D6374D17A}"/>
+              </a:ext>
+            </a:extLst>
+          </p:cNvPr>
+          <p:cNvSpPr>
+            <a:spLocks noGrp="1"/>
+          </p:cNvSpPr>
+          <p:nvPr>
+            <p:ph type="title"/>
+          </p:nvPr>
+        </p:nvSpPr>
+        <p:spPr>
+          <a:xfrm>
+            <a:off x="841248" y="548640"/>
+            <a:ext cx="3600860" cy="5431536"/>
+          </a:xfrm>
+        </p:spPr>
+        <p:txBody>
+          <a:bodyPr>
+            <a:normAutofit/>
+          </a:bodyPr>
+          <a:lstStyle/>
+          <a:p>
+            <a:r>
+              <a:rPr lang="en-US" sz="5400"/>
+              <a:t>Additional Resources</a:t>
+            </a:r>
+          </a:p>
+        </p:txBody>
+      </p:sp>
+      <p:sp>
+        <p:nvSpPr>
+          <p:cNvPr id="3" name="Content Placeholder 2">
+            <a:extLst>
+              <a:ext uri="{FF2B5EF4-FFF2-40B4-BE49-F238E27FC236}">
+                <a16:creationId xmlns:a16="http://schemas.microsoft.com/office/drawing/2014/main" id="{6FB8ADDA-F911-B32E-1FE9-3E8F8478173F}"/>
               </a:ext>
             </a:extLst>
           </p:cNvPr>
@@ -29011,6 +28573,587 @@
           </a:bodyPr>
           <a:lstStyle/>
           <a:p>
+            <a:pPr marL="0" marR="0">
+              <a:buNone/>
+            </a:pPr>
+            <a:r>
+              <a:rPr lang="en-US" sz="1700" b="1" dirty="0">
+                <a:effectLst/>
+                <a:latin typeface="Calibri" panose="020F0502020204030204" pitchFamily="34" charset="0"/>
+              </a:rPr>
+              <a:t>Resources</a:t>
+            </a:r>
+          </a:p>
+          <a:p>
+            <a:pPr fontAlgn="ctr"/>
+            <a:r>
+              <a:rPr lang="en-US" dirty="0">
+                <a:hlinkClick r:id="rId3"/>
+              </a:rPr>
+              <a:t>sql-projects-devops-samples/Demos/2-ContinuousIntegration.md at main · Azure-Samples/</a:t>
+            </a:r>
+            <a:r>
+              <a:rPr lang="en-US" dirty="0" err="1">
+                <a:hlinkClick r:id="rId3"/>
+              </a:rPr>
+              <a:t>sql</a:t>
+            </a:r>
+            <a:r>
+              <a:rPr lang="en-US" dirty="0">
+                <a:hlinkClick r:id="rId3"/>
+              </a:rPr>
+              <a:t>-projects-</a:t>
+            </a:r>
+            <a:r>
+              <a:rPr lang="en-US" dirty="0" err="1">
+                <a:hlinkClick r:id="rId3"/>
+              </a:rPr>
+              <a:t>devops</a:t>
+            </a:r>
+            <a:r>
+              <a:rPr lang="en-US" dirty="0">
+                <a:hlinkClick r:id="rId3"/>
+              </a:rPr>
+              <a:t>-samples · GitHub</a:t>
+            </a:r>
+            <a:r>
+              <a:rPr lang="en-US" dirty="0"/>
+              <a:t> (CI/CD with containers)</a:t>
+            </a:r>
+          </a:p>
+          <a:p>
+            <a:pPr fontAlgn="ctr"/>
+            <a:r>
+              <a:rPr lang="en-US" dirty="0" err="1"/>
+              <a:t>.net</a:t>
+            </a:r>
+            <a:r>
+              <a:rPr lang="en-US" dirty="0"/>
+              <a:t> conf 2024 talk: </a:t>
+            </a:r>
+            <a:r>
+              <a:rPr lang="en-US" dirty="0">
+                <a:hlinkClick r:id="rId4"/>
+              </a:rPr>
+              <a:t>Next-gen SQL projects with </a:t>
+            </a:r>
+            <a:r>
+              <a:rPr lang="en-US" dirty="0" err="1">
+                <a:hlinkClick r:id="rId4"/>
+              </a:rPr>
+              <a:t>Microsoft.Build.Sql</a:t>
+            </a:r>
+            <a:endParaRPr lang="en-US" dirty="0"/>
+          </a:p>
+          <a:p>
+            <a:endParaRPr lang="en-US" sz="1700" dirty="0"/>
+          </a:p>
+        </p:txBody>
+      </p:sp>
+    </p:spTree>
+    <p:extLst>
+      <p:ext uri="{BB962C8B-B14F-4D97-AF65-F5344CB8AC3E}">
+        <p14:creationId xmlns:p14="http://schemas.microsoft.com/office/powerpoint/2010/main" val="2762649843"/>
+      </p:ext>
+    </p:extLst>
+  </p:cSld>
+  <p:clrMapOvr>
+    <a:masterClrMapping/>
+  </p:clrMapOvr>
+</p:sld>
+</file>
+
+<file path=ppt/slides/slide32.xml><?xml version="1.0" encoding="utf-8"?>
+<p:sld xmlns:a="http://schemas.openxmlformats.org/drawingml/2006/main" xmlns:r="http://schemas.openxmlformats.org/officeDocument/2006/relationships" xmlns:p="http://schemas.openxmlformats.org/presentationml/2006/main">
+  <p:cSld>
+    <p:bg>
+      <p:bgPr>
+        <a:solidFill>
+          <a:schemeClr val="bg1"/>
+        </a:solidFill>
+        <a:effectLst/>
+      </p:bgPr>
+    </p:bg>
+    <p:spTree>
+      <p:nvGrpSpPr>
+        <p:cNvPr id="1" name=""/>
+        <p:cNvGrpSpPr/>
+        <p:nvPr/>
+      </p:nvGrpSpPr>
+      <p:grpSpPr>
+        <a:xfrm>
+          <a:off x="0" y="0"/>
+          <a:ext cx="0" cy="0"/>
+          <a:chOff x="0" y="0"/>
+          <a:chExt cx="0" cy="0"/>
+        </a:xfrm>
+      </p:grpSpPr>
+      <p:sp useBgFill="1">
+        <p:nvSpPr>
+          <p:cNvPr id="8" name="Rectangle 7">
+            <a:extLst>
+              <a:ext uri="{FF2B5EF4-FFF2-40B4-BE49-F238E27FC236}">
+                <a16:creationId xmlns:a16="http://schemas.microsoft.com/office/drawing/2014/main" id="{777A147A-9ED8-46B4-8660-1B3C2AA880B5}"/>
+              </a:ext>
+              <a:ext uri="{C183D7F6-B498-43B3-948B-1728B52AA6E4}">
+                <adec:decorative xmlns:adec="http://schemas.microsoft.com/office/drawing/2017/decorative" val="1"/>
+              </a:ext>
+            </a:extLst>
+          </p:cNvPr>
+          <p:cNvSpPr>
+            <a:spLocks noGrp="1" noRot="1" noChangeAspect="1" noMove="1" noResize="1" noEditPoints="1" noAdjustHandles="1" noChangeArrowheads="1" noChangeShapeType="1" noTextEdit="1"/>
+          </p:cNvSpPr>
+          <p:nvPr>
+            <p:extLst>
+              <p:ext uri="{386F3935-93C4-4BCD-93E2-E3B085C9AB24}">
+                <p16:designElem xmlns:p16="http://schemas.microsoft.com/office/powerpoint/2015/main" val="1"/>
+              </p:ext>
+            </p:extLst>
+          </p:nvPr>
+        </p:nvSpPr>
+        <p:spPr>
+          <a:xfrm>
+            <a:off x="0" y="0"/>
+            <a:ext cx="12188952" cy="6858000"/>
+          </a:xfrm>
+          <a:prstGeom prst="rect">
+            <a:avLst/>
+          </a:prstGeom>
+          <a:ln>
+            <a:noFill/>
+          </a:ln>
+        </p:spPr>
+        <p:style>
+          <a:lnRef idx="2">
+            <a:schemeClr val="accent1">
+              <a:shade val="50000"/>
+            </a:schemeClr>
+          </a:lnRef>
+          <a:fillRef idx="1">
+            <a:schemeClr val="accent1"/>
+          </a:fillRef>
+          <a:effectRef idx="0">
+            <a:schemeClr val="accent1"/>
+          </a:effectRef>
+          <a:fontRef idx="minor">
+            <a:schemeClr val="lt1"/>
+          </a:fontRef>
+        </p:style>
+        <p:txBody>
+          <a:bodyPr rtlCol="0" anchor="ctr"/>
+          <a:lstStyle/>
+          <a:p>
+            <a:pPr algn="ctr"/>
+            <a:endParaRPr lang="en-US"/>
+          </a:p>
+        </p:txBody>
+      </p:sp>
+      <p:sp>
+        <p:nvSpPr>
+          <p:cNvPr id="2" name="Title 1">
+            <a:extLst>
+              <a:ext uri="{FF2B5EF4-FFF2-40B4-BE49-F238E27FC236}">
+                <a16:creationId xmlns:a16="http://schemas.microsoft.com/office/drawing/2014/main" id="{5E1647F5-9F62-325D-53BD-AB7FF4132B48}"/>
+              </a:ext>
+            </a:extLst>
+          </p:cNvPr>
+          <p:cNvSpPr>
+            <a:spLocks noGrp="1"/>
+          </p:cNvSpPr>
+          <p:nvPr>
+            <p:ph type="title"/>
+          </p:nvPr>
+        </p:nvSpPr>
+        <p:spPr>
+          <a:xfrm>
+            <a:off x="841248" y="548640"/>
+            <a:ext cx="3600860" cy="5431536"/>
+          </a:xfrm>
+        </p:spPr>
+        <p:txBody>
+          <a:bodyPr>
+            <a:normAutofit/>
+          </a:bodyPr>
+          <a:lstStyle/>
+          <a:p>
+            <a:r>
+              <a:rPr lang="en-US" sz="5400"/>
+              <a:t>SQL Projects for the Win!!!</a:t>
+            </a:r>
+          </a:p>
+        </p:txBody>
+      </p:sp>
+      <p:sp>
+        <p:nvSpPr>
+          <p:cNvPr id="10" name="sketch line">
+            <a:extLst>
+              <a:ext uri="{FF2B5EF4-FFF2-40B4-BE49-F238E27FC236}">
+                <a16:creationId xmlns:a16="http://schemas.microsoft.com/office/drawing/2014/main" id="{5D6C15A0-C087-4593-8414-2B4EC1CDC3DE}"/>
+              </a:ext>
+              <a:ext uri="{C183D7F6-B498-43B3-948B-1728B52AA6E4}">
+                <adec:decorative xmlns:adec="http://schemas.microsoft.com/office/drawing/2017/decorative" val="1"/>
+              </a:ext>
+            </a:extLst>
+          </p:cNvPr>
+          <p:cNvSpPr>
+            <a:spLocks noGrp="1" noRot="1" noChangeAspect="1" noMove="1" noResize="1" noEditPoints="1" noAdjustHandles="1" noChangeArrowheads="1" noChangeShapeType="1" noTextEdit="1"/>
+          </p:cNvSpPr>
+          <p:nvPr>
+            <p:extLst>
+              <p:ext uri="{386F3935-93C4-4BCD-93E2-E3B085C9AB24}">
+                <p16:designElem xmlns:p16="http://schemas.microsoft.com/office/powerpoint/2015/main" val="1"/>
+              </p:ext>
+            </p:extLst>
+          </p:nvPr>
+        </p:nvSpPr>
+        <p:spPr>
+          <a:xfrm rot="5400000">
+            <a:off x="2543983" y="3258715"/>
+            <a:ext cx="4480560" cy="18288"/>
+          </a:xfrm>
+          <a:custGeom>
+            <a:avLst/>
+            <a:gdLst>
+              <a:gd name="csX0" fmla="*/ 0 w 4480560"/>
+              <a:gd name="csY0" fmla="*/ 0 h 18288"/>
+              <a:gd name="csX1" fmla="*/ 595274 w 4480560"/>
+              <a:gd name="csY1" fmla="*/ 0 h 18288"/>
+              <a:gd name="csX2" fmla="*/ 1100938 w 4480560"/>
+              <a:gd name="csY2" fmla="*/ 0 h 18288"/>
+              <a:gd name="csX3" fmla="*/ 1651406 w 4480560"/>
+              <a:gd name="csY3" fmla="*/ 0 h 18288"/>
+              <a:gd name="csX4" fmla="*/ 2336292 w 4480560"/>
+              <a:gd name="csY4" fmla="*/ 0 h 18288"/>
+              <a:gd name="csX5" fmla="*/ 2931566 w 4480560"/>
+              <a:gd name="csY5" fmla="*/ 0 h 18288"/>
+              <a:gd name="csX6" fmla="*/ 3482035 w 4480560"/>
+              <a:gd name="csY6" fmla="*/ 0 h 18288"/>
+              <a:gd name="csX7" fmla="*/ 4480560 w 4480560"/>
+              <a:gd name="csY7" fmla="*/ 0 h 18288"/>
+              <a:gd name="csX8" fmla="*/ 4480560 w 4480560"/>
+              <a:gd name="csY8" fmla="*/ 18288 h 18288"/>
+              <a:gd name="csX9" fmla="*/ 3840480 w 4480560"/>
+              <a:gd name="csY9" fmla="*/ 18288 h 18288"/>
+              <a:gd name="csX10" fmla="*/ 3290011 w 4480560"/>
+              <a:gd name="csY10" fmla="*/ 18288 h 18288"/>
+              <a:gd name="csX11" fmla="*/ 2560320 w 4480560"/>
+              <a:gd name="csY11" fmla="*/ 18288 h 18288"/>
+              <a:gd name="csX12" fmla="*/ 1965046 w 4480560"/>
+              <a:gd name="csY12" fmla="*/ 18288 h 18288"/>
+              <a:gd name="csX13" fmla="*/ 1459382 w 4480560"/>
+              <a:gd name="csY13" fmla="*/ 18288 h 18288"/>
+              <a:gd name="csX14" fmla="*/ 774497 w 4480560"/>
+              <a:gd name="csY14" fmla="*/ 18288 h 18288"/>
+              <a:gd name="csX15" fmla="*/ 0 w 4480560"/>
+              <a:gd name="csY15" fmla="*/ 18288 h 18288"/>
+              <a:gd name="csX16" fmla="*/ 0 w 4480560"/>
+              <a:gd name="csY16" fmla="*/ 0 h 18288"/>
+            </a:gdLst>
+            <a:ahLst/>
+            <a:cxnLst>
+              <a:cxn ang="0">
+                <a:pos x="csX0" y="csY0"/>
+              </a:cxn>
+              <a:cxn ang="0">
+                <a:pos x="csX1" y="csY1"/>
+              </a:cxn>
+              <a:cxn ang="0">
+                <a:pos x="csX2" y="csY2"/>
+              </a:cxn>
+              <a:cxn ang="0">
+                <a:pos x="csX3" y="csY3"/>
+              </a:cxn>
+              <a:cxn ang="0">
+                <a:pos x="csX4" y="csY4"/>
+              </a:cxn>
+              <a:cxn ang="0">
+                <a:pos x="csX5" y="csY5"/>
+              </a:cxn>
+              <a:cxn ang="0">
+                <a:pos x="csX6" y="csY6"/>
+              </a:cxn>
+              <a:cxn ang="0">
+                <a:pos x="csX7" y="csY7"/>
+              </a:cxn>
+              <a:cxn ang="0">
+                <a:pos x="csX8" y="csY8"/>
+              </a:cxn>
+              <a:cxn ang="0">
+                <a:pos x="csX9" y="csY9"/>
+              </a:cxn>
+              <a:cxn ang="0">
+                <a:pos x="csX10" y="csY10"/>
+              </a:cxn>
+              <a:cxn ang="0">
+                <a:pos x="csX11" y="csY11"/>
+              </a:cxn>
+              <a:cxn ang="0">
+                <a:pos x="csX12" y="csY12"/>
+              </a:cxn>
+              <a:cxn ang="0">
+                <a:pos x="csX13" y="csY13"/>
+              </a:cxn>
+              <a:cxn ang="0">
+                <a:pos x="csX14" y="csY14"/>
+              </a:cxn>
+              <a:cxn ang="0">
+                <a:pos x="csX15" y="csY15"/>
+              </a:cxn>
+              <a:cxn ang="0">
+                <a:pos x="csX16" y="csY16"/>
+              </a:cxn>
+            </a:cxnLst>
+            <a:rect l="l" t="t" r="r" b="b"/>
+            <a:pathLst>
+              <a:path w="4480560" h="18288" fill="none" extrusionOk="0">
+                <a:moveTo>
+                  <a:pt x="0" y="0"/>
+                </a:moveTo>
+                <a:cubicBezTo>
+                  <a:pt x="267821" y="8731"/>
+                  <a:pt x="334105" y="2629"/>
+                  <a:pt x="595274" y="0"/>
+                </a:cubicBezTo>
+                <a:cubicBezTo>
+                  <a:pt x="856443" y="-2629"/>
+                  <a:pt x="863808" y="-13353"/>
+                  <a:pt x="1100938" y="0"/>
+                </a:cubicBezTo>
+                <a:cubicBezTo>
+                  <a:pt x="1338068" y="13353"/>
+                  <a:pt x="1431663" y="-25862"/>
+                  <a:pt x="1651406" y="0"/>
+                </a:cubicBezTo>
+                <a:cubicBezTo>
+                  <a:pt x="1871149" y="25862"/>
+                  <a:pt x="2173163" y="23827"/>
+                  <a:pt x="2336292" y="0"/>
+                </a:cubicBezTo>
+                <a:cubicBezTo>
+                  <a:pt x="2499421" y="-23827"/>
+                  <a:pt x="2720589" y="28148"/>
+                  <a:pt x="2931566" y="0"/>
+                </a:cubicBezTo>
+                <a:cubicBezTo>
+                  <a:pt x="3142543" y="-28148"/>
+                  <a:pt x="3323630" y="27022"/>
+                  <a:pt x="3482035" y="0"/>
+                </a:cubicBezTo>
+                <a:cubicBezTo>
+                  <a:pt x="3640440" y="-27022"/>
+                  <a:pt x="4012110" y="-20118"/>
+                  <a:pt x="4480560" y="0"/>
+                </a:cubicBezTo>
+                <a:cubicBezTo>
+                  <a:pt x="4480958" y="7429"/>
+                  <a:pt x="4480540" y="10822"/>
+                  <a:pt x="4480560" y="18288"/>
+                </a:cubicBezTo>
+                <a:cubicBezTo>
+                  <a:pt x="4314132" y="14924"/>
+                  <a:pt x="4028383" y="36632"/>
+                  <a:pt x="3840480" y="18288"/>
+                </a:cubicBezTo>
+                <a:cubicBezTo>
+                  <a:pt x="3652577" y="-56"/>
+                  <a:pt x="3547615" y="2848"/>
+                  <a:pt x="3290011" y="18288"/>
+                </a:cubicBezTo>
+                <a:cubicBezTo>
+                  <a:pt x="3032407" y="33728"/>
+                  <a:pt x="2830268" y="8719"/>
+                  <a:pt x="2560320" y="18288"/>
+                </a:cubicBezTo>
+                <a:cubicBezTo>
+                  <a:pt x="2290372" y="27857"/>
+                  <a:pt x="2147422" y="6728"/>
+                  <a:pt x="1965046" y="18288"/>
+                </a:cubicBezTo>
+                <a:cubicBezTo>
+                  <a:pt x="1782670" y="29848"/>
+                  <a:pt x="1689791" y="40680"/>
+                  <a:pt x="1459382" y="18288"/>
+                </a:cubicBezTo>
+                <a:cubicBezTo>
+                  <a:pt x="1228973" y="-4104"/>
+                  <a:pt x="915486" y="36501"/>
+                  <a:pt x="774497" y="18288"/>
+                </a:cubicBezTo>
+                <a:cubicBezTo>
+                  <a:pt x="633508" y="75"/>
+                  <a:pt x="361442" y="-11107"/>
+                  <a:pt x="0" y="18288"/>
+                </a:cubicBezTo>
+                <a:cubicBezTo>
+                  <a:pt x="-591" y="13205"/>
+                  <a:pt x="-663" y="6329"/>
+                  <a:pt x="0" y="0"/>
+                </a:cubicBezTo>
+                <a:close/>
+              </a:path>
+              <a:path w="4480560" h="18288" stroke="0" extrusionOk="0">
+                <a:moveTo>
+                  <a:pt x="0" y="0"/>
+                </a:moveTo>
+                <a:cubicBezTo>
+                  <a:pt x="285465" y="225"/>
+                  <a:pt x="322691" y="16223"/>
+                  <a:pt x="595274" y="0"/>
+                </a:cubicBezTo>
+                <a:cubicBezTo>
+                  <a:pt x="867857" y="-16223"/>
+                  <a:pt x="989129" y="-11242"/>
+                  <a:pt x="1100938" y="0"/>
+                </a:cubicBezTo>
+                <a:cubicBezTo>
+                  <a:pt x="1212747" y="11242"/>
+                  <a:pt x="1574350" y="-36410"/>
+                  <a:pt x="1830629" y="0"/>
+                </a:cubicBezTo>
+                <a:cubicBezTo>
+                  <a:pt x="2086908" y="36410"/>
+                  <a:pt x="2180922" y="4645"/>
+                  <a:pt x="2425903" y="0"/>
+                </a:cubicBezTo>
+                <a:cubicBezTo>
+                  <a:pt x="2670884" y="-4645"/>
+                  <a:pt x="2782024" y="22929"/>
+                  <a:pt x="3021178" y="0"/>
+                </a:cubicBezTo>
+                <a:cubicBezTo>
+                  <a:pt x="3260332" y="-22929"/>
+                  <a:pt x="3456982" y="-1586"/>
+                  <a:pt x="3750869" y="0"/>
+                </a:cubicBezTo>
+                <a:cubicBezTo>
+                  <a:pt x="4044756" y="1586"/>
+                  <a:pt x="4302726" y="17043"/>
+                  <a:pt x="4480560" y="0"/>
+                </a:cubicBezTo>
+                <a:cubicBezTo>
+                  <a:pt x="4479674" y="5429"/>
+                  <a:pt x="4481381" y="14046"/>
+                  <a:pt x="4480560" y="18288"/>
+                </a:cubicBezTo>
+                <a:cubicBezTo>
+                  <a:pt x="4279652" y="-6850"/>
+                  <a:pt x="4200762" y="41566"/>
+                  <a:pt x="3930091" y="18288"/>
+                </a:cubicBezTo>
+                <a:cubicBezTo>
+                  <a:pt x="3659420" y="-4990"/>
+                  <a:pt x="3456052" y="22294"/>
+                  <a:pt x="3290011" y="18288"/>
+                </a:cubicBezTo>
+                <a:cubicBezTo>
+                  <a:pt x="3123970" y="14282"/>
+                  <a:pt x="2882392" y="32818"/>
+                  <a:pt x="2649931" y="18288"/>
+                </a:cubicBezTo>
+                <a:cubicBezTo>
+                  <a:pt x="2417470" y="3758"/>
+                  <a:pt x="2238426" y="7337"/>
+                  <a:pt x="2054657" y="18288"/>
+                </a:cubicBezTo>
+                <a:cubicBezTo>
+                  <a:pt x="1870888" y="29239"/>
+                  <a:pt x="1566368" y="45040"/>
+                  <a:pt x="1324966" y="18288"/>
+                </a:cubicBezTo>
+                <a:cubicBezTo>
+                  <a:pt x="1083564" y="-8464"/>
+                  <a:pt x="787410" y="10946"/>
+                  <a:pt x="595274" y="18288"/>
+                </a:cubicBezTo>
+                <a:cubicBezTo>
+                  <a:pt x="403138" y="25630"/>
+                  <a:pt x="169622" y="10499"/>
+                  <a:pt x="0" y="18288"/>
+                </a:cubicBezTo>
+                <a:cubicBezTo>
+                  <a:pt x="668" y="13665"/>
+                  <a:pt x="578" y="5675"/>
+                  <a:pt x="0" y="0"/>
+                </a:cubicBezTo>
+                <a:close/>
+              </a:path>
+            </a:pathLst>
+          </a:custGeom>
+          <a:solidFill>
+            <a:schemeClr val="accent2"/>
+          </a:solidFill>
+          <a:ln w="41275" cap="rnd">
+            <a:solidFill>
+              <a:schemeClr val="accent2"/>
+            </a:solidFill>
+            <a:round/>
+            <a:extLst>
+              <a:ext uri="{C807C97D-BFC1-408E-A445-0C87EB9F89A2}">
+                <ask:lineSketchStyleProps xmlns:ask="http://schemas.microsoft.com/office/drawing/2018/sketchyshapes" sd="1219033472">
+                  <a:prstGeom prst="rect">
+                    <a:avLst/>
+                  </a:prstGeom>
+                  <ask:type>
+                    <ask:lineSketchFreehand/>
+                  </ask:type>
+                </ask:lineSketchStyleProps>
+              </a:ext>
+            </a:extLst>
+          </a:ln>
+        </p:spPr>
+        <p:style>
+          <a:lnRef idx="2">
+            <a:schemeClr val="accent1">
+              <a:shade val="50000"/>
+            </a:schemeClr>
+          </a:lnRef>
+          <a:fillRef idx="1">
+            <a:schemeClr val="accent1"/>
+          </a:fillRef>
+          <a:effectRef idx="0">
+            <a:schemeClr val="accent1"/>
+          </a:effectRef>
+          <a:fontRef idx="minor">
+            <a:schemeClr val="lt1"/>
+          </a:fontRef>
+        </p:style>
+        <p:txBody>
+          <a:bodyPr rtlCol="0" anchor="ctr"/>
+          <a:lstStyle/>
+          <a:p>
+            <a:pPr algn="ctr"/>
+            <a:endParaRPr lang="en-US"/>
+          </a:p>
+        </p:txBody>
+      </p:sp>
+      <p:sp>
+        <p:nvSpPr>
+          <p:cNvPr id="3" name="Content Placeholder 2">
+            <a:extLst>
+              <a:ext uri="{FF2B5EF4-FFF2-40B4-BE49-F238E27FC236}">
+                <a16:creationId xmlns:a16="http://schemas.microsoft.com/office/drawing/2014/main" id="{1BBC1F27-5C52-251A-88F6-6A903623B483}"/>
+              </a:ext>
+            </a:extLst>
+          </p:cNvPr>
+          <p:cNvSpPr>
+            <a:spLocks noGrp="1"/>
+          </p:cNvSpPr>
+          <p:nvPr>
+            <p:ph idx="1"/>
+          </p:nvPr>
+        </p:nvSpPr>
+        <p:spPr>
+          <a:xfrm>
+            <a:off x="5126418" y="552091"/>
+            <a:ext cx="6224335" cy="5431536"/>
+          </a:xfrm>
+        </p:spPr>
+        <p:txBody>
+          <a:bodyPr anchor="ctr">
+            <a:normAutofit/>
+          </a:bodyPr>
+          <a:lstStyle/>
+          <a:p>
             <a:r>
               <a:rPr lang="en-US" sz="2200"/>
               <a:t>Declarative way to define your databases.</a:t>
@@ -29062,7 +29205,7 @@
 </p:sld>
 </file>
 
-<file path=ppt/slides/slide32.xml><?xml version="1.0" encoding="utf-8"?>
+<file path=ppt/slides/slide33.xml><?xml version="1.0" encoding="utf-8"?>
 <p:sld xmlns:a="http://schemas.openxmlformats.org/drawingml/2006/main" xmlns:r="http://schemas.openxmlformats.org/officeDocument/2006/relationships" xmlns:p="http://schemas.openxmlformats.org/presentationml/2006/main">
   <p:cSld>
     <p:bg>
@@ -29880,7 +30023,7 @@
 </p:sld>
 </file>
 
-<file path=ppt/slides/slide33.xml><?xml version="1.0" encoding="utf-8"?>
+<file path=ppt/slides/slide34.xml><?xml version="1.0" encoding="utf-8"?>
 <p:sld xmlns:a="http://schemas.openxmlformats.org/drawingml/2006/main" xmlns:r="http://schemas.openxmlformats.org/officeDocument/2006/relationships" xmlns:p="http://schemas.openxmlformats.org/presentationml/2006/main">
   <p:cSld>
     <p:spTree>

--- a/slides/VS sql project - sql saturday 2025.pptx
+++ b/slides/VS sql project - sql saturday 2025.pptx
@@ -3959,7 +3959,7 @@
           <a:p>
             <a:fld id="{B80220B6-429B-4346-82FA-969B751203E9}" type="datetimeFigureOut">
               <a:rPr lang="en-US" smtClean="0"/>
-              <a:t>4/27/2026</a:t>
+              <a:t>4/28/2026</a:t>
             </a:fld>
             <a:endParaRPr lang="en-US"/>
           </a:p>
@@ -9005,7 +9005,7 @@
           <a:p>
             <a:fld id="{714D8E22-EC7C-4185-AE99-0F7C1FB157B6}" type="datetimeFigureOut">
               <a:rPr lang="en-US" smtClean="0"/>
-              <a:t>4/27/2026</a:t>
+              <a:t>4/28/2026</a:t>
             </a:fld>
             <a:endParaRPr lang="en-US"/>
           </a:p>
@@ -9203,7 +9203,7 @@
           <a:p>
             <a:fld id="{714D8E22-EC7C-4185-AE99-0F7C1FB157B6}" type="datetimeFigureOut">
               <a:rPr lang="en-US" smtClean="0"/>
-              <a:t>4/27/2026</a:t>
+              <a:t>4/28/2026</a:t>
             </a:fld>
             <a:endParaRPr lang="en-US"/>
           </a:p>
@@ -9411,7 +9411,7 @@
           <a:p>
             <a:fld id="{714D8E22-EC7C-4185-AE99-0F7C1FB157B6}" type="datetimeFigureOut">
               <a:rPr lang="en-US" smtClean="0"/>
-              <a:t>4/27/2026</a:t>
+              <a:t>4/28/2026</a:t>
             </a:fld>
             <a:endParaRPr lang="en-US"/>
           </a:p>
@@ -9609,7 +9609,7 @@
           <a:p>
             <a:fld id="{714D8E22-EC7C-4185-AE99-0F7C1FB157B6}" type="datetimeFigureOut">
               <a:rPr lang="en-US" smtClean="0"/>
-              <a:t>4/27/2026</a:t>
+              <a:t>4/28/2026</a:t>
             </a:fld>
             <a:endParaRPr lang="en-US"/>
           </a:p>
@@ -9884,7 +9884,7 @@
           <a:p>
             <a:fld id="{714D8E22-EC7C-4185-AE99-0F7C1FB157B6}" type="datetimeFigureOut">
               <a:rPr lang="en-US" smtClean="0"/>
-              <a:t>4/27/2026</a:t>
+              <a:t>4/28/2026</a:t>
             </a:fld>
             <a:endParaRPr lang="en-US"/>
           </a:p>
@@ -10149,7 +10149,7 @@
           <a:p>
             <a:fld id="{714D8E22-EC7C-4185-AE99-0F7C1FB157B6}" type="datetimeFigureOut">
               <a:rPr lang="en-US" smtClean="0"/>
-              <a:t>4/27/2026</a:t>
+              <a:t>4/28/2026</a:t>
             </a:fld>
             <a:endParaRPr lang="en-US"/>
           </a:p>
@@ -10561,7 +10561,7 @@
           <a:p>
             <a:fld id="{714D8E22-EC7C-4185-AE99-0F7C1FB157B6}" type="datetimeFigureOut">
               <a:rPr lang="en-US" smtClean="0"/>
-              <a:t>4/27/2026</a:t>
+              <a:t>4/28/2026</a:t>
             </a:fld>
             <a:endParaRPr lang="en-US"/>
           </a:p>
@@ -10702,7 +10702,7 @@
           <a:p>
             <a:fld id="{714D8E22-EC7C-4185-AE99-0F7C1FB157B6}" type="datetimeFigureOut">
               <a:rPr lang="en-US" smtClean="0"/>
-              <a:t>4/27/2026</a:t>
+              <a:t>4/28/2026</a:t>
             </a:fld>
             <a:endParaRPr lang="en-US"/>
           </a:p>
@@ -10815,7 +10815,7 @@
           <a:p>
             <a:fld id="{714D8E22-EC7C-4185-AE99-0F7C1FB157B6}" type="datetimeFigureOut">
               <a:rPr lang="en-US" smtClean="0"/>
-              <a:t>4/27/2026</a:t>
+              <a:t>4/28/2026</a:t>
             </a:fld>
             <a:endParaRPr lang="en-US"/>
           </a:p>
@@ -11126,7 +11126,7 @@
           <a:p>
             <a:fld id="{714D8E22-EC7C-4185-AE99-0F7C1FB157B6}" type="datetimeFigureOut">
               <a:rPr lang="en-US" smtClean="0"/>
-              <a:t>4/27/2026</a:t>
+              <a:t>4/28/2026</a:t>
             </a:fld>
             <a:endParaRPr lang="en-US"/>
           </a:p>
@@ -11414,7 +11414,7 @@
           <a:p>
             <a:fld id="{714D8E22-EC7C-4185-AE99-0F7C1FB157B6}" type="datetimeFigureOut">
               <a:rPr lang="en-US" smtClean="0"/>
-              <a:t>4/27/2026</a:t>
+              <a:t>4/28/2026</a:t>
             </a:fld>
             <a:endParaRPr lang="en-US"/>
           </a:p>
@@ -11655,7 +11655,7 @@
           <a:p>
             <a:fld id="{714D8E22-EC7C-4185-AE99-0F7C1FB157B6}" type="datetimeFigureOut">
               <a:rPr lang="en-US" smtClean="0"/>
-              <a:t>4/27/2026</a:t>
+              <a:t>4/28/2026</a:t>
             </a:fld>
             <a:endParaRPr lang="en-US"/>
           </a:p>
@@ -33391,7 +33391,7 @@
         </p:spPr>
         <p:txBody>
           <a:bodyPr>
-            <a:normAutofit fontScale="92500" lnSpcReduction="10000"/>
+            <a:normAutofit/>
           </a:bodyPr>
           <a:lstStyle/>
           <a:p>
@@ -33459,9 +33459,17 @@
             </a:r>
           </a:p>
           <a:p>
+            <a:pPr lvl="1"/>
             <a:r>
               <a:rPr lang="en-US" sz="1700" dirty="0"/>
-              <a:t>Folder organization</a:t>
+              <a:t>Source Control</a:t>
+            </a:r>
+          </a:p>
+          <a:p>
+            <a:pPr lvl="1"/>
+            <a:r>
+              <a:rPr lang="en-US" sz="1700" dirty="0"/>
+              <a:t>Folder Organization</a:t>
             </a:r>
           </a:p>
           <a:p>
@@ -33475,19 +33483,7 @@
             </a:r>
             <a:r>
               <a:rPr lang="en-US" sz="1700" dirty="0"/>
-              <a:t> per project</a:t>
-            </a:r>
-          </a:p>
-          <a:p>
-            <a:r>
-              <a:rPr lang="en-US" sz="1700" dirty="0"/>
-              <a:t>Source control</a:t>
-            </a:r>
-          </a:p>
-          <a:p>
-            <a:r>
-              <a:rPr lang="en-US" sz="1700" dirty="0"/>
-              <a:t>“New Item” menu, examples:</a:t>
+              <a:t> per project “New Item” menu, examples:</a:t>
             </a:r>
           </a:p>
           <a:p>
